--- a/matome/articles-4/articles-4-slides.pptx
+++ b/matome/articles-4/articles-4-slides.pptx
@@ -12883,7 +12883,7 @@
         <p:spPr>
           <a:xfrm>
             <a:off x="1143000" y="3219450"/>
-            <a:ext cx="1181100" cy="457200"/>
+            <a:ext cx="2181225" cy="457200"/>
           </a:xfrm>
           <a:prstGeom prst="roundRect">
             <a:avLst>
@@ -12905,7 +12905,7 @@
         <p:spPr>
           <a:xfrm>
             <a:off x="1333500" y="3295650"/>
-            <a:ext cx="1266825" cy="285750"/>
+            <a:ext cx="2409825" cy="285750"/>
           </a:xfrm>
           <a:prstGeom prst="rect">
             <a:avLst/>
@@ -12926,7 +12926,7 @@
                 <a:latin typeface="Noto Sans JP"/>
                 <a:ea typeface="Noto Sans JP"/>
               </a:rPr>
-              <a:t>複数名詞</a:t>
+              <a:t>複数名詞（〜全般）</a:t>
             </a:r>
           </a:p>
         </p:txBody>
@@ -12939,8 +12939,8 @@
         </p:nvSpPr>
         <p:spPr>
           <a:xfrm>
-            <a:off x="2419350" y="3219450"/>
-            <a:ext cx="1247775" cy="457200"/>
+            <a:off x="3419475" y="3219450"/>
+            <a:ext cx="2981325" cy="457200"/>
           </a:xfrm>
           <a:prstGeom prst="roundRect">
             <a:avLst>
@@ -12961,29 +12961,29 @@
         </p:nvSpPr>
         <p:spPr>
           <a:xfrm>
-            <a:off x="2609850" y="3324225"/>
-            <a:ext cx="1343025" cy="266700"/>
-          </a:xfrm>
-          <a:prstGeom prst="rect">
-            <a:avLst/>
-          </a:prstGeom>
-          <a:noFill/>
-          <a:ln/>
-        </p:spPr>
-        <p:txBody>
-          <a:bodyPr wrap="square" lIns="0" tIns="0" rIns="0" bIns="0" anchor="ctr"/>
-          <a:lstStyle/>
-          <a:p>
-            <a:pPr/>
-            <a:r>
-              <a:rPr sz="1600" b="1">
+            <a:off x="3609975" y="3295650"/>
+            <a:ext cx="3333750" cy="285750"/>
+          </a:xfrm>
+          <a:prstGeom prst="rect">
+            <a:avLst/>
+          </a:prstGeom>
+          <a:noFill/>
+          <a:ln/>
+        </p:spPr>
+        <p:txBody>
+          <a:bodyPr wrap="square" lIns="0" tIns="0" rIns="0" bIns="0" anchor="ctr"/>
+          <a:lstStyle/>
+          <a:p>
+            <a:pPr/>
+            <a:r>
+              <a:rPr sz="1600">
                 <a:solidFill>
                   <a:srgbClr val="1C2340"/>
                 </a:solidFill>
-                <a:latin typeface="DM Sans"/>
-                <a:ea typeface="DM Sans"/>
-              </a:rPr>
-              <a:t>furniture</a:t>
+                <a:latin typeface="Noto Sans JP"/>
+                <a:ea typeface="Noto Sans JP"/>
+              </a:rPr>
+              <a:t>数えられない名詞（〜全般）</a:t>
             </a:r>
           </a:p>
         </p:txBody>
@@ -12996,7 +12996,7 @@
         </p:nvSpPr>
         <p:spPr>
           <a:xfrm>
-            <a:off x="3762375" y="3219450"/>
+            <a:off x="6496050" y="3219450"/>
             <a:ext cx="3562350" cy="457200"/>
           </a:xfrm>
           <a:prstGeom prst="roundRect">
@@ -13018,7 +13018,7 @@
         </p:nvSpPr>
         <p:spPr>
           <a:xfrm>
-            <a:off x="3952875" y="3295650"/>
+            <a:off x="6686550" y="3295650"/>
             <a:ext cx="4000500" cy="295275"/>
           </a:xfrm>
           <a:prstGeom prst="rect">
@@ -13075,7 +13075,7 @@
         </p:nvSpPr>
         <p:spPr>
           <a:xfrm>
-            <a:off x="7419975" y="3219450"/>
+            <a:off x="10153650" y="3219450"/>
             <a:ext cx="781050" cy="457200"/>
           </a:xfrm>
           <a:prstGeom prst="roundRect">
@@ -13097,7 +13097,7 @@
         </p:nvSpPr>
         <p:spPr>
           <a:xfrm>
-            <a:off x="7610475" y="3295650"/>
+            <a:off x="10344150" y="3295650"/>
             <a:ext cx="800100" cy="285750"/>
           </a:xfrm>
           <a:prstGeom prst="rect">
@@ -13132,8 +13132,8 @@
         </p:nvSpPr>
         <p:spPr>
           <a:xfrm>
-            <a:off x="8296275" y="3219450"/>
-            <a:ext cx="781050" cy="457200"/>
+            <a:off x="1143000" y="3771900"/>
+            <a:ext cx="781050" cy="447675"/>
           </a:xfrm>
           <a:prstGeom prst="roundRect">
             <a:avLst>
@@ -13154,7 +13154,7 @@
         </p:nvSpPr>
         <p:spPr>
           <a:xfrm>
-            <a:off x="8486775" y="3295650"/>
+            <a:off x="1333500" y="3848100"/>
             <a:ext cx="800100" cy="285750"/>
           </a:xfrm>
           <a:prstGeom prst="rect">
@@ -13207,7 +13207,7 @@
       </p:pic>
       <p:pic>
         <p:nvPicPr>
-          <p:cNvPr id="20" name="Image 1" descr="/home/user/hina-english/matome/img/furniture.png">    </p:cNvPr>
+          <p:cNvPr id="20" name="Image 1" descr="/home/user/hina-english/matome/img/music.png">    </p:cNvPr>
           <p:cNvPicPr>
             <a:picLocks noChangeAspect="1"/>
           </p:cNvPicPr>
@@ -13231,7 +13231,7 @@
       </p:pic>
       <p:pic>
         <p:nvPicPr>
-          <p:cNvPr id="21" name="Image 2" descr="/home/user/hina-english/matome/img/eiffel.png">    </p:cNvPr>
+          <p:cNvPr id="21" name="Image 2" descr="/home/user/hina-english/matome/img/flag-usa.png">    </p:cNvPr>
           <p:cNvPicPr>
             <a:picLocks noChangeAspect="1"/>
           </p:cNvPicPr>
@@ -15309,39 +15309,28 @@
         <p:spPr>
           <a:xfrm>
             <a:off x="1809750" y="5581650"/>
-            <a:ext cx="4552950" cy="333375"/>
-          </a:xfrm>
-          <a:prstGeom prst="rect">
-            <a:avLst/>
-          </a:prstGeom>
-          <a:noFill/>
-          <a:ln/>
-        </p:spPr>
-        <p:txBody>
-          <a:bodyPr wrap="square" lIns="0" tIns="0" rIns="0" bIns="0" anchor="ctr"/>
-          <a:lstStyle/>
-          <a:p>
-            <a:pPr/>
-            <a:r>
-              <a:rPr sz="1800" b="1">
+            <a:ext cx="5448300" cy="333375"/>
+          </a:xfrm>
+          <a:prstGeom prst="rect">
+            <a:avLst/>
+          </a:prstGeom>
+          <a:noFill/>
+          <a:ln/>
+        </p:spPr>
+        <p:txBody>
+          <a:bodyPr wrap="square" lIns="0" tIns="0" rIns="0" bIns="0" anchor="ctr"/>
+          <a:lstStyle/>
+          <a:p>
+            <a:pPr/>
+            <a:r>
+              <a:rPr sz="1800">
                 <a:solidFill>
                   <a:srgbClr val="1C2340"/>
                 </a:solidFill>
-                <a:latin typeface="DM Sans"/>
-                <a:ea typeface="DM Sans"/>
-              </a:rPr>
-              <a:t>dogs</a:t>
-            </a:r>
-            <a:pPr/>
-            <a:r>
-              <a:rPr sz="1800">
-                <a:solidFill>
-                  <a:srgbClr val="1C2340"/>
-                </a:solidFill>
-                <a:latin typeface="Noto Sans JP"/>
-                <a:ea typeface="Noto Sans JP"/>
-              </a:rPr>
-              <a:t> は複数名詞なので → </a:t>
+                <a:latin typeface="Noto Sans JP"/>
+                <a:ea typeface="Noto Sans JP"/>
+              </a:rPr>
+              <a:t>犬全般の話（複数名詞）なので → </a:t>
             </a:r>
             <a:pPr/>
             <a:r>
@@ -16550,7 +16539,7 @@
         <p:spPr>
           <a:xfrm>
             <a:off x="1809750" y="5581650"/>
-            <a:ext cx="8743950" cy="333375"/>
+            <a:ext cx="9277350" cy="333375"/>
           </a:xfrm>
           <a:prstGeom prst="rect">
             <a:avLst/>
@@ -16582,7 +16571,7 @@
                 <a:latin typeface="Noto Sans JP"/>
                 <a:ea typeface="Noto Sans JP"/>
               </a:rPr>
-              <a:t> は家具をまとめて指す、数えられない名詞なので → </a:t>
+              <a:t> は数えられない名詞で、特定の家具の話でもないので → </a:t>
             </a:r>
             <a:pPr/>
             <a:r>
@@ -16804,7 +16793,7 @@
       </p:sp>
       <p:pic>
         <p:nvPicPr>
-          <p:cNvPr id="8" name="Image 0" descr="/home/user/hina-english/matome/img/torii.png">    </p:cNvPr>
+          <p:cNvPr id="8" name="Image 0" descr="/home/user/hina-english/matome/img/flag-japan.png">    </p:cNvPr>
           <p:cNvPicPr>
             <a:picLocks noChangeAspect="1"/>
           </p:cNvPicPr>
@@ -17427,7 +17416,7 @@
       </p:sp>
       <p:pic>
         <p:nvPicPr>
-          <p:cNvPr id="8" name="Image 0" descr="/home/user/hina-english/matome/img/torii.png">    </p:cNvPr>
+          <p:cNvPr id="8" name="Image 0" descr="/home/user/hina-english/matome/img/flag-japan.png">    </p:cNvPr>
           <p:cNvPicPr>
             <a:picLocks noChangeAspect="1"/>
           </p:cNvPicPr>

--- a/matome/articles-4/articles-4-slides.pptx
+++ b/matome/articles-4/articles-4-slides.pptx
@@ -62,6 +62,16 @@
     <p:sldId id="310" r:id="rId56"/>
     <p:sldId id="311" r:id="rId57"/>
     <p:sldId id="312" r:id="rId58"/>
+    <p:sldId id="313" r:id="rId59"/>
+    <p:sldId id="314" r:id="rId60"/>
+    <p:sldId id="315" r:id="rId61"/>
+    <p:sldId id="316" r:id="rId62"/>
+    <p:sldId id="317" r:id="rId63"/>
+    <p:sldId id="318" r:id="rId64"/>
+    <p:sldId id="319" r:id="rId65"/>
+    <p:sldId id="320" r:id="rId66"/>
+    <p:sldId id="321" r:id="rId67"/>
+    <p:sldId id="322" r:id="rId68"/>
   </p:sldIdLst>
   <p:sldSz cx="12192000" cy="6858000"/>
   <p:notesSz cx="6858000" cy="12192000"/>
@@ -624,7 +634,7 @@
                 <a:latin typeface="Noto Sans JP"/>
                 <a:ea typeface="Noto Sans JP"/>
               </a:rPr>
-              <a:t>全25問 一緒に声に出して練習しよう！</a:t>
+              <a:t>全30問 一緒に声に出して練習しよう！</a:t>
             </a:r>
           </a:p>
         </p:txBody>
@@ -1859,41 +1869,6 @@
           </a:p>
         </p:txBody>
       </p:sp>
-      <p:sp>
-        <p:nvSpPr>
-          <p:cNvPr id="21" name=""/>
-          <p:cNvSpPr txBox="1"/>
-          <p:nvPr/>
-        </p:nvSpPr>
-        <p:spPr>
-          <a:xfrm>
-            <a:off x="5162550" y="5314950"/>
-            <a:ext cx="4000500" cy="381000"/>
-          </a:xfrm>
-          <a:prstGeom prst="rect">
-            <a:avLst/>
-          </a:prstGeom>
-          <a:noFill/>
-          <a:ln/>
-        </p:spPr>
-        <p:txBody>
-          <a:bodyPr wrap="square" lIns="0" tIns="0" rIns="0" bIns="0" anchor="ctr"/>
-          <a:lstStyle/>
-          <a:p>
-            <a:pPr/>
-            <a:r>
-              <a:rPr sz="2100" b="1">
-                <a:solidFill>
-                  <a:srgbClr val="1C2340"/>
-                </a:solidFill>
-                <a:latin typeface="Noto Sans JP"/>
-                <a:ea typeface="Noto Sans JP"/>
-              </a:rPr>
-              <a:t>声に出して答えてみよう！</a:t>
-            </a:r>
-          </a:p>
-        </p:txBody>
-      </p:sp>
     </p:spTree>
   </p:cSld>
   <p:clrMapOvr>
@@ -3100,41 +3075,6 @@
           </a:p>
         </p:txBody>
       </p:sp>
-      <p:sp>
-        <p:nvSpPr>
-          <p:cNvPr id="21" name=""/>
-          <p:cNvSpPr txBox="1"/>
-          <p:nvPr/>
-        </p:nvSpPr>
-        <p:spPr>
-          <a:xfrm>
-            <a:off x="5162550" y="5314950"/>
-            <a:ext cx="4000500" cy="381000"/>
-          </a:xfrm>
-          <a:prstGeom prst="rect">
-            <a:avLst/>
-          </a:prstGeom>
-          <a:noFill/>
-          <a:ln/>
-        </p:spPr>
-        <p:txBody>
-          <a:bodyPr wrap="square" lIns="0" tIns="0" rIns="0" bIns="0" anchor="ctr"/>
-          <a:lstStyle/>
-          <a:p>
-            <a:pPr/>
-            <a:r>
-              <a:rPr sz="2100" b="1">
-                <a:solidFill>
-                  <a:srgbClr val="1C2340"/>
-                </a:solidFill>
-                <a:latin typeface="Noto Sans JP"/>
-                <a:ea typeface="Noto Sans JP"/>
-              </a:rPr>
-              <a:t>声に出して答えてみよう！</a:t>
-            </a:r>
-          </a:p>
-        </p:txBody>
-      </p:sp>
     </p:spTree>
   </p:cSld>
   <p:clrMapOvr>
@@ -4291,41 +4231,6 @@
                 <a:ea typeface="Noto Sans JP"/>
               </a:rPr>
               <a:t>なし</a:t>
-            </a:r>
-          </a:p>
-        </p:txBody>
-      </p:sp>
-      <p:sp>
-        <p:nvSpPr>
-          <p:cNvPr id="20" name=""/>
-          <p:cNvSpPr txBox="1"/>
-          <p:nvPr/>
-        </p:nvSpPr>
-        <p:spPr>
-          <a:xfrm>
-            <a:off x="5162550" y="5314950"/>
-            <a:ext cx="4000500" cy="381000"/>
-          </a:xfrm>
-          <a:prstGeom prst="rect">
-            <a:avLst/>
-          </a:prstGeom>
-          <a:noFill/>
-          <a:ln/>
-        </p:spPr>
-        <p:txBody>
-          <a:bodyPr wrap="square" lIns="0" tIns="0" rIns="0" bIns="0" anchor="ctr"/>
-          <a:lstStyle/>
-          <a:p>
-            <a:pPr/>
-            <a:r>
-              <a:rPr sz="2100" b="1">
-                <a:solidFill>
-                  <a:srgbClr val="1C2340"/>
-                </a:solidFill>
-                <a:latin typeface="Noto Sans JP"/>
-                <a:ea typeface="Noto Sans JP"/>
-              </a:rPr>
-              <a:t>声に出して答えてみよう！</a:t>
             </a:r>
           </a:p>
         </p:txBody>
@@ -6040,41 +5945,6 @@
           </a:p>
         </p:txBody>
       </p:sp>
-      <p:sp>
-        <p:nvSpPr>
-          <p:cNvPr id="21" name=""/>
-          <p:cNvSpPr txBox="1"/>
-          <p:nvPr/>
-        </p:nvSpPr>
-        <p:spPr>
-          <a:xfrm>
-            <a:off x="5162550" y="5314950"/>
-            <a:ext cx="4000500" cy="381000"/>
-          </a:xfrm>
-          <a:prstGeom prst="rect">
-            <a:avLst/>
-          </a:prstGeom>
-          <a:noFill/>
-          <a:ln/>
-        </p:spPr>
-        <p:txBody>
-          <a:bodyPr wrap="square" lIns="0" tIns="0" rIns="0" bIns="0" anchor="ctr"/>
-          <a:lstStyle/>
-          <a:p>
-            <a:pPr/>
-            <a:r>
-              <a:rPr sz="2100" b="1">
-                <a:solidFill>
-                  <a:srgbClr val="1C2340"/>
-                </a:solidFill>
-                <a:latin typeface="Noto Sans JP"/>
-                <a:ea typeface="Noto Sans JP"/>
-              </a:rPr>
-              <a:t>声に出して答えてみよう！</a:t>
-            </a:r>
-          </a:p>
-        </p:txBody>
-      </p:sp>
     </p:spTree>
   </p:cSld>
   <p:clrMapOvr>
@@ -8178,41 +8048,6 @@
           </a:p>
         </p:txBody>
       </p:sp>
-      <p:sp>
-        <p:nvSpPr>
-          <p:cNvPr id="21" name=""/>
-          <p:cNvSpPr txBox="1"/>
-          <p:nvPr/>
-        </p:nvSpPr>
-        <p:spPr>
-          <a:xfrm>
-            <a:off x="5162550" y="5314950"/>
-            <a:ext cx="4000500" cy="381000"/>
-          </a:xfrm>
-          <a:prstGeom prst="rect">
-            <a:avLst/>
-          </a:prstGeom>
-          <a:noFill/>
-          <a:ln/>
-        </p:spPr>
-        <p:txBody>
-          <a:bodyPr wrap="square" lIns="0" tIns="0" rIns="0" bIns="0" anchor="ctr"/>
-          <a:lstStyle/>
-          <a:p>
-            <a:pPr/>
-            <a:r>
-              <a:rPr sz="2100" b="1">
-                <a:solidFill>
-                  <a:srgbClr val="1C2340"/>
-                </a:solidFill>
-                <a:latin typeface="Noto Sans JP"/>
-                <a:ea typeface="Noto Sans JP"/>
-              </a:rPr>
-              <a:t>声に出して答えてみよう！</a:t>
-            </a:r>
-          </a:p>
-        </p:txBody>
-      </p:sp>
     </p:spTree>
   </p:cSld>
   <p:clrMapOvr>
@@ -9443,41 +9278,6 @@
           </a:p>
         </p:txBody>
       </p:sp>
-      <p:sp>
-        <p:nvSpPr>
-          <p:cNvPr id="22" name=""/>
-          <p:cNvSpPr txBox="1"/>
-          <p:nvPr/>
-        </p:nvSpPr>
-        <p:spPr>
-          <a:xfrm>
-            <a:off x="5162550" y="5314950"/>
-            <a:ext cx="4000500" cy="381000"/>
-          </a:xfrm>
-          <a:prstGeom prst="rect">
-            <a:avLst/>
-          </a:prstGeom>
-          <a:noFill/>
-          <a:ln/>
-        </p:spPr>
-        <p:txBody>
-          <a:bodyPr wrap="square" lIns="0" tIns="0" rIns="0" bIns="0" anchor="ctr"/>
-          <a:lstStyle/>
-          <a:p>
-            <a:pPr/>
-            <a:r>
-              <a:rPr sz="2100" b="1">
-                <a:solidFill>
-                  <a:srgbClr val="1C2340"/>
-                </a:solidFill>
-                <a:latin typeface="Noto Sans JP"/>
-                <a:ea typeface="Noto Sans JP"/>
-              </a:rPr>
-              <a:t>声に出して答えてみよう！</a:t>
-            </a:r>
-          </a:p>
-        </p:txBody>
-      </p:sp>
     </p:spTree>
   </p:cSld>
   <p:clrMapOvr>
@@ -10719,41 +10519,6 @@
           </a:p>
         </p:txBody>
       </p:sp>
-      <p:sp>
-        <p:nvSpPr>
-          <p:cNvPr id="21" name=""/>
-          <p:cNvSpPr txBox="1"/>
-          <p:nvPr/>
-        </p:nvSpPr>
-        <p:spPr>
-          <a:xfrm>
-            <a:off x="5162550" y="5314950"/>
-            <a:ext cx="4000500" cy="381000"/>
-          </a:xfrm>
-          <a:prstGeom prst="rect">
-            <a:avLst/>
-          </a:prstGeom>
-          <a:noFill/>
-          <a:ln/>
-        </p:spPr>
-        <p:txBody>
-          <a:bodyPr wrap="square" lIns="0" tIns="0" rIns="0" bIns="0" anchor="ctr"/>
-          <a:lstStyle/>
-          <a:p>
-            <a:pPr/>
-            <a:r>
-              <a:rPr sz="2100" b="1">
-                <a:solidFill>
-                  <a:srgbClr val="1C2340"/>
-                </a:solidFill>
-                <a:latin typeface="Noto Sans JP"/>
-                <a:ea typeface="Noto Sans JP"/>
-              </a:rPr>
-              <a:t>声に出して答えてみよう！</a:t>
-            </a:r>
-          </a:p>
-        </p:txBody>
-      </p:sp>
     </p:spTree>
   </p:cSld>
   <p:clrMapOvr>
@@ -11956,41 +11721,6 @@
                 <a:ea typeface="Noto Sans JP"/>
               </a:rPr>
               <a:t>なし</a:t>
-            </a:r>
-          </a:p>
-        </p:txBody>
-      </p:sp>
-      <p:sp>
-        <p:nvSpPr>
-          <p:cNvPr id="21" name=""/>
-          <p:cNvSpPr txBox="1"/>
-          <p:nvPr/>
-        </p:nvSpPr>
-        <p:spPr>
-          <a:xfrm>
-            <a:off x="5162550" y="5314950"/>
-            <a:ext cx="4000500" cy="381000"/>
-          </a:xfrm>
-          <a:prstGeom prst="rect">
-            <a:avLst/>
-          </a:prstGeom>
-          <a:noFill/>
-          <a:ln/>
-        </p:spPr>
-        <p:txBody>
-          <a:bodyPr wrap="square" lIns="0" tIns="0" rIns="0" bIns="0" anchor="ctr"/>
-          <a:lstStyle/>
-          <a:p>
-            <a:pPr/>
-            <a:r>
-              <a:rPr sz="2100" b="1">
-                <a:solidFill>
-                  <a:srgbClr val="1C2340"/>
-                </a:solidFill>
-                <a:latin typeface="Noto Sans JP"/>
-                <a:ea typeface="Noto Sans JP"/>
-              </a:rPr>
-              <a:t>声に出して答えてみよう！</a:t>
             </a:r>
           </a:p>
         </p:txBody>
@@ -13865,41 +13595,6 @@
           </a:p>
         </p:txBody>
       </p:sp>
-      <p:sp>
-        <p:nvSpPr>
-          <p:cNvPr id="21" name=""/>
-          <p:cNvSpPr txBox="1"/>
-          <p:nvPr/>
-        </p:nvSpPr>
-        <p:spPr>
-          <a:xfrm>
-            <a:off x="5162550" y="5314950"/>
-            <a:ext cx="4000500" cy="381000"/>
-          </a:xfrm>
-          <a:prstGeom prst="rect">
-            <a:avLst/>
-          </a:prstGeom>
-          <a:noFill/>
-          <a:ln/>
-        </p:spPr>
-        <p:txBody>
-          <a:bodyPr wrap="square" lIns="0" tIns="0" rIns="0" bIns="0" anchor="ctr"/>
-          <a:lstStyle/>
-          <a:p>
-            <a:pPr/>
-            <a:r>
-              <a:rPr sz="2100" b="1">
-                <a:solidFill>
-                  <a:srgbClr val="1C2340"/>
-                </a:solidFill>
-                <a:latin typeface="Noto Sans JP"/>
-                <a:ea typeface="Noto Sans JP"/>
-              </a:rPr>
-              <a:t>声に出して答えてみよう！</a:t>
-            </a:r>
-          </a:p>
-        </p:txBody>
-      </p:sp>
     </p:spTree>
   </p:cSld>
   <p:clrMapOvr>
@@ -14020,7 +13715,7 @@
                 <a:latin typeface="Noto Sans JP"/>
                 <a:ea typeface="Noto Sans JP"/>
               </a:rPr>
-              <a:t>今日の流れ（全25問）</a:t>
+              <a:t>今日の流れ（全30問）</a:t>
             </a:r>
           </a:p>
         </p:txBody>
@@ -14712,8 +14407,8 @@
         </p:nvSpPr>
         <p:spPr>
           <a:xfrm>
-            <a:off x="10067925" y="5915025"/>
-            <a:ext cx="685800" cy="276225"/>
+            <a:off x="10020300" y="5915025"/>
+            <a:ext cx="800100" cy="276225"/>
           </a:xfrm>
           <a:prstGeom prst="rect">
             <a:avLst/>
@@ -14734,7 +14429,7 @@
                 <a:latin typeface="Noto Sans JP"/>
                 <a:ea typeface="Noto Sans JP"/>
               </a:rPr>
-              <a:t>8問</a:t>
+              <a:t>13問</a:t>
             </a:r>
           </a:p>
         </p:txBody>
@@ -15934,41 +15629,6 @@
           </a:p>
         </p:txBody>
       </p:sp>
-      <p:sp>
-        <p:nvSpPr>
-          <p:cNvPr id="21" name=""/>
-          <p:cNvSpPr txBox="1"/>
-          <p:nvPr/>
-        </p:nvSpPr>
-        <p:spPr>
-          <a:xfrm>
-            <a:off x="5162550" y="5314950"/>
-            <a:ext cx="4000500" cy="381000"/>
-          </a:xfrm>
-          <a:prstGeom prst="rect">
-            <a:avLst/>
-          </a:prstGeom>
-          <a:noFill/>
-          <a:ln/>
-        </p:spPr>
-        <p:txBody>
-          <a:bodyPr wrap="square" lIns="0" tIns="0" rIns="0" bIns="0" anchor="ctr"/>
-          <a:lstStyle/>
-          <a:p>
-            <a:pPr/>
-            <a:r>
-              <a:rPr sz="2100" b="1">
-                <a:solidFill>
-                  <a:srgbClr val="1C2340"/>
-                </a:solidFill>
-                <a:latin typeface="Noto Sans JP"/>
-                <a:ea typeface="Noto Sans JP"/>
-              </a:rPr>
-              <a:t>声に出して答えてみよう！</a:t>
-            </a:r>
-          </a:p>
-        </p:txBody>
-      </p:sp>
     </p:spTree>
   </p:cSld>
   <p:clrMapOvr>
@@ -17175,41 +16835,6 @@
           </a:p>
         </p:txBody>
       </p:sp>
-      <p:sp>
-        <p:nvSpPr>
-          <p:cNvPr id="21" name=""/>
-          <p:cNvSpPr txBox="1"/>
-          <p:nvPr/>
-        </p:nvSpPr>
-        <p:spPr>
-          <a:xfrm>
-            <a:off x="5162550" y="5314950"/>
-            <a:ext cx="4000500" cy="381000"/>
-          </a:xfrm>
-          <a:prstGeom prst="rect">
-            <a:avLst/>
-          </a:prstGeom>
-          <a:noFill/>
-          <a:ln/>
-        </p:spPr>
-        <p:txBody>
-          <a:bodyPr wrap="square" lIns="0" tIns="0" rIns="0" bIns="0" anchor="ctr"/>
-          <a:lstStyle/>
-          <a:p>
-            <a:pPr/>
-            <a:r>
-              <a:rPr sz="2100" b="1">
-                <a:solidFill>
-                  <a:srgbClr val="1C2340"/>
-                </a:solidFill>
-                <a:latin typeface="Noto Sans JP"/>
-                <a:ea typeface="Noto Sans JP"/>
-              </a:rPr>
-              <a:t>声に出して答えてみよう！</a:t>
-            </a:r>
-          </a:p>
-        </p:txBody>
-      </p:sp>
     </p:spTree>
   </p:cSld>
   <p:clrMapOvr>
@@ -18440,41 +18065,6 @@
           </a:p>
         </p:txBody>
       </p:sp>
-      <p:sp>
-        <p:nvSpPr>
-          <p:cNvPr id="22" name=""/>
-          <p:cNvSpPr txBox="1"/>
-          <p:nvPr/>
-        </p:nvSpPr>
-        <p:spPr>
-          <a:xfrm>
-            <a:off x="5162550" y="5314950"/>
-            <a:ext cx="4000500" cy="381000"/>
-          </a:xfrm>
-          <a:prstGeom prst="rect">
-            <a:avLst/>
-          </a:prstGeom>
-          <a:noFill/>
-          <a:ln/>
-        </p:spPr>
-        <p:txBody>
-          <a:bodyPr wrap="square" lIns="0" tIns="0" rIns="0" bIns="0" anchor="ctr"/>
-          <a:lstStyle/>
-          <a:p>
-            <a:pPr/>
-            <a:r>
-              <a:rPr sz="2100" b="1">
-                <a:solidFill>
-                  <a:srgbClr val="1C2340"/>
-                </a:solidFill>
-                <a:latin typeface="Noto Sans JP"/>
-                <a:ea typeface="Noto Sans JP"/>
-              </a:rPr>
-              <a:t>声に出して答えてみよう！</a:t>
-            </a:r>
-          </a:p>
-        </p:txBody>
-      </p:sp>
     </p:spTree>
   </p:cSld>
   <p:clrMapOvr>
@@ -19738,41 +19328,6 @@
           </a:p>
         </p:txBody>
       </p:sp>
-      <p:sp>
-        <p:nvSpPr>
-          <p:cNvPr id="21" name=""/>
-          <p:cNvSpPr txBox="1"/>
-          <p:nvPr/>
-        </p:nvSpPr>
-        <p:spPr>
-          <a:xfrm>
-            <a:off x="5162550" y="5314950"/>
-            <a:ext cx="4000500" cy="381000"/>
-          </a:xfrm>
-          <a:prstGeom prst="rect">
-            <a:avLst/>
-          </a:prstGeom>
-          <a:noFill/>
-          <a:ln/>
-        </p:spPr>
-        <p:txBody>
-          <a:bodyPr wrap="square" lIns="0" tIns="0" rIns="0" bIns="0" anchor="ctr"/>
-          <a:lstStyle/>
-          <a:p>
-            <a:pPr/>
-            <a:r>
-              <a:rPr sz="2100" b="1">
-                <a:solidFill>
-                  <a:srgbClr val="1C2340"/>
-                </a:solidFill>
-                <a:latin typeface="Noto Sans JP"/>
-                <a:ea typeface="Noto Sans JP"/>
-              </a:rPr>
-              <a:t>声に出して答えてみよう！</a:t>
-            </a:r>
-          </a:p>
-        </p:txBody>
-      </p:sp>
     </p:spTree>
   </p:cSld>
   <p:clrMapOvr>
@@ -20964,41 +20519,6 @@
                 <a:ea typeface="Noto Sans JP"/>
               </a:rPr>
               <a:t>なし</a:t>
-            </a:r>
-          </a:p>
-        </p:txBody>
-      </p:sp>
-      <p:sp>
-        <p:nvSpPr>
-          <p:cNvPr id="21" name=""/>
-          <p:cNvSpPr txBox="1"/>
-          <p:nvPr/>
-        </p:nvSpPr>
-        <p:spPr>
-          <a:xfrm>
-            <a:off x="5162550" y="5314950"/>
-            <a:ext cx="4000500" cy="381000"/>
-          </a:xfrm>
-          <a:prstGeom prst="rect">
-            <a:avLst/>
-          </a:prstGeom>
-          <a:noFill/>
-          <a:ln/>
-        </p:spPr>
-        <p:txBody>
-          <a:bodyPr wrap="square" lIns="0" tIns="0" rIns="0" bIns="0" anchor="ctr"/>
-          <a:lstStyle/>
-          <a:p>
-            <a:pPr/>
-            <a:r>
-              <a:rPr sz="2100" b="1">
-                <a:solidFill>
-                  <a:srgbClr val="1C2340"/>
-                </a:solidFill>
-                <a:latin typeface="Noto Sans JP"/>
-                <a:ea typeface="Noto Sans JP"/>
-              </a:rPr>
-              <a:t>声に出して答えてみよう！</a:t>
             </a:r>
           </a:p>
         </p:txBody>
@@ -22496,7 +22016,7 @@
         <p:spPr>
           <a:xfrm>
             <a:off x="1143000" y="2676525"/>
-            <a:ext cx="2181225" cy="333375"/>
+            <a:ext cx="2333625" cy="333375"/>
           </a:xfrm>
           <a:prstGeom prst="rect">
             <a:avLst/>
@@ -22517,7 +22037,7 @@
                 <a:latin typeface="Noto Sans JP"/>
                 <a:ea typeface="Noto Sans JP"/>
               </a:rPr>
-              <a:t>総まとめ ・ 8問</a:t>
+              <a:t>総まとめ ・ 13問</a:t>
             </a:r>
           </a:p>
         </p:txBody>
@@ -23061,7 +22581,7 @@
         <p:spPr>
           <a:xfrm>
             <a:off x="1847850" y="5314950"/>
-            <a:ext cx="8896350" cy="381000"/>
+            <a:ext cx="3714750" cy="381000"/>
           </a:xfrm>
           <a:prstGeom prst="rect">
             <a:avLst/>
@@ -23082,7 +22602,7 @@
                 <a:latin typeface="Noto Sans JP"/>
                 <a:ea typeface="Noto Sans JP"/>
               </a:rPr>
-              <a:t>冠詞はいる？いらない？ 声に出して、英語で言ってみよう！</a:t>
+              <a:t>冠詞はいる？いらない？</a:t>
             </a:r>
           </a:p>
         </p:txBody>
@@ -23872,7 +23392,7 @@
         <p:spPr>
           <a:xfrm>
             <a:off x="1847850" y="5314950"/>
-            <a:ext cx="8896350" cy="381000"/>
+            <a:ext cx="3714750" cy="381000"/>
           </a:xfrm>
           <a:prstGeom prst="rect">
             <a:avLst/>
@@ -23893,7 +23413,7 @@
                 <a:latin typeface="Noto Sans JP"/>
                 <a:ea typeface="Noto Sans JP"/>
               </a:rPr>
-              <a:t>冠詞はいる？いらない？ 声に出して、英語で言ってみよう！</a:t>
+              <a:t>冠詞はいる？いらない？</a:t>
             </a:r>
           </a:p>
         </p:txBody>
@@ -24683,7 +24203,7 @@
         <p:spPr>
           <a:xfrm>
             <a:off x="1847850" y="5314950"/>
-            <a:ext cx="8896350" cy="381000"/>
+            <a:ext cx="3714750" cy="381000"/>
           </a:xfrm>
           <a:prstGeom prst="rect">
             <a:avLst/>
@@ -24704,7 +24224,7 @@
                 <a:latin typeface="Noto Sans JP"/>
                 <a:ea typeface="Noto Sans JP"/>
               </a:rPr>
-              <a:t>冠詞はいる？いらない？ 声に出して、英語で言ってみよう！</a:t>
+              <a:t>冠詞はいる？いらない？</a:t>
             </a:r>
           </a:p>
         </p:txBody>
@@ -25486,7 +25006,7 @@
         <p:spPr>
           <a:xfrm>
             <a:off x="1847850" y="5314950"/>
-            <a:ext cx="8896350" cy="381000"/>
+            <a:ext cx="3714750" cy="381000"/>
           </a:xfrm>
           <a:prstGeom prst="rect">
             <a:avLst/>
@@ -25507,7 +25027,7 @@
                 <a:latin typeface="Noto Sans JP"/>
                 <a:ea typeface="Noto Sans JP"/>
               </a:rPr>
-              <a:t>冠詞はいる？いらない？ 声に出して、英語で言ってみよう！</a:t>
+              <a:t>冠詞はいる？いらない？</a:t>
             </a:r>
           </a:p>
         </p:txBody>
@@ -26996,7 +26516,7 @@
         <p:spPr>
           <a:xfrm>
             <a:off x="1847850" y="5314950"/>
-            <a:ext cx="8896350" cy="381000"/>
+            <a:ext cx="3714750" cy="381000"/>
           </a:xfrm>
           <a:prstGeom prst="rect">
             <a:avLst/>
@@ -27017,7 +26537,7 @@
                 <a:latin typeface="Noto Sans JP"/>
                 <a:ea typeface="Noto Sans JP"/>
               </a:rPr>
-              <a:t>冠詞はいる？いらない？ 声に出して、英語で言ってみよう！</a:t>
+              <a:t>冠詞はいる？いらない？</a:t>
             </a:r>
           </a:p>
         </p:txBody>
@@ -27810,7 +27330,7 @@
         <p:spPr>
           <a:xfrm>
             <a:off x="1847850" y="5314950"/>
-            <a:ext cx="8896350" cy="381000"/>
+            <a:ext cx="3714750" cy="381000"/>
           </a:xfrm>
           <a:prstGeom prst="rect">
             <a:avLst/>
@@ -27831,7 +27351,7 @@
                 <a:latin typeface="Noto Sans JP"/>
                 <a:ea typeface="Noto Sans JP"/>
               </a:rPr>
-              <a:t>冠詞はいる？いらない？ 声に出して、英語で言ってみよう！</a:t>
+              <a:t>冠詞はいる？いらない？</a:t>
             </a:r>
           </a:p>
         </p:txBody>
@@ -28479,7 +27999,7 @@
       </p:sp>
       <p:pic>
         <p:nvPicPr>
-          <p:cNvPr id="8" name="Image 0" descr="/home/user/hina-english/matome/img/cafe.png">    </p:cNvPr>
+          <p:cNvPr id="8" name="Image 0" descr="/home/user/hina-english/matome/img/egg.png">    </p:cNvPr>
           <p:cNvPicPr>
             <a:picLocks noChangeAspect="1"/>
           </p:cNvPicPr>
@@ -28509,8 +28029,8 @@
         </p:nvSpPr>
         <p:spPr>
           <a:xfrm>
-            <a:off x="3162300" y="2619375"/>
-            <a:ext cx="7419975" cy="523875"/>
+            <a:off x="3162300" y="2895600"/>
+            <a:ext cx="5953125" cy="523875"/>
           </a:xfrm>
           <a:prstGeom prst="rect">
             <a:avLst/>
@@ -28531,7 +28051,7 @@
                 <a:latin typeface="Noto Sans JP"/>
                 <a:ea typeface="Noto Sans JP"/>
               </a:rPr>
-              <a:t>私は昨日、あるカフェに行きました。</a:t>
+              <a:t>私は毎朝、卵を1個食べます。</a:t>
             </a:r>
           </a:p>
         </p:txBody>
@@ -28539,41 +28059,6 @@
       <p:sp>
         <p:nvSpPr>
           <p:cNvPr id="10" name=""/>
-          <p:cNvSpPr txBox="1"/>
-          <p:nvPr/>
-        </p:nvSpPr>
-        <p:spPr>
-          <a:xfrm>
-            <a:off x="3162300" y="3162300"/>
-            <a:ext cx="7362825" cy="523875"/>
-          </a:xfrm>
-          <a:prstGeom prst="rect">
-            <a:avLst/>
-          </a:prstGeom>
-          <a:noFill/>
-          <a:ln/>
-        </p:spPr>
-        <p:txBody>
-          <a:bodyPr wrap="square" lIns="0" tIns="0" rIns="0" bIns="0" anchor="ctr"/>
-          <a:lstStyle/>
-          <a:p>
-            <a:pPr/>
-            <a:r>
-              <a:rPr sz="2850" b="1">
-                <a:solidFill>
-                  <a:srgbClr val="1C2340"/>
-                </a:solidFill>
-                <a:latin typeface="Noto Sans JP"/>
-                <a:ea typeface="Noto Sans JP"/>
-              </a:rPr>
-              <a:t>そのカフェはとても混んでいました。</a:t>
-            </a:r>
-          </a:p>
-        </p:txBody>
-      </p:sp>
-      <p:sp>
-        <p:nvSpPr>
-          <p:cNvPr id="11" name=""/>
           <p:cNvSpPr/>
           <p:nvPr/>
         </p:nvSpPr>
@@ -28595,7 +28080,7 @@
       </p:sp>
       <p:sp>
         <p:nvSpPr>
-          <p:cNvPr id="12" name=""/>
+          <p:cNvPr id="11" name=""/>
           <p:cNvSpPr txBox="1"/>
           <p:nvPr/>
         </p:nvSpPr>
@@ -28630,14 +28115,14 @@
       </p:sp>
       <p:sp>
         <p:nvSpPr>
-          <p:cNvPr id="13" name=""/>
+          <p:cNvPr id="12" name=""/>
           <p:cNvSpPr txBox="1"/>
           <p:nvPr/>
         </p:nvSpPr>
         <p:spPr>
           <a:xfrm>
             <a:off x="1847850" y="5314950"/>
-            <a:ext cx="8896350" cy="381000"/>
+            <a:ext cx="3714750" cy="381000"/>
           </a:xfrm>
           <a:prstGeom prst="rect">
             <a:avLst/>
@@ -28658,7 +28143,7 @@
                 <a:latin typeface="Noto Sans JP"/>
                 <a:ea typeface="Noto Sans JP"/>
               </a:rPr>
-              <a:t>冠詞はいる？いらない？ 声に出して、英語で言ってみよう！</a:t>
+              <a:t>冠詞はいる？いらない？</a:t>
             </a:r>
           </a:p>
         </p:txBody>
@@ -28869,7 +28354,7 @@
       </p:sp>
       <p:pic>
         <p:nvPicPr>
-          <p:cNvPr id="8" name="Image 0" descr="/home/user/hina-english/matome/img/cafe.png">    </p:cNvPr>
+          <p:cNvPr id="8" name="Image 0" descr="/home/user/hina-english/matome/img/egg.png">    </p:cNvPr>
           <p:cNvPicPr>
             <a:picLocks noChangeAspect="1"/>
           </p:cNvPicPr>
@@ -28899,8 +28384,8 @@
         </p:nvSpPr>
         <p:spPr>
           <a:xfrm>
-            <a:off x="3162300" y="2371725"/>
-            <a:ext cx="5838825" cy="495300"/>
+            <a:off x="3162300" y="2676525"/>
+            <a:ext cx="6038850" cy="495300"/>
           </a:xfrm>
           <a:prstGeom prst="rect">
             <a:avLst/>
@@ -28921,7 +28406,7 @@
                 <a:latin typeface="DM Sans"/>
                 <a:ea typeface="DM Sans"/>
               </a:rPr>
-              <a:t>I went to </a:t>
+              <a:t>I eat </a:t>
             </a:r>
             <a:pPr/>
             <a:r>
@@ -28932,7 +28417,7 @@
                 <a:latin typeface="DM Sans"/>
                 <a:ea typeface="DM Sans"/>
               </a:rPr>
-              <a:t>a</a:t>
+              <a:t>an</a:t>
             </a:r>
             <a:pPr/>
             <a:r>
@@ -28943,7 +28428,7 @@
                 <a:latin typeface="DM Sans"/>
                 <a:ea typeface="DM Sans"/>
               </a:rPr>
-              <a:t> cafe yesterday.</a:t>
+              <a:t> egg every morning.</a:t>
             </a:r>
           </a:p>
         </p:txBody>
@@ -28956,40 +28441,29 @@
         </p:nvSpPr>
         <p:spPr>
           <a:xfrm>
-            <a:off x="3162300" y="2981325"/>
-            <a:ext cx="6191250" cy="495300"/>
-          </a:xfrm>
-          <a:prstGeom prst="rect">
-            <a:avLst/>
-          </a:prstGeom>
-          <a:noFill/>
-          <a:ln/>
-        </p:spPr>
-        <p:txBody>
-          <a:bodyPr wrap="square" lIns="0" tIns="0" rIns="0" bIns="0" anchor="ctr"/>
-          <a:lstStyle/>
-          <a:p>
-            <a:pPr/>
-            <a:r>
-              <a:rPr sz="3000" b="1">
-                <a:solidFill>
-                  <a:srgbClr val="2F86CF"/>
-                </a:solidFill>
-                <a:latin typeface="DM Sans"/>
-                <a:ea typeface="DM Sans"/>
-              </a:rPr>
-              <a:t>The</a:t>
-            </a:r>
-            <a:pPr/>
-            <a:r>
-              <a:rPr sz="3000" b="1">
-                <a:solidFill>
-                  <a:srgbClr val="1C2340"/>
-                </a:solidFill>
-                <a:latin typeface="DM Sans"/>
-                <a:ea typeface="DM Sans"/>
-              </a:rPr>
-              <a:t> cafe was very crowded.</a:t>
+            <a:off x="3162300" y="3333750"/>
+            <a:ext cx="3600450" cy="304800"/>
+          </a:xfrm>
+          <a:prstGeom prst="rect">
+            <a:avLst/>
+          </a:prstGeom>
+          <a:noFill/>
+          <a:ln/>
+        </p:spPr>
+        <p:txBody>
+          <a:bodyPr wrap="square" lIns="0" tIns="0" rIns="0" bIns="0" anchor="ctr"/>
+          <a:lstStyle/>
+          <a:p>
+            <a:pPr/>
+            <a:r>
+              <a:rPr sz="1650">
+                <a:solidFill>
+                  <a:srgbClr val="4A5270"/>
+                </a:solidFill>
+                <a:latin typeface="Noto Sans JP"/>
+                <a:ea typeface="Noto Sans JP"/>
+              </a:rPr>
+              <a:t>私は毎朝、卵を1個食べます。</a:t>
             </a:r>
           </a:p>
         </p:txBody>
@@ -28997,41 +28471,6 @@
       <p:sp>
         <p:nvSpPr>
           <p:cNvPr id="11" name=""/>
-          <p:cNvSpPr txBox="1"/>
-          <p:nvPr/>
-        </p:nvSpPr>
-        <p:spPr>
-          <a:xfrm>
-            <a:off x="3162300" y="3638550"/>
-            <a:ext cx="8505825" cy="304800"/>
-          </a:xfrm>
-          <a:prstGeom prst="rect">
-            <a:avLst/>
-          </a:prstGeom>
-          <a:noFill/>
-          <a:ln/>
-        </p:spPr>
-        <p:txBody>
-          <a:bodyPr wrap="square" lIns="0" tIns="0" rIns="0" bIns="0" anchor="ctr"/>
-          <a:lstStyle/>
-          <a:p>
-            <a:pPr/>
-            <a:r>
-              <a:rPr sz="1650">
-                <a:solidFill>
-                  <a:srgbClr val="4A5270"/>
-                </a:solidFill>
-                <a:latin typeface="Noto Sans JP"/>
-                <a:ea typeface="Noto Sans JP"/>
-              </a:rPr>
-              <a:t>私は昨日、あるカフェに行きました。そのカフェはとても混んでいました。</a:t>
-            </a:r>
-          </a:p>
-        </p:txBody>
-      </p:sp>
-      <p:sp>
-        <p:nvSpPr>
-          <p:cNvPr id="12" name=""/>
           <p:cNvSpPr/>
           <p:nvPr/>
         </p:nvSpPr>
@@ -29053,7 +28492,7 @@
       </p:sp>
       <p:sp>
         <p:nvSpPr>
-          <p:cNvPr id="13" name=""/>
+          <p:cNvPr id="12" name=""/>
           <p:cNvSpPr/>
           <p:nvPr/>
         </p:nvSpPr>
@@ -29075,7 +28514,7 @@
       </p:sp>
       <p:sp>
         <p:nvSpPr>
-          <p:cNvPr id="14" name=""/>
+          <p:cNvPr id="13" name=""/>
           <p:cNvSpPr txBox="1"/>
           <p:nvPr/>
         </p:nvSpPr>
@@ -29110,46 +28549,35 @@
       </p:sp>
       <p:sp>
         <p:nvSpPr>
-          <p:cNvPr id="15" name=""/>
+          <p:cNvPr id="14" name=""/>
           <p:cNvSpPr txBox="1"/>
           <p:nvPr/>
         </p:nvSpPr>
         <p:spPr>
           <a:xfrm>
             <a:off x="2152650" y="5343525"/>
-            <a:ext cx="6457950" cy="333375"/>
-          </a:xfrm>
-          <a:prstGeom prst="rect">
-            <a:avLst/>
-          </a:prstGeom>
-          <a:noFill/>
-          <a:ln/>
-        </p:spPr>
-        <p:txBody>
-          <a:bodyPr wrap="square" lIns="0" tIns="0" rIns="0" bIns="0" anchor="ctr"/>
-          <a:lstStyle/>
-          <a:p>
-            <a:pPr/>
-            <a:r>
-              <a:rPr sz="1800">
+            <a:ext cx="4133850" cy="333375"/>
+          </a:xfrm>
+          <a:prstGeom prst="rect">
+            <a:avLst/>
+          </a:prstGeom>
+          <a:noFill/>
+          <a:ln/>
+        </p:spPr>
+        <p:txBody>
+          <a:bodyPr wrap="square" lIns="0" tIns="0" rIns="0" bIns="0" anchor="ctr"/>
+          <a:lstStyle/>
+          <a:p>
+            <a:pPr/>
+            <a:r>
+              <a:rPr sz="1800" b="1">
                 <a:solidFill>
                   <a:srgbClr val="1C2340"/>
-                </a:solidFill>
-                <a:latin typeface="Noto Sans JP"/>
-                <a:ea typeface="Noto Sans JP"/>
-              </a:rPr>
-              <a:t>初登場は </a:t>
-            </a:r>
-            <a:pPr/>
-            <a:r>
-              <a:rPr sz="1800" b="1">
-                <a:solidFill>
-                  <a:srgbClr val="E8461E"/>
                 </a:solidFill>
                 <a:latin typeface="DM Sans"/>
                 <a:ea typeface="DM Sans"/>
               </a:rPr>
-              <a:t>a</a:t>
+              <a:t>egg</a:t>
             </a:r>
             <a:pPr/>
             <a:r>
@@ -29160,18 +28588,18 @@
                 <a:latin typeface="Noto Sans JP"/>
                 <a:ea typeface="Noto Sans JP"/>
               </a:rPr>
-              <a:t>、2回目は「さっきのカフェ」なので </a:t>
+              <a:t> は母音の音で始まるので </a:t>
             </a:r>
             <a:pPr/>
             <a:r>
               <a:rPr sz="1800" b="1">
                 <a:solidFill>
-                  <a:srgbClr val="2F86CF"/>
+                  <a:srgbClr val="E8461E"/>
                 </a:solidFill>
                 <a:latin typeface="DM Sans"/>
                 <a:ea typeface="DM Sans"/>
               </a:rPr>
-              <a:t>the</a:t>
+              <a:t>an</a:t>
             </a:r>
           </a:p>
         </p:txBody>
@@ -29382,7 +28810,7 @@
       </p:sp>
       <p:pic>
         <p:nvPicPr>
-          <p:cNvPr id="8" name="Image 0" descr="/home/user/hina-english/matome/img/coffee.png">    </p:cNvPr>
+          <p:cNvPr id="8" name="Image 0" descr="/home/user/hina-english/matome/img/flag-ph.png">    </p:cNvPr>
           <p:cNvPicPr>
             <a:picLocks noChangeAspect="1"/>
           </p:cNvPicPr>
@@ -29413,7 +28841,7 @@
         <p:spPr>
           <a:xfrm>
             <a:off x="3162300" y="2895600"/>
-            <a:ext cx="7791450" cy="523875"/>
+            <a:ext cx="5286375" cy="523875"/>
           </a:xfrm>
           <a:prstGeom prst="rect">
             <a:avLst/>
@@ -29434,7 +28862,7 @@
                 <a:latin typeface="Noto Sans JP"/>
                 <a:ea typeface="Noto Sans JP"/>
               </a:rPr>
-              <a:t>私はこのカフェのコーヒーが好きです。</a:t>
+              <a:t>私はフィリピン出身です。</a:t>
             </a:r>
           </a:p>
         </p:txBody>
@@ -29505,7 +28933,7 @@
         <p:spPr>
           <a:xfrm>
             <a:off x="1847850" y="5314950"/>
-            <a:ext cx="8896350" cy="381000"/>
+            <a:ext cx="3714750" cy="381000"/>
           </a:xfrm>
           <a:prstGeom prst="rect">
             <a:avLst/>
@@ -29526,7 +28954,7 @@
                 <a:latin typeface="Noto Sans JP"/>
                 <a:ea typeface="Noto Sans JP"/>
               </a:rPr>
-              <a:t>冠詞はいる？いらない？ 声に出して、英語で言ってみよう！</a:t>
+              <a:t>冠詞はいる？いらない？</a:t>
             </a:r>
           </a:p>
         </p:txBody>
@@ -29737,7 +29165,7 @@
       </p:sp>
       <p:pic>
         <p:nvPicPr>
-          <p:cNvPr id="8" name="Image 0" descr="/home/user/hina-english/matome/img/coffee.png">    </p:cNvPr>
+          <p:cNvPr id="8" name="Image 0" descr="/home/user/hina-english/matome/img/flag-ph.png">    </p:cNvPr>
           <p:cNvPicPr>
             <a:picLocks noChangeAspect="1"/>
           </p:cNvPicPr>
@@ -29768,7 +29196,7 @@
         <p:spPr>
           <a:xfrm>
             <a:off x="3162300" y="2676525"/>
-            <a:ext cx="6172200" cy="495300"/>
+            <a:ext cx="5467350" cy="495300"/>
           </a:xfrm>
           <a:prstGeom prst="rect">
             <a:avLst/>
@@ -29789,7 +29217,7 @@
                 <a:latin typeface="DM Sans"/>
                 <a:ea typeface="DM Sans"/>
               </a:rPr>
-              <a:t>I like </a:t>
+              <a:t>I'm from </a:t>
             </a:r>
             <a:pPr/>
             <a:r>
@@ -29811,7 +29239,7 @@
                 <a:latin typeface="DM Sans"/>
                 <a:ea typeface="DM Sans"/>
               </a:rPr>
-              <a:t> coffee at this cafe.</a:t>
+              <a:t> Philippines.</a:t>
             </a:r>
           </a:p>
         </p:txBody>
@@ -29825,7 +29253,7 @@
         <p:spPr>
           <a:xfrm>
             <a:off x="3162300" y="3333750"/>
-            <a:ext cx="4657725" cy="304800"/>
+            <a:ext cx="3209925" cy="304800"/>
           </a:xfrm>
           <a:prstGeom prst="rect">
             <a:avLst/>
@@ -29846,7 +29274,7 @@
                 <a:latin typeface="Noto Sans JP"/>
                 <a:ea typeface="Noto Sans JP"/>
               </a:rPr>
-              <a:t>私はこのカフェのコーヒーが好きです。</a:t>
+              <a:t>私はフィリピン出身です。</a:t>
             </a:r>
           </a:p>
         </p:txBody>
@@ -29939,7 +29367,7 @@
         <p:spPr>
           <a:xfrm>
             <a:off x="2152650" y="5343525"/>
-            <a:ext cx="6096000" cy="333375"/>
+            <a:ext cx="5572125" cy="333375"/>
           </a:xfrm>
           <a:prstGeom prst="rect">
             <a:avLst/>
@@ -29960,7 +29388,7 @@
                 <a:latin typeface="Noto Sans JP"/>
                 <a:ea typeface="Noto Sans JP"/>
               </a:rPr>
-              <a:t>「このカフェの」コーヒーと特定できるので </a:t>
+              <a:t>島の集まり（複数形）を表す国名なので </a:t>
             </a:r>
             <a:pPr/>
             <a:r>
@@ -29972,6 +29400,856 @@
                 <a:ea typeface="DM Sans"/>
               </a:rPr>
               <a:t>the</a:t>
+            </a:r>
+          </a:p>
+        </p:txBody>
+      </p:sp>
+    </p:spTree>
+  </p:cSld>
+  <p:clrMapOvr>
+    <a:masterClrMapping/>
+  </p:clrMapOvr>
+</p:sld>
+</file>
+
+<file path=ppt/slides/slide58.xml><?xml version="1.0" encoding="utf-8"?>
+<p:sld xmlns:a="http://schemas.openxmlformats.org/drawingml/2006/main" xmlns:r="http://schemas.openxmlformats.org/officeDocument/2006/relationships" xmlns:p="http://schemas.openxmlformats.org/presentationml/2006/main">
+  <p:cSld name="Slide 58">
+    <p:bg>
+      <p:bgPr>
+        <a:solidFill>
+          <a:srgbClr val="EAF2FB"/>
+        </a:solidFill>
+      </p:bgPr>
+    </p:bg>
+    <p:spTree>
+      <p:nvGrpSpPr>
+        <p:cNvPr id="1" name=""/>
+        <p:cNvGrpSpPr/>
+        <p:nvPr/>
+      </p:nvGrpSpPr>
+      <p:grpSpPr>
+        <a:xfrm>
+          <a:off x="0" y="0"/>
+          <a:ext cx="0" cy="0"/>
+          <a:chOff x="0" y="0"/>
+          <a:chExt cx="0" cy="0"/>
+        </a:xfrm>
+      </p:grpSpPr>
+      <p:sp>
+        <p:nvSpPr>
+          <p:cNvPr id="2" name=""/>
+          <p:cNvSpPr txBox="1"/>
+          <p:nvPr/>
+        </p:nvSpPr>
+        <p:spPr>
+          <a:xfrm>
+            <a:off x="685800" y="219075"/>
+            <a:ext cx="2409825" cy="238125"/>
+          </a:xfrm>
+          <a:prstGeom prst="rect">
+            <a:avLst/>
+          </a:prstGeom>
+          <a:noFill/>
+          <a:ln/>
+        </p:spPr>
+        <p:txBody>
+          <a:bodyPr wrap="square" lIns="0" tIns="0" rIns="0" bIns="0" anchor="ctr"/>
+          <a:lstStyle/>
+          <a:p>
+            <a:pPr/>
+            <a:r>
+              <a:rPr sz="1300">
+                <a:solidFill>
+                  <a:srgbClr val="4A5270"/>
+                </a:solidFill>
+                <a:latin typeface="Noto Sans JP"/>
+                <a:ea typeface="Noto Sans JP"/>
+              </a:rPr>
+              <a:t>文法解説 / 冠詞 練習問題</a:t>
+            </a:r>
+          </a:p>
+        </p:txBody>
+      </p:sp>
+      <p:sp>
+        <p:nvSpPr>
+          <p:cNvPr id="3" name=""/>
+          <p:cNvSpPr/>
+          <p:nvPr/>
+        </p:nvSpPr>
+        <p:spPr>
+          <a:xfrm>
+            <a:off x="0" y="676275"/>
+            <a:ext cx="12192000" cy="0"/>
+          </a:xfrm>
+          <a:prstGeom prst="line">
+            <a:avLst/>
+          </a:prstGeom>
+          <a:noFill/>
+          <a:ln w="19050">
+            <a:solidFill>
+              <a:srgbClr val="D6E2F0"/>
+            </a:solidFill>
+            <a:prstDash val="solid"/>
+          </a:ln>
+        </p:spPr>
+      </p:sp>
+      <p:sp>
+        <p:nvSpPr>
+          <p:cNvPr id="4" name=""/>
+          <p:cNvSpPr/>
+          <p:nvPr/>
+        </p:nvSpPr>
+        <p:spPr>
+          <a:xfrm>
+            <a:off x="685800" y="1019175"/>
+            <a:ext cx="914400" cy="438150"/>
+          </a:xfrm>
+          <a:prstGeom prst="roundRect">
+            <a:avLst>
+              <a:gd name="adj" fmla="val 50425"/>
+            </a:avLst>
+          </a:prstGeom>
+          <a:solidFill>
+            <a:srgbClr val="E8461E"/>
+          </a:solidFill>
+          <a:ln/>
+        </p:spPr>
+      </p:sp>
+      <p:sp>
+        <p:nvSpPr>
+          <p:cNvPr id="5" name=""/>
+          <p:cNvSpPr txBox="1"/>
+          <p:nvPr/>
+        </p:nvSpPr>
+        <p:spPr>
+          <a:xfrm>
+            <a:off x="876300" y="1047750"/>
+            <a:ext cx="952500" cy="352425"/>
+          </a:xfrm>
+          <a:prstGeom prst="rect">
+            <a:avLst/>
+          </a:prstGeom>
+          <a:noFill/>
+          <a:ln/>
+        </p:spPr>
+        <p:txBody>
+          <a:bodyPr wrap="square" lIns="0" tIns="0" rIns="0" bIns="0" anchor="ctr"/>
+          <a:lstStyle/>
+          <a:p>
+            <a:pPr/>
+            <a:r>
+              <a:rPr sz="2100" b="1">
+                <a:solidFill>
+                  <a:srgbClr val="FFFFFF"/>
+                </a:solidFill>
+                <a:latin typeface="DM Sans"/>
+                <a:ea typeface="DM Sans"/>
+              </a:rPr>
+              <a:t>Q26</a:t>
+            </a:r>
+          </a:p>
+        </p:txBody>
+      </p:sp>
+      <p:sp>
+        <p:nvSpPr>
+          <p:cNvPr id="6" name=""/>
+          <p:cNvSpPr txBox="1"/>
+          <p:nvPr/>
+        </p:nvSpPr>
+        <p:spPr>
+          <a:xfrm>
+            <a:off x="1752600" y="933450"/>
+            <a:ext cx="3714750" cy="609600"/>
+          </a:xfrm>
+          <a:prstGeom prst="rect">
+            <a:avLst/>
+          </a:prstGeom>
+          <a:noFill/>
+          <a:ln/>
+        </p:spPr>
+        <p:txBody>
+          <a:bodyPr wrap="square" lIns="0" tIns="0" rIns="0" bIns="0" anchor="ctr"/>
+          <a:lstStyle/>
+          <a:p>
+            <a:pPr/>
+            <a:r>
+              <a:rPr sz="3300" b="1">
+                <a:solidFill>
+                  <a:srgbClr val="1C2340"/>
+                </a:solidFill>
+                <a:latin typeface="Noto Sans JP"/>
+                <a:ea typeface="Noto Sans JP"/>
+              </a:rPr>
+              <a:t>英語で言うと？</a:t>
+            </a:r>
+          </a:p>
+        </p:txBody>
+      </p:sp>
+      <p:sp>
+        <p:nvSpPr>
+          <p:cNvPr id="7" name=""/>
+          <p:cNvSpPr/>
+          <p:nvPr/>
+        </p:nvSpPr>
+        <p:spPr>
+          <a:xfrm>
+            <a:off x="685800" y="1724025"/>
+            <a:ext cx="10820400" cy="2857500"/>
+          </a:xfrm>
+          <a:prstGeom prst="roundRect">
+            <a:avLst>
+              <a:gd name="adj" fmla="val 9333"/>
+            </a:avLst>
+          </a:prstGeom>
+          <a:solidFill>
+            <a:srgbClr val="FFFFFF"/>
+          </a:solidFill>
+          <a:ln/>
+        </p:spPr>
+      </p:sp>
+      <p:pic>
+        <p:nvPicPr>
+          <p:cNvPr id="8" name="Image 0" descr="/home/user/hina-english/matome/img/bus.png">    </p:cNvPr>
+          <p:cNvPicPr>
+            <a:picLocks noChangeAspect="1"/>
+          </p:cNvPicPr>
+          <p:nvPr/>
+        </p:nvPicPr>
+        <p:blipFill>
+          <a:blip r:embed="rId1"/>
+          <a:stretch>
+            <a:fillRect/>
+          </a:stretch>
+        </p:blipFill>
+        <p:spPr>
+          <a:xfrm>
+            <a:off x="971550" y="2200275"/>
+            <a:ext cx="1905000" cy="1905000"/>
+          </a:xfrm>
+          <a:prstGeom prst="rect">
+            <a:avLst/>
+          </a:prstGeom>
+        </p:spPr>
+      </p:pic>
+      <p:sp>
+        <p:nvSpPr>
+          <p:cNvPr id="9" name=""/>
+          <p:cNvSpPr txBox="1"/>
+          <p:nvPr/>
+        </p:nvSpPr>
+        <p:spPr>
+          <a:xfrm>
+            <a:off x="3162300" y="2895600"/>
+            <a:ext cx="6543675" cy="523875"/>
+          </a:xfrm>
+          <a:prstGeom prst="rect">
+            <a:avLst/>
+          </a:prstGeom>
+          <a:noFill/>
+          <a:ln/>
+        </p:spPr>
+        <p:txBody>
+          <a:bodyPr wrap="square" lIns="0" tIns="0" rIns="0" bIns="0" anchor="ctr"/>
+          <a:lstStyle/>
+          <a:p>
+            <a:pPr/>
+            <a:r>
+              <a:rPr sz="2850" b="1">
+                <a:solidFill>
+                  <a:srgbClr val="1C2340"/>
+                </a:solidFill>
+                <a:latin typeface="Noto Sans JP"/>
+                <a:ea typeface="Noto Sans JP"/>
+              </a:rPr>
+              <a:t>私は毎日バスで学校に行きます。</a:t>
+            </a:r>
+          </a:p>
+        </p:txBody>
+      </p:sp>
+      <p:sp>
+        <p:nvSpPr>
+          <p:cNvPr id="10" name=""/>
+          <p:cNvSpPr/>
+          <p:nvPr/>
+        </p:nvSpPr>
+        <p:spPr>
+          <a:xfrm>
+            <a:off x="685800" y="5324475"/>
+            <a:ext cx="857250" cy="371475"/>
+          </a:xfrm>
+          <a:prstGeom prst="roundRect">
+            <a:avLst>
+              <a:gd name="adj" fmla="val 50000"/>
+            </a:avLst>
+          </a:prstGeom>
+          <a:solidFill>
+            <a:srgbClr val="FFE3D8"/>
+          </a:solidFill>
+          <a:ln/>
+        </p:spPr>
+      </p:sp>
+      <p:sp>
+        <p:nvSpPr>
+          <p:cNvPr id="11" name=""/>
+          <p:cNvSpPr txBox="1"/>
+          <p:nvPr/>
+        </p:nvSpPr>
+        <p:spPr>
+          <a:xfrm>
+            <a:off x="857250" y="5381625"/>
+            <a:ext cx="933450" cy="247650"/>
+          </a:xfrm>
+          <a:prstGeom prst="rect">
+            <a:avLst/>
+          </a:prstGeom>
+          <a:noFill/>
+          <a:ln/>
+        </p:spPr>
+        <p:txBody>
+          <a:bodyPr wrap="square" lIns="0" tIns="0" rIns="0" bIns="0" anchor="ctr"/>
+          <a:lstStyle/>
+          <a:p>
+            <a:pPr/>
+            <a:r>
+              <a:rPr sz="1350" b="1">
+                <a:solidFill>
+                  <a:srgbClr val="C8401A"/>
+                </a:solidFill>
+                <a:latin typeface="Noto Sans JP"/>
+                <a:ea typeface="Noto Sans JP"/>
+              </a:rPr>
+              <a:t>ヒント</a:t>
+            </a:r>
+          </a:p>
+        </p:txBody>
+      </p:sp>
+      <p:sp>
+        <p:nvSpPr>
+          <p:cNvPr id="12" name=""/>
+          <p:cNvSpPr txBox="1"/>
+          <p:nvPr/>
+        </p:nvSpPr>
+        <p:spPr>
+          <a:xfrm>
+            <a:off x="1847850" y="5314950"/>
+            <a:ext cx="3714750" cy="381000"/>
+          </a:xfrm>
+          <a:prstGeom prst="rect">
+            <a:avLst/>
+          </a:prstGeom>
+          <a:noFill/>
+          <a:ln/>
+        </p:spPr>
+        <p:txBody>
+          <a:bodyPr wrap="square" lIns="0" tIns="0" rIns="0" bIns="0" anchor="ctr"/>
+          <a:lstStyle/>
+          <a:p>
+            <a:pPr/>
+            <a:r>
+              <a:rPr sz="2100" b="1">
+                <a:solidFill>
+                  <a:srgbClr val="1C2340"/>
+                </a:solidFill>
+                <a:latin typeface="Noto Sans JP"/>
+                <a:ea typeface="Noto Sans JP"/>
+              </a:rPr>
+              <a:t>冠詞はいる？いらない？</a:t>
+            </a:r>
+          </a:p>
+        </p:txBody>
+      </p:sp>
+    </p:spTree>
+  </p:cSld>
+  <p:clrMapOvr>
+    <a:masterClrMapping/>
+  </p:clrMapOvr>
+</p:sld>
+</file>
+
+<file path=ppt/slides/slide59.xml><?xml version="1.0" encoding="utf-8"?>
+<p:sld xmlns:a="http://schemas.openxmlformats.org/drawingml/2006/main" xmlns:r="http://schemas.openxmlformats.org/officeDocument/2006/relationships" xmlns:p="http://schemas.openxmlformats.org/presentationml/2006/main">
+  <p:cSld name="Slide 59">
+    <p:bg>
+      <p:bgPr>
+        <a:solidFill>
+          <a:srgbClr val="EAF2FB"/>
+        </a:solidFill>
+      </p:bgPr>
+    </p:bg>
+    <p:spTree>
+      <p:nvGrpSpPr>
+        <p:cNvPr id="1" name=""/>
+        <p:cNvGrpSpPr/>
+        <p:nvPr/>
+      </p:nvGrpSpPr>
+      <p:grpSpPr>
+        <a:xfrm>
+          <a:off x="0" y="0"/>
+          <a:ext cx="0" cy="0"/>
+          <a:chOff x="0" y="0"/>
+          <a:chExt cx="0" cy="0"/>
+        </a:xfrm>
+      </p:grpSpPr>
+      <p:sp>
+        <p:nvSpPr>
+          <p:cNvPr id="2" name=""/>
+          <p:cNvSpPr txBox="1"/>
+          <p:nvPr/>
+        </p:nvSpPr>
+        <p:spPr>
+          <a:xfrm>
+            <a:off x="685800" y="219075"/>
+            <a:ext cx="2409825" cy="238125"/>
+          </a:xfrm>
+          <a:prstGeom prst="rect">
+            <a:avLst/>
+          </a:prstGeom>
+          <a:noFill/>
+          <a:ln/>
+        </p:spPr>
+        <p:txBody>
+          <a:bodyPr wrap="square" lIns="0" tIns="0" rIns="0" bIns="0" anchor="ctr"/>
+          <a:lstStyle/>
+          <a:p>
+            <a:pPr/>
+            <a:r>
+              <a:rPr sz="1300">
+                <a:solidFill>
+                  <a:srgbClr val="4A5270"/>
+                </a:solidFill>
+                <a:latin typeface="Noto Sans JP"/>
+                <a:ea typeface="Noto Sans JP"/>
+              </a:rPr>
+              <a:t>文法解説 / 冠詞 練習問題</a:t>
+            </a:r>
+          </a:p>
+        </p:txBody>
+      </p:sp>
+      <p:sp>
+        <p:nvSpPr>
+          <p:cNvPr id="3" name=""/>
+          <p:cNvSpPr/>
+          <p:nvPr/>
+        </p:nvSpPr>
+        <p:spPr>
+          <a:xfrm>
+            <a:off x="0" y="676275"/>
+            <a:ext cx="12192000" cy="0"/>
+          </a:xfrm>
+          <a:prstGeom prst="line">
+            <a:avLst/>
+          </a:prstGeom>
+          <a:noFill/>
+          <a:ln w="19050">
+            <a:solidFill>
+              <a:srgbClr val="D6E2F0"/>
+            </a:solidFill>
+            <a:prstDash val="solid"/>
+          </a:ln>
+        </p:spPr>
+      </p:sp>
+      <p:sp>
+        <p:nvSpPr>
+          <p:cNvPr id="4" name=""/>
+          <p:cNvSpPr/>
+          <p:nvPr/>
+        </p:nvSpPr>
+        <p:spPr>
+          <a:xfrm>
+            <a:off x="685800" y="1019175"/>
+            <a:ext cx="914400" cy="438150"/>
+          </a:xfrm>
+          <a:prstGeom prst="roundRect">
+            <a:avLst>
+              <a:gd name="adj" fmla="val 50425"/>
+            </a:avLst>
+          </a:prstGeom>
+          <a:solidFill>
+            <a:srgbClr val="E8461E"/>
+          </a:solidFill>
+          <a:ln/>
+        </p:spPr>
+      </p:sp>
+      <p:sp>
+        <p:nvSpPr>
+          <p:cNvPr id="5" name=""/>
+          <p:cNvSpPr txBox="1"/>
+          <p:nvPr/>
+        </p:nvSpPr>
+        <p:spPr>
+          <a:xfrm>
+            <a:off x="876300" y="1047750"/>
+            <a:ext cx="952500" cy="352425"/>
+          </a:xfrm>
+          <a:prstGeom prst="rect">
+            <a:avLst/>
+          </a:prstGeom>
+          <a:noFill/>
+          <a:ln/>
+        </p:spPr>
+        <p:txBody>
+          <a:bodyPr wrap="square" lIns="0" tIns="0" rIns="0" bIns="0" anchor="ctr"/>
+          <a:lstStyle/>
+          <a:p>
+            <a:pPr/>
+            <a:r>
+              <a:rPr sz="2100" b="1">
+                <a:solidFill>
+                  <a:srgbClr val="FFFFFF"/>
+                </a:solidFill>
+                <a:latin typeface="DM Sans"/>
+                <a:ea typeface="DM Sans"/>
+              </a:rPr>
+              <a:t>Q26</a:t>
+            </a:r>
+          </a:p>
+        </p:txBody>
+      </p:sp>
+      <p:sp>
+        <p:nvSpPr>
+          <p:cNvPr id="6" name=""/>
+          <p:cNvSpPr txBox="1"/>
+          <p:nvPr/>
+        </p:nvSpPr>
+        <p:spPr>
+          <a:xfrm>
+            <a:off x="1752600" y="933450"/>
+            <a:ext cx="3714750" cy="609600"/>
+          </a:xfrm>
+          <a:prstGeom prst="rect">
+            <a:avLst/>
+          </a:prstGeom>
+          <a:noFill/>
+          <a:ln/>
+        </p:spPr>
+        <p:txBody>
+          <a:bodyPr wrap="square" lIns="0" tIns="0" rIns="0" bIns="0" anchor="ctr"/>
+          <a:lstStyle/>
+          <a:p>
+            <a:pPr/>
+            <a:r>
+              <a:rPr sz="3300" b="1">
+                <a:solidFill>
+                  <a:srgbClr val="1C2340"/>
+                </a:solidFill>
+                <a:latin typeface="Noto Sans JP"/>
+                <a:ea typeface="Noto Sans JP"/>
+              </a:rPr>
+              <a:t>英語で言うと？</a:t>
+            </a:r>
+          </a:p>
+        </p:txBody>
+      </p:sp>
+      <p:sp>
+        <p:nvSpPr>
+          <p:cNvPr id="7" name=""/>
+          <p:cNvSpPr/>
+          <p:nvPr/>
+        </p:nvSpPr>
+        <p:spPr>
+          <a:xfrm>
+            <a:off x="685800" y="1724025"/>
+            <a:ext cx="10820400" cy="2857500"/>
+          </a:xfrm>
+          <a:prstGeom prst="roundRect">
+            <a:avLst>
+              <a:gd name="adj" fmla="val 9333"/>
+            </a:avLst>
+          </a:prstGeom>
+          <a:solidFill>
+            <a:srgbClr val="FFFFFF"/>
+          </a:solidFill>
+          <a:ln/>
+        </p:spPr>
+      </p:sp>
+      <p:pic>
+        <p:nvPicPr>
+          <p:cNvPr id="8" name="Image 0" descr="/home/user/hina-english/matome/img/bus.png">    </p:cNvPr>
+          <p:cNvPicPr>
+            <a:picLocks noChangeAspect="1"/>
+          </p:cNvPicPr>
+          <p:nvPr/>
+        </p:nvPicPr>
+        <p:blipFill>
+          <a:blip r:embed="rId1"/>
+          <a:stretch>
+            <a:fillRect/>
+          </a:stretch>
+        </p:blipFill>
+        <p:spPr>
+          <a:xfrm>
+            <a:off x="971550" y="2200275"/>
+            <a:ext cx="1905000" cy="1905000"/>
+          </a:xfrm>
+          <a:prstGeom prst="rect">
+            <a:avLst/>
+          </a:prstGeom>
+        </p:spPr>
+      </p:pic>
+      <p:sp>
+        <p:nvSpPr>
+          <p:cNvPr id="9" name=""/>
+          <p:cNvSpPr txBox="1"/>
+          <p:nvPr/>
+        </p:nvSpPr>
+        <p:spPr>
+          <a:xfrm>
+            <a:off x="3162300" y="2676525"/>
+            <a:ext cx="6886575" cy="495300"/>
+          </a:xfrm>
+          <a:prstGeom prst="rect">
+            <a:avLst/>
+          </a:prstGeom>
+          <a:noFill/>
+          <a:ln/>
+        </p:spPr>
+        <p:txBody>
+          <a:bodyPr wrap="square" lIns="0" tIns="0" rIns="0" bIns="0" anchor="ctr"/>
+          <a:lstStyle/>
+          <a:p>
+            <a:pPr/>
+            <a:r>
+              <a:rPr sz="3000" b="1">
+                <a:solidFill>
+                  <a:srgbClr val="1C2340"/>
+                </a:solidFill>
+                <a:latin typeface="DM Sans"/>
+                <a:ea typeface="DM Sans"/>
+              </a:rPr>
+              <a:t>I go to </a:t>
+            </a:r>
+            <a:pPr/>
+            <a:r>
+              <a:rPr sz="3000" b="1">
+                <a:solidFill>
+                  <a:srgbClr val="1C2340"/>
+                </a:solidFill>
+                <a:highlight>
+                  <a:srgbClr val="FFD9C9"/>
+                </a:highlight>
+                <a:latin typeface="DM Sans"/>
+                <a:ea typeface="DM Sans"/>
+              </a:rPr>
+              <a:t>school</a:t>
+            </a:r>
+            <a:pPr/>
+            <a:r>
+              <a:rPr sz="3000" b="1">
+                <a:solidFill>
+                  <a:srgbClr val="1C2340"/>
+                </a:solidFill>
+                <a:latin typeface="DM Sans"/>
+                <a:ea typeface="DM Sans"/>
+              </a:rPr>
+              <a:t> by </a:t>
+            </a:r>
+            <a:pPr/>
+            <a:r>
+              <a:rPr sz="3000" b="1">
+                <a:solidFill>
+                  <a:srgbClr val="1C2340"/>
+                </a:solidFill>
+                <a:highlight>
+                  <a:srgbClr val="FFD9C9"/>
+                </a:highlight>
+                <a:latin typeface="DM Sans"/>
+                <a:ea typeface="DM Sans"/>
+              </a:rPr>
+              <a:t>bus</a:t>
+            </a:r>
+            <a:pPr/>
+            <a:r>
+              <a:rPr sz="3000" b="1">
+                <a:solidFill>
+                  <a:srgbClr val="1C2340"/>
+                </a:solidFill>
+                <a:latin typeface="DM Sans"/>
+                <a:ea typeface="DM Sans"/>
+              </a:rPr>
+              <a:t> every day.</a:t>
+            </a:r>
+          </a:p>
+        </p:txBody>
+      </p:sp>
+      <p:sp>
+        <p:nvSpPr>
+          <p:cNvPr id="10" name=""/>
+          <p:cNvSpPr txBox="1"/>
+          <p:nvPr/>
+        </p:nvSpPr>
+        <p:spPr>
+          <a:xfrm>
+            <a:off x="3162300" y="3333750"/>
+            <a:ext cx="3933825" cy="304800"/>
+          </a:xfrm>
+          <a:prstGeom prst="rect">
+            <a:avLst/>
+          </a:prstGeom>
+          <a:noFill/>
+          <a:ln/>
+        </p:spPr>
+        <p:txBody>
+          <a:bodyPr wrap="square" lIns="0" tIns="0" rIns="0" bIns="0" anchor="ctr"/>
+          <a:lstStyle/>
+          <a:p>
+            <a:pPr/>
+            <a:r>
+              <a:rPr sz="1650">
+                <a:solidFill>
+                  <a:srgbClr val="4A5270"/>
+                </a:solidFill>
+                <a:latin typeface="Noto Sans JP"/>
+                <a:ea typeface="Noto Sans JP"/>
+              </a:rPr>
+              <a:t>私は毎日バスで学校に行きます。</a:t>
+            </a:r>
+          </a:p>
+        </p:txBody>
+      </p:sp>
+      <p:sp>
+        <p:nvSpPr>
+          <p:cNvPr id="11" name=""/>
+          <p:cNvSpPr/>
+          <p:nvPr/>
+        </p:nvSpPr>
+        <p:spPr>
+          <a:xfrm>
+            <a:off x="685800" y="4791075"/>
+            <a:ext cx="10820400" cy="1428750"/>
+          </a:xfrm>
+          <a:prstGeom prst="roundRect">
+            <a:avLst>
+              <a:gd name="adj" fmla="val 18667"/>
+            </a:avLst>
+          </a:prstGeom>
+          <a:solidFill>
+            <a:srgbClr val="FFFFFF"/>
+          </a:solidFill>
+          <a:ln/>
+        </p:spPr>
+      </p:sp>
+      <p:sp>
+        <p:nvSpPr>
+          <p:cNvPr id="12" name=""/>
+          <p:cNvSpPr/>
+          <p:nvPr/>
+        </p:nvSpPr>
+        <p:spPr>
+          <a:xfrm>
+            <a:off x="990600" y="5324475"/>
+            <a:ext cx="1028700" cy="371475"/>
+          </a:xfrm>
+          <a:prstGeom prst="roundRect">
+            <a:avLst>
+              <a:gd name="adj" fmla="val 50000"/>
+            </a:avLst>
+          </a:prstGeom>
+          <a:solidFill>
+            <a:srgbClr val="FFE3D8"/>
+          </a:solidFill>
+          <a:ln/>
+        </p:spPr>
+      </p:sp>
+      <p:sp>
+        <p:nvSpPr>
+          <p:cNvPr id="13" name=""/>
+          <p:cNvSpPr txBox="1"/>
+          <p:nvPr/>
+        </p:nvSpPr>
+        <p:spPr>
+          <a:xfrm>
+            <a:off x="1162050" y="5381625"/>
+            <a:ext cx="1133475" cy="247650"/>
+          </a:xfrm>
+          <a:prstGeom prst="rect">
+            <a:avLst/>
+          </a:prstGeom>
+          <a:noFill/>
+          <a:ln/>
+        </p:spPr>
+        <p:txBody>
+          <a:bodyPr wrap="square" lIns="0" tIns="0" rIns="0" bIns="0" anchor="ctr"/>
+          <a:lstStyle/>
+          <a:p>
+            <a:pPr/>
+            <a:r>
+              <a:rPr sz="1350" b="1">
+                <a:solidFill>
+                  <a:srgbClr val="C8401A"/>
+                </a:solidFill>
+                <a:latin typeface="Noto Sans JP"/>
+                <a:ea typeface="Noto Sans JP"/>
+              </a:rPr>
+              <a:t>ポイント</a:t>
+            </a:r>
+          </a:p>
+        </p:txBody>
+      </p:sp>
+      <p:sp>
+        <p:nvSpPr>
+          <p:cNvPr id="14" name=""/>
+          <p:cNvSpPr txBox="1"/>
+          <p:nvPr/>
+        </p:nvSpPr>
+        <p:spPr>
+          <a:xfrm>
+            <a:off x="2152650" y="5343525"/>
+            <a:ext cx="6791325" cy="333375"/>
+          </a:xfrm>
+          <a:prstGeom prst="rect">
+            <a:avLst/>
+          </a:prstGeom>
+          <a:noFill/>
+          <a:ln/>
+        </p:spPr>
+        <p:txBody>
+          <a:bodyPr wrap="square" lIns="0" tIns="0" rIns="0" bIns="0" anchor="ctr"/>
+          <a:lstStyle/>
+          <a:p>
+            <a:pPr/>
+            <a:r>
+              <a:rPr sz="1800" b="1">
+                <a:solidFill>
+                  <a:srgbClr val="1C2340"/>
+                </a:solidFill>
+                <a:latin typeface="DM Sans"/>
+                <a:ea typeface="DM Sans"/>
+              </a:rPr>
+              <a:t>go to school</a:t>
+            </a:r>
+            <a:pPr/>
+            <a:r>
+              <a:rPr sz="1800">
+                <a:solidFill>
+                  <a:srgbClr val="1C2340"/>
+                </a:solidFill>
+                <a:latin typeface="Noto Sans JP"/>
+                <a:ea typeface="Noto Sans JP"/>
+              </a:rPr>
+              <a:t>・</a:t>
+            </a:r>
+            <a:pPr/>
+            <a:r>
+              <a:rPr sz="1800" b="1">
+                <a:solidFill>
+                  <a:srgbClr val="1C2340"/>
+                </a:solidFill>
+                <a:latin typeface="DM Sans"/>
+                <a:ea typeface="DM Sans"/>
+              </a:rPr>
+              <a:t>by bus</a:t>
+            </a:r>
+            <a:pPr/>
+            <a:r>
+              <a:rPr sz="1800">
+                <a:solidFill>
+                  <a:srgbClr val="1C2340"/>
+                </a:solidFill>
+                <a:latin typeface="Noto Sans JP"/>
+                <a:ea typeface="Noto Sans JP"/>
+              </a:rPr>
+              <a:t> は冠詞をつけない決まった表現</a:t>
             </a:r>
           </a:p>
         </p:txBody>
@@ -30786,6 +31064,3345 @@
 </p:sld>
 </file>
 
+<file path=ppt/slides/slide60.xml><?xml version="1.0" encoding="utf-8"?>
+<p:sld xmlns:a="http://schemas.openxmlformats.org/drawingml/2006/main" xmlns:r="http://schemas.openxmlformats.org/officeDocument/2006/relationships" xmlns:p="http://schemas.openxmlformats.org/presentationml/2006/main">
+  <p:cSld name="Slide 60">
+    <p:bg>
+      <p:bgPr>
+        <a:solidFill>
+          <a:srgbClr val="EAF2FB"/>
+        </a:solidFill>
+      </p:bgPr>
+    </p:bg>
+    <p:spTree>
+      <p:nvGrpSpPr>
+        <p:cNvPr id="1" name=""/>
+        <p:cNvGrpSpPr/>
+        <p:nvPr/>
+      </p:nvGrpSpPr>
+      <p:grpSpPr>
+        <a:xfrm>
+          <a:off x="0" y="0"/>
+          <a:ext cx="0" cy="0"/>
+          <a:chOff x="0" y="0"/>
+          <a:chExt cx="0" cy="0"/>
+        </a:xfrm>
+      </p:grpSpPr>
+      <p:sp>
+        <p:nvSpPr>
+          <p:cNvPr id="2" name=""/>
+          <p:cNvSpPr txBox="1"/>
+          <p:nvPr/>
+        </p:nvSpPr>
+        <p:spPr>
+          <a:xfrm>
+            <a:off x="685800" y="219075"/>
+            <a:ext cx="2409825" cy="238125"/>
+          </a:xfrm>
+          <a:prstGeom prst="rect">
+            <a:avLst/>
+          </a:prstGeom>
+          <a:noFill/>
+          <a:ln/>
+        </p:spPr>
+        <p:txBody>
+          <a:bodyPr wrap="square" lIns="0" tIns="0" rIns="0" bIns="0" anchor="ctr"/>
+          <a:lstStyle/>
+          <a:p>
+            <a:pPr/>
+            <a:r>
+              <a:rPr sz="1300">
+                <a:solidFill>
+                  <a:srgbClr val="4A5270"/>
+                </a:solidFill>
+                <a:latin typeface="Noto Sans JP"/>
+                <a:ea typeface="Noto Sans JP"/>
+              </a:rPr>
+              <a:t>文法解説 / 冠詞 練習問題</a:t>
+            </a:r>
+          </a:p>
+        </p:txBody>
+      </p:sp>
+      <p:sp>
+        <p:nvSpPr>
+          <p:cNvPr id="3" name=""/>
+          <p:cNvSpPr/>
+          <p:nvPr/>
+        </p:nvSpPr>
+        <p:spPr>
+          <a:xfrm>
+            <a:off x="0" y="676275"/>
+            <a:ext cx="12192000" cy="0"/>
+          </a:xfrm>
+          <a:prstGeom prst="line">
+            <a:avLst/>
+          </a:prstGeom>
+          <a:noFill/>
+          <a:ln w="19050">
+            <a:solidFill>
+              <a:srgbClr val="D6E2F0"/>
+            </a:solidFill>
+            <a:prstDash val="solid"/>
+          </a:ln>
+        </p:spPr>
+      </p:sp>
+      <p:sp>
+        <p:nvSpPr>
+          <p:cNvPr id="4" name=""/>
+          <p:cNvSpPr/>
+          <p:nvPr/>
+        </p:nvSpPr>
+        <p:spPr>
+          <a:xfrm>
+            <a:off x="685800" y="1019175"/>
+            <a:ext cx="885825" cy="438150"/>
+          </a:xfrm>
+          <a:prstGeom prst="roundRect">
+            <a:avLst>
+              <a:gd name="adj" fmla="val 50425"/>
+            </a:avLst>
+          </a:prstGeom>
+          <a:solidFill>
+            <a:srgbClr val="E8461E"/>
+          </a:solidFill>
+          <a:ln/>
+        </p:spPr>
+      </p:sp>
+      <p:sp>
+        <p:nvSpPr>
+          <p:cNvPr id="5" name=""/>
+          <p:cNvSpPr txBox="1"/>
+          <p:nvPr/>
+        </p:nvSpPr>
+        <p:spPr>
+          <a:xfrm>
+            <a:off x="876300" y="1047750"/>
+            <a:ext cx="923925" cy="352425"/>
+          </a:xfrm>
+          <a:prstGeom prst="rect">
+            <a:avLst/>
+          </a:prstGeom>
+          <a:noFill/>
+          <a:ln/>
+        </p:spPr>
+        <p:txBody>
+          <a:bodyPr wrap="square" lIns="0" tIns="0" rIns="0" bIns="0" anchor="ctr"/>
+          <a:lstStyle/>
+          <a:p>
+            <a:pPr/>
+            <a:r>
+              <a:rPr sz="2100" b="1">
+                <a:solidFill>
+                  <a:srgbClr val="FFFFFF"/>
+                </a:solidFill>
+                <a:latin typeface="DM Sans"/>
+                <a:ea typeface="DM Sans"/>
+              </a:rPr>
+              <a:t>Q27</a:t>
+            </a:r>
+          </a:p>
+        </p:txBody>
+      </p:sp>
+      <p:sp>
+        <p:nvSpPr>
+          <p:cNvPr id="6" name=""/>
+          <p:cNvSpPr txBox="1"/>
+          <p:nvPr/>
+        </p:nvSpPr>
+        <p:spPr>
+          <a:xfrm>
+            <a:off x="1724025" y="933450"/>
+            <a:ext cx="3714750" cy="609600"/>
+          </a:xfrm>
+          <a:prstGeom prst="rect">
+            <a:avLst/>
+          </a:prstGeom>
+          <a:noFill/>
+          <a:ln/>
+        </p:spPr>
+        <p:txBody>
+          <a:bodyPr wrap="square" lIns="0" tIns="0" rIns="0" bIns="0" anchor="ctr"/>
+          <a:lstStyle/>
+          <a:p>
+            <a:pPr/>
+            <a:r>
+              <a:rPr sz="3300" b="1">
+                <a:solidFill>
+                  <a:srgbClr val="1C2340"/>
+                </a:solidFill>
+                <a:latin typeface="Noto Sans JP"/>
+                <a:ea typeface="Noto Sans JP"/>
+              </a:rPr>
+              <a:t>英語で言うと？</a:t>
+            </a:r>
+          </a:p>
+        </p:txBody>
+      </p:sp>
+      <p:sp>
+        <p:nvSpPr>
+          <p:cNvPr id="7" name=""/>
+          <p:cNvSpPr/>
+          <p:nvPr/>
+        </p:nvSpPr>
+        <p:spPr>
+          <a:xfrm>
+            <a:off x="685800" y="1724025"/>
+            <a:ext cx="10820400" cy="2857500"/>
+          </a:xfrm>
+          <a:prstGeom prst="roundRect">
+            <a:avLst>
+              <a:gd name="adj" fmla="val 9333"/>
+            </a:avLst>
+          </a:prstGeom>
+          <a:solidFill>
+            <a:srgbClr val="FFFFFF"/>
+          </a:solidFill>
+          <a:ln/>
+        </p:spPr>
+      </p:sp>
+      <p:pic>
+        <p:nvPicPr>
+          <p:cNvPr id="8" name="Image 0" descr="/home/user/hina-english/matome/img/luggage.png">    </p:cNvPr>
+          <p:cNvPicPr>
+            <a:picLocks noChangeAspect="1"/>
+          </p:cNvPicPr>
+          <p:nvPr/>
+        </p:nvPicPr>
+        <p:blipFill>
+          <a:blip r:embed="rId1"/>
+          <a:stretch>
+            <a:fillRect/>
+          </a:stretch>
+        </p:blipFill>
+        <p:spPr>
+          <a:xfrm>
+            <a:off x="971550" y="2200275"/>
+            <a:ext cx="1905000" cy="1905000"/>
+          </a:xfrm>
+          <a:prstGeom prst="rect">
+            <a:avLst/>
+          </a:prstGeom>
+        </p:spPr>
+      </p:pic>
+      <p:sp>
+        <p:nvSpPr>
+          <p:cNvPr id="9" name=""/>
+          <p:cNvSpPr txBox="1"/>
+          <p:nvPr/>
+        </p:nvSpPr>
+        <p:spPr>
+          <a:xfrm>
+            <a:off x="3162300" y="2895600"/>
+            <a:ext cx="4048125" cy="523875"/>
+          </a:xfrm>
+          <a:prstGeom prst="rect">
+            <a:avLst/>
+          </a:prstGeom>
+          <a:noFill/>
+          <a:ln/>
+        </p:spPr>
+        <p:txBody>
+          <a:bodyPr wrap="square" lIns="0" tIns="0" rIns="0" bIns="0" anchor="ctr"/>
+          <a:lstStyle/>
+          <a:p>
+            <a:pPr/>
+            <a:r>
+              <a:rPr sz="2850" b="1">
+                <a:solidFill>
+                  <a:srgbClr val="1C2340"/>
+                </a:solidFill>
+                <a:latin typeface="Noto Sans JP"/>
+                <a:ea typeface="Noto Sans JP"/>
+              </a:rPr>
+              <a:t>荷物が多すぎます。</a:t>
+            </a:r>
+          </a:p>
+        </p:txBody>
+      </p:sp>
+      <p:sp>
+        <p:nvSpPr>
+          <p:cNvPr id="10" name=""/>
+          <p:cNvSpPr/>
+          <p:nvPr/>
+        </p:nvSpPr>
+        <p:spPr>
+          <a:xfrm>
+            <a:off x="685800" y="5324475"/>
+            <a:ext cx="857250" cy="371475"/>
+          </a:xfrm>
+          <a:prstGeom prst="roundRect">
+            <a:avLst>
+              <a:gd name="adj" fmla="val 50000"/>
+            </a:avLst>
+          </a:prstGeom>
+          <a:solidFill>
+            <a:srgbClr val="FFE3D8"/>
+          </a:solidFill>
+          <a:ln/>
+        </p:spPr>
+      </p:sp>
+      <p:sp>
+        <p:nvSpPr>
+          <p:cNvPr id="11" name=""/>
+          <p:cNvSpPr txBox="1"/>
+          <p:nvPr/>
+        </p:nvSpPr>
+        <p:spPr>
+          <a:xfrm>
+            <a:off x="857250" y="5381625"/>
+            <a:ext cx="933450" cy="247650"/>
+          </a:xfrm>
+          <a:prstGeom prst="rect">
+            <a:avLst/>
+          </a:prstGeom>
+          <a:noFill/>
+          <a:ln/>
+        </p:spPr>
+        <p:txBody>
+          <a:bodyPr wrap="square" lIns="0" tIns="0" rIns="0" bIns="0" anchor="ctr"/>
+          <a:lstStyle/>
+          <a:p>
+            <a:pPr/>
+            <a:r>
+              <a:rPr sz="1350" b="1">
+                <a:solidFill>
+                  <a:srgbClr val="C8401A"/>
+                </a:solidFill>
+                <a:latin typeface="Noto Sans JP"/>
+                <a:ea typeface="Noto Sans JP"/>
+              </a:rPr>
+              <a:t>ヒント</a:t>
+            </a:r>
+          </a:p>
+        </p:txBody>
+      </p:sp>
+      <p:sp>
+        <p:nvSpPr>
+          <p:cNvPr id="12" name=""/>
+          <p:cNvSpPr txBox="1"/>
+          <p:nvPr/>
+        </p:nvSpPr>
+        <p:spPr>
+          <a:xfrm>
+            <a:off x="1847850" y="5314950"/>
+            <a:ext cx="3714750" cy="381000"/>
+          </a:xfrm>
+          <a:prstGeom prst="rect">
+            <a:avLst/>
+          </a:prstGeom>
+          <a:noFill/>
+          <a:ln/>
+        </p:spPr>
+        <p:txBody>
+          <a:bodyPr wrap="square" lIns="0" tIns="0" rIns="0" bIns="0" anchor="ctr"/>
+          <a:lstStyle/>
+          <a:p>
+            <a:pPr/>
+            <a:r>
+              <a:rPr sz="2100" b="1">
+                <a:solidFill>
+                  <a:srgbClr val="1C2340"/>
+                </a:solidFill>
+                <a:latin typeface="Noto Sans JP"/>
+                <a:ea typeface="Noto Sans JP"/>
+              </a:rPr>
+              <a:t>冠詞はいる？いらない？</a:t>
+            </a:r>
+          </a:p>
+        </p:txBody>
+      </p:sp>
+    </p:spTree>
+  </p:cSld>
+  <p:clrMapOvr>
+    <a:masterClrMapping/>
+  </p:clrMapOvr>
+</p:sld>
+</file>
+
+<file path=ppt/slides/slide61.xml><?xml version="1.0" encoding="utf-8"?>
+<p:sld xmlns:a="http://schemas.openxmlformats.org/drawingml/2006/main" xmlns:r="http://schemas.openxmlformats.org/officeDocument/2006/relationships" xmlns:p="http://schemas.openxmlformats.org/presentationml/2006/main">
+  <p:cSld name="Slide 61">
+    <p:bg>
+      <p:bgPr>
+        <a:solidFill>
+          <a:srgbClr val="EAF2FB"/>
+        </a:solidFill>
+      </p:bgPr>
+    </p:bg>
+    <p:spTree>
+      <p:nvGrpSpPr>
+        <p:cNvPr id="1" name=""/>
+        <p:cNvGrpSpPr/>
+        <p:nvPr/>
+      </p:nvGrpSpPr>
+      <p:grpSpPr>
+        <a:xfrm>
+          <a:off x="0" y="0"/>
+          <a:ext cx="0" cy="0"/>
+          <a:chOff x="0" y="0"/>
+          <a:chExt cx="0" cy="0"/>
+        </a:xfrm>
+      </p:grpSpPr>
+      <p:sp>
+        <p:nvSpPr>
+          <p:cNvPr id="2" name=""/>
+          <p:cNvSpPr txBox="1"/>
+          <p:nvPr/>
+        </p:nvSpPr>
+        <p:spPr>
+          <a:xfrm>
+            <a:off x="685800" y="219075"/>
+            <a:ext cx="2409825" cy="238125"/>
+          </a:xfrm>
+          <a:prstGeom prst="rect">
+            <a:avLst/>
+          </a:prstGeom>
+          <a:noFill/>
+          <a:ln/>
+        </p:spPr>
+        <p:txBody>
+          <a:bodyPr wrap="square" lIns="0" tIns="0" rIns="0" bIns="0" anchor="ctr"/>
+          <a:lstStyle/>
+          <a:p>
+            <a:pPr/>
+            <a:r>
+              <a:rPr sz="1300">
+                <a:solidFill>
+                  <a:srgbClr val="4A5270"/>
+                </a:solidFill>
+                <a:latin typeface="Noto Sans JP"/>
+                <a:ea typeface="Noto Sans JP"/>
+              </a:rPr>
+              <a:t>文法解説 / 冠詞 練習問題</a:t>
+            </a:r>
+          </a:p>
+        </p:txBody>
+      </p:sp>
+      <p:sp>
+        <p:nvSpPr>
+          <p:cNvPr id="3" name=""/>
+          <p:cNvSpPr/>
+          <p:nvPr/>
+        </p:nvSpPr>
+        <p:spPr>
+          <a:xfrm>
+            <a:off x="0" y="676275"/>
+            <a:ext cx="12192000" cy="0"/>
+          </a:xfrm>
+          <a:prstGeom prst="line">
+            <a:avLst/>
+          </a:prstGeom>
+          <a:noFill/>
+          <a:ln w="19050">
+            <a:solidFill>
+              <a:srgbClr val="D6E2F0"/>
+            </a:solidFill>
+            <a:prstDash val="solid"/>
+          </a:ln>
+        </p:spPr>
+      </p:sp>
+      <p:sp>
+        <p:nvSpPr>
+          <p:cNvPr id="4" name=""/>
+          <p:cNvSpPr/>
+          <p:nvPr/>
+        </p:nvSpPr>
+        <p:spPr>
+          <a:xfrm>
+            <a:off x="685800" y="1019175"/>
+            <a:ext cx="885825" cy="438150"/>
+          </a:xfrm>
+          <a:prstGeom prst="roundRect">
+            <a:avLst>
+              <a:gd name="adj" fmla="val 50425"/>
+            </a:avLst>
+          </a:prstGeom>
+          <a:solidFill>
+            <a:srgbClr val="E8461E"/>
+          </a:solidFill>
+          <a:ln/>
+        </p:spPr>
+      </p:sp>
+      <p:sp>
+        <p:nvSpPr>
+          <p:cNvPr id="5" name=""/>
+          <p:cNvSpPr txBox="1"/>
+          <p:nvPr/>
+        </p:nvSpPr>
+        <p:spPr>
+          <a:xfrm>
+            <a:off x="876300" y="1047750"/>
+            <a:ext cx="923925" cy="352425"/>
+          </a:xfrm>
+          <a:prstGeom prst="rect">
+            <a:avLst/>
+          </a:prstGeom>
+          <a:noFill/>
+          <a:ln/>
+        </p:spPr>
+        <p:txBody>
+          <a:bodyPr wrap="square" lIns="0" tIns="0" rIns="0" bIns="0" anchor="ctr"/>
+          <a:lstStyle/>
+          <a:p>
+            <a:pPr/>
+            <a:r>
+              <a:rPr sz="2100" b="1">
+                <a:solidFill>
+                  <a:srgbClr val="FFFFFF"/>
+                </a:solidFill>
+                <a:latin typeface="DM Sans"/>
+                <a:ea typeface="DM Sans"/>
+              </a:rPr>
+              <a:t>Q27</a:t>
+            </a:r>
+          </a:p>
+        </p:txBody>
+      </p:sp>
+      <p:sp>
+        <p:nvSpPr>
+          <p:cNvPr id="6" name=""/>
+          <p:cNvSpPr txBox="1"/>
+          <p:nvPr/>
+        </p:nvSpPr>
+        <p:spPr>
+          <a:xfrm>
+            <a:off x="1724025" y="933450"/>
+            <a:ext cx="3714750" cy="609600"/>
+          </a:xfrm>
+          <a:prstGeom prst="rect">
+            <a:avLst/>
+          </a:prstGeom>
+          <a:noFill/>
+          <a:ln/>
+        </p:spPr>
+        <p:txBody>
+          <a:bodyPr wrap="square" lIns="0" tIns="0" rIns="0" bIns="0" anchor="ctr"/>
+          <a:lstStyle/>
+          <a:p>
+            <a:pPr/>
+            <a:r>
+              <a:rPr sz="3300" b="1">
+                <a:solidFill>
+                  <a:srgbClr val="1C2340"/>
+                </a:solidFill>
+                <a:latin typeface="Noto Sans JP"/>
+                <a:ea typeface="Noto Sans JP"/>
+              </a:rPr>
+              <a:t>英語で言うと？</a:t>
+            </a:r>
+          </a:p>
+        </p:txBody>
+      </p:sp>
+      <p:sp>
+        <p:nvSpPr>
+          <p:cNvPr id="7" name=""/>
+          <p:cNvSpPr/>
+          <p:nvPr/>
+        </p:nvSpPr>
+        <p:spPr>
+          <a:xfrm>
+            <a:off x="685800" y="1724025"/>
+            <a:ext cx="10820400" cy="2857500"/>
+          </a:xfrm>
+          <a:prstGeom prst="roundRect">
+            <a:avLst>
+              <a:gd name="adj" fmla="val 9333"/>
+            </a:avLst>
+          </a:prstGeom>
+          <a:solidFill>
+            <a:srgbClr val="FFFFFF"/>
+          </a:solidFill>
+          <a:ln/>
+        </p:spPr>
+      </p:sp>
+      <p:pic>
+        <p:nvPicPr>
+          <p:cNvPr id="8" name="Image 0" descr="/home/user/hina-english/matome/img/luggage.png">    </p:cNvPr>
+          <p:cNvPicPr>
+            <a:picLocks noChangeAspect="1"/>
+          </p:cNvPicPr>
+          <p:nvPr/>
+        </p:nvPicPr>
+        <p:blipFill>
+          <a:blip r:embed="rId1"/>
+          <a:stretch>
+            <a:fillRect/>
+          </a:stretch>
+        </p:blipFill>
+        <p:spPr>
+          <a:xfrm>
+            <a:off x="971550" y="2200275"/>
+            <a:ext cx="1905000" cy="1905000"/>
+          </a:xfrm>
+          <a:prstGeom prst="rect">
+            <a:avLst/>
+          </a:prstGeom>
+        </p:spPr>
+      </p:pic>
+      <p:sp>
+        <p:nvSpPr>
+          <p:cNvPr id="9" name=""/>
+          <p:cNvSpPr txBox="1"/>
+          <p:nvPr/>
+        </p:nvSpPr>
+        <p:spPr>
+          <a:xfrm>
+            <a:off x="3162300" y="2676525"/>
+            <a:ext cx="5591175" cy="495300"/>
+          </a:xfrm>
+          <a:prstGeom prst="rect">
+            <a:avLst/>
+          </a:prstGeom>
+          <a:noFill/>
+          <a:ln/>
+        </p:spPr>
+        <p:txBody>
+          <a:bodyPr wrap="square" lIns="0" tIns="0" rIns="0" bIns="0" anchor="ctr"/>
+          <a:lstStyle/>
+          <a:p>
+            <a:pPr/>
+            <a:r>
+              <a:rPr sz="3000" b="1">
+                <a:solidFill>
+                  <a:srgbClr val="1C2340"/>
+                </a:solidFill>
+                <a:latin typeface="DM Sans"/>
+                <a:ea typeface="DM Sans"/>
+              </a:rPr>
+              <a:t>I have too much </a:t>
+            </a:r>
+            <a:pPr/>
+            <a:r>
+              <a:rPr sz="3000" b="1">
+                <a:solidFill>
+                  <a:srgbClr val="1C2340"/>
+                </a:solidFill>
+                <a:highlight>
+                  <a:srgbClr val="FFD9C9"/>
+                </a:highlight>
+                <a:latin typeface="DM Sans"/>
+                <a:ea typeface="DM Sans"/>
+              </a:rPr>
+              <a:t>luggage</a:t>
+            </a:r>
+            <a:pPr/>
+            <a:r>
+              <a:rPr sz="3000" b="1">
+                <a:solidFill>
+                  <a:srgbClr val="1C2340"/>
+                </a:solidFill>
+                <a:latin typeface="DM Sans"/>
+                <a:ea typeface="DM Sans"/>
+              </a:rPr>
+              <a:t>.</a:t>
+            </a:r>
+          </a:p>
+        </p:txBody>
+      </p:sp>
+      <p:sp>
+        <p:nvSpPr>
+          <p:cNvPr id="10" name=""/>
+          <p:cNvSpPr txBox="1"/>
+          <p:nvPr/>
+        </p:nvSpPr>
+        <p:spPr>
+          <a:xfrm>
+            <a:off x="3162300" y="3333750"/>
+            <a:ext cx="2486025" cy="304800"/>
+          </a:xfrm>
+          <a:prstGeom prst="rect">
+            <a:avLst/>
+          </a:prstGeom>
+          <a:noFill/>
+          <a:ln/>
+        </p:spPr>
+        <p:txBody>
+          <a:bodyPr wrap="square" lIns="0" tIns="0" rIns="0" bIns="0" anchor="ctr"/>
+          <a:lstStyle/>
+          <a:p>
+            <a:pPr/>
+            <a:r>
+              <a:rPr sz="1650">
+                <a:solidFill>
+                  <a:srgbClr val="4A5270"/>
+                </a:solidFill>
+                <a:latin typeface="Noto Sans JP"/>
+                <a:ea typeface="Noto Sans JP"/>
+              </a:rPr>
+              <a:t>荷物が多すぎます。</a:t>
+            </a:r>
+          </a:p>
+        </p:txBody>
+      </p:sp>
+      <p:sp>
+        <p:nvSpPr>
+          <p:cNvPr id="11" name=""/>
+          <p:cNvSpPr/>
+          <p:nvPr/>
+        </p:nvSpPr>
+        <p:spPr>
+          <a:xfrm>
+            <a:off x="685800" y="4791075"/>
+            <a:ext cx="10820400" cy="1428750"/>
+          </a:xfrm>
+          <a:prstGeom prst="roundRect">
+            <a:avLst>
+              <a:gd name="adj" fmla="val 18667"/>
+            </a:avLst>
+          </a:prstGeom>
+          <a:solidFill>
+            <a:srgbClr val="FFFFFF"/>
+          </a:solidFill>
+          <a:ln/>
+        </p:spPr>
+      </p:sp>
+      <p:sp>
+        <p:nvSpPr>
+          <p:cNvPr id="12" name=""/>
+          <p:cNvSpPr/>
+          <p:nvPr/>
+        </p:nvSpPr>
+        <p:spPr>
+          <a:xfrm>
+            <a:off x="990600" y="5324475"/>
+            <a:ext cx="1028700" cy="371475"/>
+          </a:xfrm>
+          <a:prstGeom prst="roundRect">
+            <a:avLst>
+              <a:gd name="adj" fmla="val 50000"/>
+            </a:avLst>
+          </a:prstGeom>
+          <a:solidFill>
+            <a:srgbClr val="FFE3D8"/>
+          </a:solidFill>
+          <a:ln/>
+        </p:spPr>
+      </p:sp>
+      <p:sp>
+        <p:nvSpPr>
+          <p:cNvPr id="13" name=""/>
+          <p:cNvSpPr txBox="1"/>
+          <p:nvPr/>
+        </p:nvSpPr>
+        <p:spPr>
+          <a:xfrm>
+            <a:off x="1162050" y="5381625"/>
+            <a:ext cx="1133475" cy="247650"/>
+          </a:xfrm>
+          <a:prstGeom prst="rect">
+            <a:avLst/>
+          </a:prstGeom>
+          <a:noFill/>
+          <a:ln/>
+        </p:spPr>
+        <p:txBody>
+          <a:bodyPr wrap="square" lIns="0" tIns="0" rIns="0" bIns="0" anchor="ctr"/>
+          <a:lstStyle/>
+          <a:p>
+            <a:pPr/>
+            <a:r>
+              <a:rPr sz="1350" b="1">
+                <a:solidFill>
+                  <a:srgbClr val="C8401A"/>
+                </a:solidFill>
+                <a:latin typeface="Noto Sans JP"/>
+                <a:ea typeface="Noto Sans JP"/>
+              </a:rPr>
+              <a:t>ポイント</a:t>
+            </a:r>
+          </a:p>
+        </p:txBody>
+      </p:sp>
+      <p:sp>
+        <p:nvSpPr>
+          <p:cNvPr id="14" name=""/>
+          <p:cNvSpPr txBox="1"/>
+          <p:nvPr/>
+        </p:nvSpPr>
+        <p:spPr>
+          <a:xfrm>
+            <a:off x="2152650" y="5343525"/>
+            <a:ext cx="6838950" cy="333375"/>
+          </a:xfrm>
+          <a:prstGeom prst="rect">
+            <a:avLst/>
+          </a:prstGeom>
+          <a:noFill/>
+          <a:ln/>
+        </p:spPr>
+        <p:txBody>
+          <a:bodyPr wrap="square" lIns="0" tIns="0" rIns="0" bIns="0" anchor="ctr"/>
+          <a:lstStyle/>
+          <a:p>
+            <a:pPr/>
+            <a:r>
+              <a:rPr sz="1800" b="1">
+                <a:solidFill>
+                  <a:srgbClr val="1C2340"/>
+                </a:solidFill>
+                <a:latin typeface="DM Sans"/>
+                <a:ea typeface="DM Sans"/>
+              </a:rPr>
+              <a:t>luggage</a:t>
+            </a:r>
+            <a:pPr/>
+            <a:r>
+              <a:rPr sz="1800">
+                <a:solidFill>
+                  <a:srgbClr val="1C2340"/>
+                </a:solidFill>
+                <a:latin typeface="Noto Sans JP"/>
+                <a:ea typeface="Noto Sans JP"/>
+              </a:rPr>
+              <a:t> は数えられない名詞なので、</a:t>
+            </a:r>
+            <a:pPr/>
+            <a:r>
+              <a:rPr sz="1800" b="1">
+                <a:solidFill>
+                  <a:srgbClr val="1C2340"/>
+                </a:solidFill>
+                <a:latin typeface="DM Sans"/>
+                <a:ea typeface="DM Sans"/>
+              </a:rPr>
+              <a:t>a</a:t>
+            </a:r>
+            <a:pPr/>
+            <a:r>
+              <a:rPr sz="1800">
+                <a:solidFill>
+                  <a:srgbClr val="1C2340"/>
+                </a:solidFill>
+                <a:latin typeface="Noto Sans JP"/>
+                <a:ea typeface="Noto Sans JP"/>
+              </a:rPr>
+              <a:t> も </a:t>
+            </a:r>
+            <a:pPr/>
+            <a:r>
+              <a:rPr sz="1800" b="1">
+                <a:solidFill>
+                  <a:srgbClr val="1C2340"/>
+                </a:solidFill>
+                <a:latin typeface="DM Sans"/>
+                <a:ea typeface="DM Sans"/>
+              </a:rPr>
+              <a:t>s</a:t>
+            </a:r>
+            <a:pPr/>
+            <a:r>
+              <a:rPr sz="1800">
+                <a:solidFill>
+                  <a:srgbClr val="1C2340"/>
+                </a:solidFill>
+                <a:latin typeface="Noto Sans JP"/>
+                <a:ea typeface="Noto Sans JP"/>
+              </a:rPr>
+              <a:t> もつけない</a:t>
+            </a:r>
+          </a:p>
+        </p:txBody>
+      </p:sp>
+    </p:spTree>
+  </p:cSld>
+  <p:clrMapOvr>
+    <a:masterClrMapping/>
+  </p:clrMapOvr>
+</p:sld>
+</file>
+
+<file path=ppt/slides/slide62.xml><?xml version="1.0" encoding="utf-8"?>
+<p:sld xmlns:a="http://schemas.openxmlformats.org/drawingml/2006/main" xmlns:r="http://schemas.openxmlformats.org/officeDocument/2006/relationships" xmlns:p="http://schemas.openxmlformats.org/presentationml/2006/main">
+  <p:cSld name="Slide 62">
+    <p:bg>
+      <p:bgPr>
+        <a:solidFill>
+          <a:srgbClr val="EAF2FB"/>
+        </a:solidFill>
+      </p:bgPr>
+    </p:bg>
+    <p:spTree>
+      <p:nvGrpSpPr>
+        <p:cNvPr id="1" name=""/>
+        <p:cNvGrpSpPr/>
+        <p:nvPr/>
+      </p:nvGrpSpPr>
+      <p:grpSpPr>
+        <a:xfrm>
+          <a:off x="0" y="0"/>
+          <a:ext cx="0" cy="0"/>
+          <a:chOff x="0" y="0"/>
+          <a:chExt cx="0" cy="0"/>
+        </a:xfrm>
+      </p:grpSpPr>
+      <p:sp>
+        <p:nvSpPr>
+          <p:cNvPr id="2" name=""/>
+          <p:cNvSpPr txBox="1"/>
+          <p:nvPr/>
+        </p:nvSpPr>
+        <p:spPr>
+          <a:xfrm>
+            <a:off x="685800" y="219075"/>
+            <a:ext cx="2409825" cy="238125"/>
+          </a:xfrm>
+          <a:prstGeom prst="rect">
+            <a:avLst/>
+          </a:prstGeom>
+          <a:noFill/>
+          <a:ln/>
+        </p:spPr>
+        <p:txBody>
+          <a:bodyPr wrap="square" lIns="0" tIns="0" rIns="0" bIns="0" anchor="ctr"/>
+          <a:lstStyle/>
+          <a:p>
+            <a:pPr/>
+            <a:r>
+              <a:rPr sz="1300">
+                <a:solidFill>
+                  <a:srgbClr val="4A5270"/>
+                </a:solidFill>
+                <a:latin typeface="Noto Sans JP"/>
+                <a:ea typeface="Noto Sans JP"/>
+              </a:rPr>
+              <a:t>文法解説 / 冠詞 練習問題</a:t>
+            </a:r>
+          </a:p>
+        </p:txBody>
+      </p:sp>
+      <p:sp>
+        <p:nvSpPr>
+          <p:cNvPr id="3" name=""/>
+          <p:cNvSpPr/>
+          <p:nvPr/>
+        </p:nvSpPr>
+        <p:spPr>
+          <a:xfrm>
+            <a:off x="0" y="676275"/>
+            <a:ext cx="12192000" cy="0"/>
+          </a:xfrm>
+          <a:prstGeom prst="line">
+            <a:avLst/>
+          </a:prstGeom>
+          <a:noFill/>
+          <a:ln w="19050">
+            <a:solidFill>
+              <a:srgbClr val="D6E2F0"/>
+            </a:solidFill>
+            <a:prstDash val="solid"/>
+          </a:ln>
+        </p:spPr>
+      </p:sp>
+      <p:sp>
+        <p:nvSpPr>
+          <p:cNvPr id="4" name=""/>
+          <p:cNvSpPr/>
+          <p:nvPr/>
+        </p:nvSpPr>
+        <p:spPr>
+          <a:xfrm>
+            <a:off x="685800" y="1019175"/>
+            <a:ext cx="914400" cy="438150"/>
+          </a:xfrm>
+          <a:prstGeom prst="roundRect">
+            <a:avLst>
+              <a:gd name="adj" fmla="val 50425"/>
+            </a:avLst>
+          </a:prstGeom>
+          <a:solidFill>
+            <a:srgbClr val="E8461E"/>
+          </a:solidFill>
+          <a:ln/>
+        </p:spPr>
+      </p:sp>
+      <p:sp>
+        <p:nvSpPr>
+          <p:cNvPr id="5" name=""/>
+          <p:cNvSpPr txBox="1"/>
+          <p:nvPr/>
+        </p:nvSpPr>
+        <p:spPr>
+          <a:xfrm>
+            <a:off x="876300" y="1047750"/>
+            <a:ext cx="952500" cy="352425"/>
+          </a:xfrm>
+          <a:prstGeom prst="rect">
+            <a:avLst/>
+          </a:prstGeom>
+          <a:noFill/>
+          <a:ln/>
+        </p:spPr>
+        <p:txBody>
+          <a:bodyPr wrap="square" lIns="0" tIns="0" rIns="0" bIns="0" anchor="ctr"/>
+          <a:lstStyle/>
+          <a:p>
+            <a:pPr/>
+            <a:r>
+              <a:rPr sz="2100" b="1">
+                <a:solidFill>
+                  <a:srgbClr val="FFFFFF"/>
+                </a:solidFill>
+                <a:latin typeface="DM Sans"/>
+                <a:ea typeface="DM Sans"/>
+              </a:rPr>
+              <a:t>Q28</a:t>
+            </a:r>
+          </a:p>
+        </p:txBody>
+      </p:sp>
+      <p:sp>
+        <p:nvSpPr>
+          <p:cNvPr id="6" name=""/>
+          <p:cNvSpPr txBox="1"/>
+          <p:nvPr/>
+        </p:nvSpPr>
+        <p:spPr>
+          <a:xfrm>
+            <a:off x="1752600" y="933450"/>
+            <a:ext cx="3714750" cy="609600"/>
+          </a:xfrm>
+          <a:prstGeom prst="rect">
+            <a:avLst/>
+          </a:prstGeom>
+          <a:noFill/>
+          <a:ln/>
+        </p:spPr>
+        <p:txBody>
+          <a:bodyPr wrap="square" lIns="0" tIns="0" rIns="0" bIns="0" anchor="ctr"/>
+          <a:lstStyle/>
+          <a:p>
+            <a:pPr/>
+            <a:r>
+              <a:rPr sz="3300" b="1">
+                <a:solidFill>
+                  <a:srgbClr val="1C2340"/>
+                </a:solidFill>
+                <a:latin typeface="Noto Sans JP"/>
+                <a:ea typeface="Noto Sans JP"/>
+              </a:rPr>
+              <a:t>英語で言うと？</a:t>
+            </a:r>
+          </a:p>
+        </p:txBody>
+      </p:sp>
+      <p:sp>
+        <p:nvSpPr>
+          <p:cNvPr id="7" name=""/>
+          <p:cNvSpPr/>
+          <p:nvPr/>
+        </p:nvSpPr>
+        <p:spPr>
+          <a:xfrm>
+            <a:off x="685800" y="1724025"/>
+            <a:ext cx="10820400" cy="2857500"/>
+          </a:xfrm>
+          <a:prstGeom prst="roundRect">
+            <a:avLst>
+              <a:gd name="adj" fmla="val 9333"/>
+            </a:avLst>
+          </a:prstGeom>
+          <a:solidFill>
+            <a:srgbClr val="FFFFFF"/>
+          </a:solidFill>
+          <a:ln/>
+        </p:spPr>
+      </p:sp>
+      <p:pic>
+        <p:nvPicPr>
+          <p:cNvPr id="8" name="Image 0" descr="/home/user/hina-english/matome/img/dog.png">    </p:cNvPr>
+          <p:cNvPicPr>
+            <a:picLocks noChangeAspect="1"/>
+          </p:cNvPicPr>
+          <p:nvPr/>
+        </p:nvPicPr>
+        <p:blipFill>
+          <a:blip r:embed="rId1"/>
+          <a:stretch>
+            <a:fillRect/>
+          </a:stretch>
+        </p:blipFill>
+        <p:spPr>
+          <a:xfrm>
+            <a:off x="971550" y="2200275"/>
+            <a:ext cx="1905000" cy="1905000"/>
+          </a:xfrm>
+          <a:prstGeom prst="rect">
+            <a:avLst/>
+          </a:prstGeom>
+        </p:spPr>
+      </p:pic>
+      <p:sp>
+        <p:nvSpPr>
+          <p:cNvPr id="9" name=""/>
+          <p:cNvSpPr txBox="1"/>
+          <p:nvPr/>
+        </p:nvSpPr>
+        <p:spPr>
+          <a:xfrm>
+            <a:off x="3162300" y="2895600"/>
+            <a:ext cx="7743825" cy="523875"/>
+          </a:xfrm>
+          <a:prstGeom prst="rect">
+            <a:avLst/>
+          </a:prstGeom>
+          <a:noFill/>
+          <a:ln/>
+        </p:spPr>
+        <p:txBody>
+          <a:bodyPr wrap="square" lIns="0" tIns="0" rIns="0" bIns="0" anchor="ctr"/>
+          <a:lstStyle/>
+          <a:p>
+            <a:pPr/>
+            <a:r>
+              <a:rPr sz="2850" b="1">
+                <a:solidFill>
+                  <a:srgbClr val="1C2340"/>
+                </a:solidFill>
+                <a:latin typeface="Noto Sans JP"/>
+                <a:ea typeface="Noto Sans JP"/>
+              </a:rPr>
+              <a:t>隣の家の犬たちはとてもかわいいです。</a:t>
+            </a:r>
+          </a:p>
+        </p:txBody>
+      </p:sp>
+      <p:sp>
+        <p:nvSpPr>
+          <p:cNvPr id="10" name=""/>
+          <p:cNvSpPr/>
+          <p:nvPr/>
+        </p:nvSpPr>
+        <p:spPr>
+          <a:xfrm>
+            <a:off x="685800" y="5324475"/>
+            <a:ext cx="857250" cy="371475"/>
+          </a:xfrm>
+          <a:prstGeom prst="roundRect">
+            <a:avLst>
+              <a:gd name="adj" fmla="val 50000"/>
+            </a:avLst>
+          </a:prstGeom>
+          <a:solidFill>
+            <a:srgbClr val="FFE3D8"/>
+          </a:solidFill>
+          <a:ln/>
+        </p:spPr>
+      </p:sp>
+      <p:sp>
+        <p:nvSpPr>
+          <p:cNvPr id="11" name=""/>
+          <p:cNvSpPr txBox="1"/>
+          <p:nvPr/>
+        </p:nvSpPr>
+        <p:spPr>
+          <a:xfrm>
+            <a:off x="857250" y="5381625"/>
+            <a:ext cx="933450" cy="247650"/>
+          </a:xfrm>
+          <a:prstGeom prst="rect">
+            <a:avLst/>
+          </a:prstGeom>
+          <a:noFill/>
+          <a:ln/>
+        </p:spPr>
+        <p:txBody>
+          <a:bodyPr wrap="square" lIns="0" tIns="0" rIns="0" bIns="0" anchor="ctr"/>
+          <a:lstStyle/>
+          <a:p>
+            <a:pPr/>
+            <a:r>
+              <a:rPr sz="1350" b="1">
+                <a:solidFill>
+                  <a:srgbClr val="C8401A"/>
+                </a:solidFill>
+                <a:latin typeface="Noto Sans JP"/>
+                <a:ea typeface="Noto Sans JP"/>
+              </a:rPr>
+              <a:t>ヒント</a:t>
+            </a:r>
+          </a:p>
+        </p:txBody>
+      </p:sp>
+      <p:sp>
+        <p:nvSpPr>
+          <p:cNvPr id="12" name=""/>
+          <p:cNvSpPr txBox="1"/>
+          <p:nvPr/>
+        </p:nvSpPr>
+        <p:spPr>
+          <a:xfrm>
+            <a:off x="1847850" y="5314950"/>
+            <a:ext cx="3714750" cy="381000"/>
+          </a:xfrm>
+          <a:prstGeom prst="rect">
+            <a:avLst/>
+          </a:prstGeom>
+          <a:noFill/>
+          <a:ln/>
+        </p:spPr>
+        <p:txBody>
+          <a:bodyPr wrap="square" lIns="0" tIns="0" rIns="0" bIns="0" anchor="ctr"/>
+          <a:lstStyle/>
+          <a:p>
+            <a:pPr/>
+            <a:r>
+              <a:rPr sz="2100" b="1">
+                <a:solidFill>
+                  <a:srgbClr val="1C2340"/>
+                </a:solidFill>
+                <a:latin typeface="Noto Sans JP"/>
+                <a:ea typeface="Noto Sans JP"/>
+              </a:rPr>
+              <a:t>冠詞はいる？いらない？</a:t>
+            </a:r>
+          </a:p>
+        </p:txBody>
+      </p:sp>
+    </p:spTree>
+  </p:cSld>
+  <p:clrMapOvr>
+    <a:masterClrMapping/>
+  </p:clrMapOvr>
+</p:sld>
+</file>
+
+<file path=ppt/slides/slide63.xml><?xml version="1.0" encoding="utf-8"?>
+<p:sld xmlns:a="http://schemas.openxmlformats.org/drawingml/2006/main" xmlns:r="http://schemas.openxmlformats.org/officeDocument/2006/relationships" xmlns:p="http://schemas.openxmlformats.org/presentationml/2006/main">
+  <p:cSld name="Slide 63">
+    <p:bg>
+      <p:bgPr>
+        <a:solidFill>
+          <a:srgbClr val="EAF2FB"/>
+        </a:solidFill>
+      </p:bgPr>
+    </p:bg>
+    <p:spTree>
+      <p:nvGrpSpPr>
+        <p:cNvPr id="1" name=""/>
+        <p:cNvGrpSpPr/>
+        <p:nvPr/>
+      </p:nvGrpSpPr>
+      <p:grpSpPr>
+        <a:xfrm>
+          <a:off x="0" y="0"/>
+          <a:ext cx="0" cy="0"/>
+          <a:chOff x="0" y="0"/>
+          <a:chExt cx="0" cy="0"/>
+        </a:xfrm>
+      </p:grpSpPr>
+      <p:sp>
+        <p:nvSpPr>
+          <p:cNvPr id="2" name=""/>
+          <p:cNvSpPr txBox="1"/>
+          <p:nvPr/>
+        </p:nvSpPr>
+        <p:spPr>
+          <a:xfrm>
+            <a:off x="685800" y="219075"/>
+            <a:ext cx="2409825" cy="238125"/>
+          </a:xfrm>
+          <a:prstGeom prst="rect">
+            <a:avLst/>
+          </a:prstGeom>
+          <a:noFill/>
+          <a:ln/>
+        </p:spPr>
+        <p:txBody>
+          <a:bodyPr wrap="square" lIns="0" tIns="0" rIns="0" bIns="0" anchor="ctr"/>
+          <a:lstStyle/>
+          <a:p>
+            <a:pPr/>
+            <a:r>
+              <a:rPr sz="1300">
+                <a:solidFill>
+                  <a:srgbClr val="4A5270"/>
+                </a:solidFill>
+                <a:latin typeface="Noto Sans JP"/>
+                <a:ea typeface="Noto Sans JP"/>
+              </a:rPr>
+              <a:t>文法解説 / 冠詞 練習問題</a:t>
+            </a:r>
+          </a:p>
+        </p:txBody>
+      </p:sp>
+      <p:sp>
+        <p:nvSpPr>
+          <p:cNvPr id="3" name=""/>
+          <p:cNvSpPr/>
+          <p:nvPr/>
+        </p:nvSpPr>
+        <p:spPr>
+          <a:xfrm>
+            <a:off x="0" y="676275"/>
+            <a:ext cx="12192000" cy="0"/>
+          </a:xfrm>
+          <a:prstGeom prst="line">
+            <a:avLst/>
+          </a:prstGeom>
+          <a:noFill/>
+          <a:ln w="19050">
+            <a:solidFill>
+              <a:srgbClr val="D6E2F0"/>
+            </a:solidFill>
+            <a:prstDash val="solid"/>
+          </a:ln>
+        </p:spPr>
+      </p:sp>
+      <p:sp>
+        <p:nvSpPr>
+          <p:cNvPr id="4" name=""/>
+          <p:cNvSpPr/>
+          <p:nvPr/>
+        </p:nvSpPr>
+        <p:spPr>
+          <a:xfrm>
+            <a:off x="685800" y="1019175"/>
+            <a:ext cx="914400" cy="438150"/>
+          </a:xfrm>
+          <a:prstGeom prst="roundRect">
+            <a:avLst>
+              <a:gd name="adj" fmla="val 50425"/>
+            </a:avLst>
+          </a:prstGeom>
+          <a:solidFill>
+            <a:srgbClr val="E8461E"/>
+          </a:solidFill>
+          <a:ln/>
+        </p:spPr>
+      </p:sp>
+      <p:sp>
+        <p:nvSpPr>
+          <p:cNvPr id="5" name=""/>
+          <p:cNvSpPr txBox="1"/>
+          <p:nvPr/>
+        </p:nvSpPr>
+        <p:spPr>
+          <a:xfrm>
+            <a:off x="876300" y="1047750"/>
+            <a:ext cx="952500" cy="352425"/>
+          </a:xfrm>
+          <a:prstGeom prst="rect">
+            <a:avLst/>
+          </a:prstGeom>
+          <a:noFill/>
+          <a:ln/>
+        </p:spPr>
+        <p:txBody>
+          <a:bodyPr wrap="square" lIns="0" tIns="0" rIns="0" bIns="0" anchor="ctr"/>
+          <a:lstStyle/>
+          <a:p>
+            <a:pPr/>
+            <a:r>
+              <a:rPr sz="2100" b="1">
+                <a:solidFill>
+                  <a:srgbClr val="FFFFFF"/>
+                </a:solidFill>
+                <a:latin typeface="DM Sans"/>
+                <a:ea typeface="DM Sans"/>
+              </a:rPr>
+              <a:t>Q28</a:t>
+            </a:r>
+          </a:p>
+        </p:txBody>
+      </p:sp>
+      <p:sp>
+        <p:nvSpPr>
+          <p:cNvPr id="6" name=""/>
+          <p:cNvSpPr txBox="1"/>
+          <p:nvPr/>
+        </p:nvSpPr>
+        <p:spPr>
+          <a:xfrm>
+            <a:off x="1752600" y="933450"/>
+            <a:ext cx="3714750" cy="609600"/>
+          </a:xfrm>
+          <a:prstGeom prst="rect">
+            <a:avLst/>
+          </a:prstGeom>
+          <a:noFill/>
+          <a:ln/>
+        </p:spPr>
+        <p:txBody>
+          <a:bodyPr wrap="square" lIns="0" tIns="0" rIns="0" bIns="0" anchor="ctr"/>
+          <a:lstStyle/>
+          <a:p>
+            <a:pPr/>
+            <a:r>
+              <a:rPr sz="3300" b="1">
+                <a:solidFill>
+                  <a:srgbClr val="1C2340"/>
+                </a:solidFill>
+                <a:latin typeface="Noto Sans JP"/>
+                <a:ea typeface="Noto Sans JP"/>
+              </a:rPr>
+              <a:t>英語で言うと？</a:t>
+            </a:r>
+          </a:p>
+        </p:txBody>
+      </p:sp>
+      <p:sp>
+        <p:nvSpPr>
+          <p:cNvPr id="7" name=""/>
+          <p:cNvSpPr/>
+          <p:nvPr/>
+        </p:nvSpPr>
+        <p:spPr>
+          <a:xfrm>
+            <a:off x="685800" y="1724025"/>
+            <a:ext cx="10820400" cy="2857500"/>
+          </a:xfrm>
+          <a:prstGeom prst="roundRect">
+            <a:avLst>
+              <a:gd name="adj" fmla="val 9333"/>
+            </a:avLst>
+          </a:prstGeom>
+          <a:solidFill>
+            <a:srgbClr val="FFFFFF"/>
+          </a:solidFill>
+          <a:ln/>
+        </p:spPr>
+      </p:sp>
+      <p:pic>
+        <p:nvPicPr>
+          <p:cNvPr id="8" name="Image 0" descr="/home/user/hina-english/matome/img/dog.png">    </p:cNvPr>
+          <p:cNvPicPr>
+            <a:picLocks noChangeAspect="1"/>
+          </p:cNvPicPr>
+          <p:nvPr/>
+        </p:nvPicPr>
+        <p:blipFill>
+          <a:blip r:embed="rId1"/>
+          <a:stretch>
+            <a:fillRect/>
+          </a:stretch>
+        </p:blipFill>
+        <p:spPr>
+          <a:xfrm>
+            <a:off x="971550" y="2200275"/>
+            <a:ext cx="1905000" cy="1905000"/>
+          </a:xfrm>
+          <a:prstGeom prst="rect">
+            <a:avLst/>
+          </a:prstGeom>
+        </p:spPr>
+      </p:pic>
+      <p:sp>
+        <p:nvSpPr>
+          <p:cNvPr id="9" name=""/>
+          <p:cNvSpPr txBox="1"/>
+          <p:nvPr/>
+        </p:nvSpPr>
+        <p:spPr>
+          <a:xfrm>
+            <a:off x="3162300" y="2676525"/>
+            <a:ext cx="7419975" cy="495300"/>
+          </a:xfrm>
+          <a:prstGeom prst="rect">
+            <a:avLst/>
+          </a:prstGeom>
+          <a:noFill/>
+          <a:ln/>
+        </p:spPr>
+        <p:txBody>
+          <a:bodyPr wrap="square" lIns="0" tIns="0" rIns="0" bIns="0" anchor="ctr"/>
+          <a:lstStyle/>
+          <a:p>
+            <a:pPr/>
+            <a:r>
+              <a:rPr sz="3000" b="1">
+                <a:solidFill>
+                  <a:srgbClr val="2F86CF"/>
+                </a:solidFill>
+                <a:latin typeface="DM Sans"/>
+                <a:ea typeface="DM Sans"/>
+              </a:rPr>
+              <a:t>The</a:t>
+            </a:r>
+            <a:pPr/>
+            <a:r>
+              <a:rPr sz="3000" b="1">
+                <a:solidFill>
+                  <a:srgbClr val="1C2340"/>
+                </a:solidFill>
+                <a:latin typeface="DM Sans"/>
+                <a:ea typeface="DM Sans"/>
+              </a:rPr>
+              <a:t> dogs next door are very cute.</a:t>
+            </a:r>
+          </a:p>
+        </p:txBody>
+      </p:sp>
+      <p:sp>
+        <p:nvSpPr>
+          <p:cNvPr id="10" name=""/>
+          <p:cNvSpPr txBox="1"/>
+          <p:nvPr/>
+        </p:nvSpPr>
+        <p:spPr>
+          <a:xfrm>
+            <a:off x="3162300" y="3333750"/>
+            <a:ext cx="4629150" cy="304800"/>
+          </a:xfrm>
+          <a:prstGeom prst="rect">
+            <a:avLst/>
+          </a:prstGeom>
+          <a:noFill/>
+          <a:ln/>
+        </p:spPr>
+        <p:txBody>
+          <a:bodyPr wrap="square" lIns="0" tIns="0" rIns="0" bIns="0" anchor="ctr"/>
+          <a:lstStyle/>
+          <a:p>
+            <a:pPr/>
+            <a:r>
+              <a:rPr sz="1650">
+                <a:solidFill>
+                  <a:srgbClr val="4A5270"/>
+                </a:solidFill>
+                <a:latin typeface="Noto Sans JP"/>
+                <a:ea typeface="Noto Sans JP"/>
+              </a:rPr>
+              <a:t>隣の家の犬たちはとてもかわいいです。</a:t>
+            </a:r>
+          </a:p>
+        </p:txBody>
+      </p:sp>
+      <p:sp>
+        <p:nvSpPr>
+          <p:cNvPr id="11" name=""/>
+          <p:cNvSpPr/>
+          <p:nvPr/>
+        </p:nvSpPr>
+        <p:spPr>
+          <a:xfrm>
+            <a:off x="685800" y="4791075"/>
+            <a:ext cx="10820400" cy="1428750"/>
+          </a:xfrm>
+          <a:prstGeom prst="roundRect">
+            <a:avLst>
+              <a:gd name="adj" fmla="val 18667"/>
+            </a:avLst>
+          </a:prstGeom>
+          <a:solidFill>
+            <a:srgbClr val="FFFFFF"/>
+          </a:solidFill>
+          <a:ln/>
+        </p:spPr>
+      </p:sp>
+      <p:sp>
+        <p:nvSpPr>
+          <p:cNvPr id="12" name=""/>
+          <p:cNvSpPr/>
+          <p:nvPr/>
+        </p:nvSpPr>
+        <p:spPr>
+          <a:xfrm>
+            <a:off x="990600" y="5324475"/>
+            <a:ext cx="1028700" cy="371475"/>
+          </a:xfrm>
+          <a:prstGeom prst="roundRect">
+            <a:avLst>
+              <a:gd name="adj" fmla="val 50000"/>
+            </a:avLst>
+          </a:prstGeom>
+          <a:solidFill>
+            <a:srgbClr val="FFE3D8"/>
+          </a:solidFill>
+          <a:ln/>
+        </p:spPr>
+      </p:sp>
+      <p:sp>
+        <p:nvSpPr>
+          <p:cNvPr id="13" name=""/>
+          <p:cNvSpPr txBox="1"/>
+          <p:nvPr/>
+        </p:nvSpPr>
+        <p:spPr>
+          <a:xfrm>
+            <a:off x="1162050" y="5381625"/>
+            <a:ext cx="1133475" cy="247650"/>
+          </a:xfrm>
+          <a:prstGeom prst="rect">
+            <a:avLst/>
+          </a:prstGeom>
+          <a:noFill/>
+          <a:ln/>
+        </p:spPr>
+        <p:txBody>
+          <a:bodyPr wrap="square" lIns="0" tIns="0" rIns="0" bIns="0" anchor="ctr"/>
+          <a:lstStyle/>
+          <a:p>
+            <a:pPr/>
+            <a:r>
+              <a:rPr sz="1350" b="1">
+                <a:solidFill>
+                  <a:srgbClr val="C8401A"/>
+                </a:solidFill>
+                <a:latin typeface="Noto Sans JP"/>
+                <a:ea typeface="Noto Sans JP"/>
+              </a:rPr>
+              <a:t>ポイント</a:t>
+            </a:r>
+          </a:p>
+        </p:txBody>
+      </p:sp>
+      <p:sp>
+        <p:nvSpPr>
+          <p:cNvPr id="14" name=""/>
+          <p:cNvSpPr txBox="1"/>
+          <p:nvPr/>
+        </p:nvSpPr>
+        <p:spPr>
+          <a:xfrm>
+            <a:off x="2152650" y="5343525"/>
+            <a:ext cx="6086475" cy="333375"/>
+          </a:xfrm>
+          <a:prstGeom prst="rect">
+            <a:avLst/>
+          </a:prstGeom>
+          <a:noFill/>
+          <a:ln/>
+        </p:spPr>
+        <p:txBody>
+          <a:bodyPr wrap="square" lIns="0" tIns="0" rIns="0" bIns="0" anchor="ctr"/>
+          <a:lstStyle/>
+          <a:p>
+            <a:pPr/>
+            <a:r>
+              <a:rPr sz="1800">
+                <a:solidFill>
+                  <a:srgbClr val="1C2340"/>
+                </a:solidFill>
+                <a:latin typeface="Noto Sans JP"/>
+                <a:ea typeface="Noto Sans JP"/>
+              </a:rPr>
+              <a:t>「隣の家の犬」と特定できるので、複数でも </a:t>
+            </a:r>
+            <a:pPr/>
+            <a:r>
+              <a:rPr sz="1800" b="1">
+                <a:solidFill>
+                  <a:srgbClr val="2F86CF"/>
+                </a:solidFill>
+                <a:latin typeface="DM Sans"/>
+                <a:ea typeface="DM Sans"/>
+              </a:rPr>
+              <a:t>the</a:t>
+            </a:r>
+          </a:p>
+        </p:txBody>
+      </p:sp>
+    </p:spTree>
+  </p:cSld>
+  <p:clrMapOvr>
+    <a:masterClrMapping/>
+  </p:clrMapOvr>
+</p:sld>
+</file>
+
+<file path=ppt/slides/slide64.xml><?xml version="1.0" encoding="utf-8"?>
+<p:sld xmlns:a="http://schemas.openxmlformats.org/drawingml/2006/main" xmlns:r="http://schemas.openxmlformats.org/officeDocument/2006/relationships" xmlns:p="http://schemas.openxmlformats.org/presentationml/2006/main">
+  <p:cSld name="Slide 64">
+    <p:bg>
+      <p:bgPr>
+        <a:solidFill>
+          <a:srgbClr val="EAF2FB"/>
+        </a:solidFill>
+      </p:bgPr>
+    </p:bg>
+    <p:spTree>
+      <p:nvGrpSpPr>
+        <p:cNvPr id="1" name=""/>
+        <p:cNvGrpSpPr/>
+        <p:nvPr/>
+      </p:nvGrpSpPr>
+      <p:grpSpPr>
+        <a:xfrm>
+          <a:off x="0" y="0"/>
+          <a:ext cx="0" cy="0"/>
+          <a:chOff x="0" y="0"/>
+          <a:chExt cx="0" cy="0"/>
+        </a:xfrm>
+      </p:grpSpPr>
+      <p:sp>
+        <p:nvSpPr>
+          <p:cNvPr id="2" name=""/>
+          <p:cNvSpPr txBox="1"/>
+          <p:nvPr/>
+        </p:nvSpPr>
+        <p:spPr>
+          <a:xfrm>
+            <a:off x="685800" y="219075"/>
+            <a:ext cx="2409825" cy="238125"/>
+          </a:xfrm>
+          <a:prstGeom prst="rect">
+            <a:avLst/>
+          </a:prstGeom>
+          <a:noFill/>
+          <a:ln/>
+        </p:spPr>
+        <p:txBody>
+          <a:bodyPr wrap="square" lIns="0" tIns="0" rIns="0" bIns="0" anchor="ctr"/>
+          <a:lstStyle/>
+          <a:p>
+            <a:pPr/>
+            <a:r>
+              <a:rPr sz="1300">
+                <a:solidFill>
+                  <a:srgbClr val="4A5270"/>
+                </a:solidFill>
+                <a:latin typeface="Noto Sans JP"/>
+                <a:ea typeface="Noto Sans JP"/>
+              </a:rPr>
+              <a:t>文法解説 / 冠詞 練習問題</a:t>
+            </a:r>
+          </a:p>
+        </p:txBody>
+      </p:sp>
+      <p:sp>
+        <p:nvSpPr>
+          <p:cNvPr id="3" name=""/>
+          <p:cNvSpPr/>
+          <p:nvPr/>
+        </p:nvSpPr>
+        <p:spPr>
+          <a:xfrm>
+            <a:off x="0" y="676275"/>
+            <a:ext cx="12192000" cy="0"/>
+          </a:xfrm>
+          <a:prstGeom prst="line">
+            <a:avLst/>
+          </a:prstGeom>
+          <a:noFill/>
+          <a:ln w="19050">
+            <a:solidFill>
+              <a:srgbClr val="D6E2F0"/>
+            </a:solidFill>
+            <a:prstDash val="solid"/>
+          </a:ln>
+        </p:spPr>
+      </p:sp>
+      <p:sp>
+        <p:nvSpPr>
+          <p:cNvPr id="4" name=""/>
+          <p:cNvSpPr/>
+          <p:nvPr/>
+        </p:nvSpPr>
+        <p:spPr>
+          <a:xfrm>
+            <a:off x="685800" y="1019175"/>
+            <a:ext cx="914400" cy="438150"/>
+          </a:xfrm>
+          <a:prstGeom prst="roundRect">
+            <a:avLst>
+              <a:gd name="adj" fmla="val 50425"/>
+            </a:avLst>
+          </a:prstGeom>
+          <a:solidFill>
+            <a:srgbClr val="E8461E"/>
+          </a:solidFill>
+          <a:ln/>
+        </p:spPr>
+      </p:sp>
+      <p:sp>
+        <p:nvSpPr>
+          <p:cNvPr id="5" name=""/>
+          <p:cNvSpPr txBox="1"/>
+          <p:nvPr/>
+        </p:nvSpPr>
+        <p:spPr>
+          <a:xfrm>
+            <a:off x="876300" y="1047750"/>
+            <a:ext cx="952500" cy="352425"/>
+          </a:xfrm>
+          <a:prstGeom prst="rect">
+            <a:avLst/>
+          </a:prstGeom>
+          <a:noFill/>
+          <a:ln/>
+        </p:spPr>
+        <p:txBody>
+          <a:bodyPr wrap="square" lIns="0" tIns="0" rIns="0" bIns="0" anchor="ctr"/>
+          <a:lstStyle/>
+          <a:p>
+            <a:pPr/>
+            <a:r>
+              <a:rPr sz="2100" b="1">
+                <a:solidFill>
+                  <a:srgbClr val="FFFFFF"/>
+                </a:solidFill>
+                <a:latin typeface="DM Sans"/>
+                <a:ea typeface="DM Sans"/>
+              </a:rPr>
+              <a:t>Q29</a:t>
+            </a:r>
+          </a:p>
+        </p:txBody>
+      </p:sp>
+      <p:sp>
+        <p:nvSpPr>
+          <p:cNvPr id="6" name=""/>
+          <p:cNvSpPr txBox="1"/>
+          <p:nvPr/>
+        </p:nvSpPr>
+        <p:spPr>
+          <a:xfrm>
+            <a:off x="1752600" y="933450"/>
+            <a:ext cx="3714750" cy="609600"/>
+          </a:xfrm>
+          <a:prstGeom prst="rect">
+            <a:avLst/>
+          </a:prstGeom>
+          <a:noFill/>
+          <a:ln/>
+        </p:spPr>
+        <p:txBody>
+          <a:bodyPr wrap="square" lIns="0" tIns="0" rIns="0" bIns="0" anchor="ctr"/>
+          <a:lstStyle/>
+          <a:p>
+            <a:pPr/>
+            <a:r>
+              <a:rPr sz="3300" b="1">
+                <a:solidFill>
+                  <a:srgbClr val="1C2340"/>
+                </a:solidFill>
+                <a:latin typeface="Noto Sans JP"/>
+                <a:ea typeface="Noto Sans JP"/>
+              </a:rPr>
+              <a:t>英語で言うと？</a:t>
+            </a:r>
+          </a:p>
+        </p:txBody>
+      </p:sp>
+      <p:sp>
+        <p:nvSpPr>
+          <p:cNvPr id="7" name=""/>
+          <p:cNvSpPr/>
+          <p:nvPr/>
+        </p:nvSpPr>
+        <p:spPr>
+          <a:xfrm>
+            <a:off x="685800" y="1724025"/>
+            <a:ext cx="10820400" cy="2857500"/>
+          </a:xfrm>
+          <a:prstGeom prst="roundRect">
+            <a:avLst>
+              <a:gd name="adj" fmla="val 9333"/>
+            </a:avLst>
+          </a:prstGeom>
+          <a:solidFill>
+            <a:srgbClr val="FFFFFF"/>
+          </a:solidFill>
+          <a:ln/>
+        </p:spPr>
+      </p:sp>
+      <p:pic>
+        <p:nvPicPr>
+          <p:cNvPr id="8" name="Image 0" descr="/home/user/hina-english/matome/img/cafe.png">    </p:cNvPr>
+          <p:cNvPicPr>
+            <a:picLocks noChangeAspect="1"/>
+          </p:cNvPicPr>
+          <p:nvPr/>
+        </p:nvPicPr>
+        <p:blipFill>
+          <a:blip r:embed="rId1"/>
+          <a:stretch>
+            <a:fillRect/>
+          </a:stretch>
+        </p:blipFill>
+        <p:spPr>
+          <a:xfrm>
+            <a:off x="971550" y="2200275"/>
+            <a:ext cx="1905000" cy="1905000"/>
+          </a:xfrm>
+          <a:prstGeom prst="rect">
+            <a:avLst/>
+          </a:prstGeom>
+        </p:spPr>
+      </p:pic>
+      <p:sp>
+        <p:nvSpPr>
+          <p:cNvPr id="9" name=""/>
+          <p:cNvSpPr txBox="1"/>
+          <p:nvPr/>
+        </p:nvSpPr>
+        <p:spPr>
+          <a:xfrm>
+            <a:off x="3162300" y="2619375"/>
+            <a:ext cx="7419975" cy="523875"/>
+          </a:xfrm>
+          <a:prstGeom prst="rect">
+            <a:avLst/>
+          </a:prstGeom>
+          <a:noFill/>
+          <a:ln/>
+        </p:spPr>
+        <p:txBody>
+          <a:bodyPr wrap="square" lIns="0" tIns="0" rIns="0" bIns="0" anchor="ctr"/>
+          <a:lstStyle/>
+          <a:p>
+            <a:pPr/>
+            <a:r>
+              <a:rPr sz="2850" b="1">
+                <a:solidFill>
+                  <a:srgbClr val="1C2340"/>
+                </a:solidFill>
+                <a:latin typeface="Noto Sans JP"/>
+                <a:ea typeface="Noto Sans JP"/>
+              </a:rPr>
+              <a:t>私は昨日、あるカフェに行きました。</a:t>
+            </a:r>
+          </a:p>
+        </p:txBody>
+      </p:sp>
+      <p:sp>
+        <p:nvSpPr>
+          <p:cNvPr id="10" name=""/>
+          <p:cNvSpPr txBox="1"/>
+          <p:nvPr/>
+        </p:nvSpPr>
+        <p:spPr>
+          <a:xfrm>
+            <a:off x="3162300" y="3162300"/>
+            <a:ext cx="7362825" cy="523875"/>
+          </a:xfrm>
+          <a:prstGeom prst="rect">
+            <a:avLst/>
+          </a:prstGeom>
+          <a:noFill/>
+          <a:ln/>
+        </p:spPr>
+        <p:txBody>
+          <a:bodyPr wrap="square" lIns="0" tIns="0" rIns="0" bIns="0" anchor="ctr"/>
+          <a:lstStyle/>
+          <a:p>
+            <a:pPr/>
+            <a:r>
+              <a:rPr sz="2850" b="1">
+                <a:solidFill>
+                  <a:srgbClr val="1C2340"/>
+                </a:solidFill>
+                <a:latin typeface="Noto Sans JP"/>
+                <a:ea typeface="Noto Sans JP"/>
+              </a:rPr>
+              <a:t>そのカフェはとても混んでいました。</a:t>
+            </a:r>
+          </a:p>
+        </p:txBody>
+      </p:sp>
+      <p:sp>
+        <p:nvSpPr>
+          <p:cNvPr id="11" name=""/>
+          <p:cNvSpPr/>
+          <p:nvPr/>
+        </p:nvSpPr>
+        <p:spPr>
+          <a:xfrm>
+            <a:off x="685800" y="5324475"/>
+            <a:ext cx="857250" cy="371475"/>
+          </a:xfrm>
+          <a:prstGeom prst="roundRect">
+            <a:avLst>
+              <a:gd name="adj" fmla="val 50000"/>
+            </a:avLst>
+          </a:prstGeom>
+          <a:solidFill>
+            <a:srgbClr val="FFE3D8"/>
+          </a:solidFill>
+          <a:ln/>
+        </p:spPr>
+      </p:sp>
+      <p:sp>
+        <p:nvSpPr>
+          <p:cNvPr id="12" name=""/>
+          <p:cNvSpPr txBox="1"/>
+          <p:nvPr/>
+        </p:nvSpPr>
+        <p:spPr>
+          <a:xfrm>
+            <a:off x="857250" y="5381625"/>
+            <a:ext cx="933450" cy="247650"/>
+          </a:xfrm>
+          <a:prstGeom prst="rect">
+            <a:avLst/>
+          </a:prstGeom>
+          <a:noFill/>
+          <a:ln/>
+        </p:spPr>
+        <p:txBody>
+          <a:bodyPr wrap="square" lIns="0" tIns="0" rIns="0" bIns="0" anchor="ctr"/>
+          <a:lstStyle/>
+          <a:p>
+            <a:pPr/>
+            <a:r>
+              <a:rPr sz="1350" b="1">
+                <a:solidFill>
+                  <a:srgbClr val="C8401A"/>
+                </a:solidFill>
+                <a:latin typeface="Noto Sans JP"/>
+                <a:ea typeface="Noto Sans JP"/>
+              </a:rPr>
+              <a:t>ヒント</a:t>
+            </a:r>
+          </a:p>
+        </p:txBody>
+      </p:sp>
+      <p:sp>
+        <p:nvSpPr>
+          <p:cNvPr id="13" name=""/>
+          <p:cNvSpPr txBox="1"/>
+          <p:nvPr/>
+        </p:nvSpPr>
+        <p:spPr>
+          <a:xfrm>
+            <a:off x="1847850" y="5314950"/>
+            <a:ext cx="3714750" cy="381000"/>
+          </a:xfrm>
+          <a:prstGeom prst="rect">
+            <a:avLst/>
+          </a:prstGeom>
+          <a:noFill/>
+          <a:ln/>
+        </p:spPr>
+        <p:txBody>
+          <a:bodyPr wrap="square" lIns="0" tIns="0" rIns="0" bIns="0" anchor="ctr"/>
+          <a:lstStyle/>
+          <a:p>
+            <a:pPr/>
+            <a:r>
+              <a:rPr sz="2100" b="1">
+                <a:solidFill>
+                  <a:srgbClr val="1C2340"/>
+                </a:solidFill>
+                <a:latin typeface="Noto Sans JP"/>
+                <a:ea typeface="Noto Sans JP"/>
+              </a:rPr>
+              <a:t>冠詞はいる？いらない？</a:t>
+            </a:r>
+          </a:p>
+        </p:txBody>
+      </p:sp>
+    </p:spTree>
+  </p:cSld>
+  <p:clrMapOvr>
+    <a:masterClrMapping/>
+  </p:clrMapOvr>
+</p:sld>
+</file>
+
+<file path=ppt/slides/slide65.xml><?xml version="1.0" encoding="utf-8"?>
+<p:sld xmlns:a="http://schemas.openxmlformats.org/drawingml/2006/main" xmlns:r="http://schemas.openxmlformats.org/officeDocument/2006/relationships" xmlns:p="http://schemas.openxmlformats.org/presentationml/2006/main">
+  <p:cSld name="Slide 65">
+    <p:bg>
+      <p:bgPr>
+        <a:solidFill>
+          <a:srgbClr val="EAF2FB"/>
+        </a:solidFill>
+      </p:bgPr>
+    </p:bg>
+    <p:spTree>
+      <p:nvGrpSpPr>
+        <p:cNvPr id="1" name=""/>
+        <p:cNvGrpSpPr/>
+        <p:nvPr/>
+      </p:nvGrpSpPr>
+      <p:grpSpPr>
+        <a:xfrm>
+          <a:off x="0" y="0"/>
+          <a:ext cx="0" cy="0"/>
+          <a:chOff x="0" y="0"/>
+          <a:chExt cx="0" cy="0"/>
+        </a:xfrm>
+      </p:grpSpPr>
+      <p:sp>
+        <p:nvSpPr>
+          <p:cNvPr id="2" name=""/>
+          <p:cNvSpPr txBox="1"/>
+          <p:nvPr/>
+        </p:nvSpPr>
+        <p:spPr>
+          <a:xfrm>
+            <a:off x="685800" y="219075"/>
+            <a:ext cx="2409825" cy="238125"/>
+          </a:xfrm>
+          <a:prstGeom prst="rect">
+            <a:avLst/>
+          </a:prstGeom>
+          <a:noFill/>
+          <a:ln/>
+        </p:spPr>
+        <p:txBody>
+          <a:bodyPr wrap="square" lIns="0" tIns="0" rIns="0" bIns="0" anchor="ctr"/>
+          <a:lstStyle/>
+          <a:p>
+            <a:pPr/>
+            <a:r>
+              <a:rPr sz="1300">
+                <a:solidFill>
+                  <a:srgbClr val="4A5270"/>
+                </a:solidFill>
+                <a:latin typeface="Noto Sans JP"/>
+                <a:ea typeface="Noto Sans JP"/>
+              </a:rPr>
+              <a:t>文法解説 / 冠詞 練習問題</a:t>
+            </a:r>
+          </a:p>
+        </p:txBody>
+      </p:sp>
+      <p:sp>
+        <p:nvSpPr>
+          <p:cNvPr id="3" name=""/>
+          <p:cNvSpPr/>
+          <p:nvPr/>
+        </p:nvSpPr>
+        <p:spPr>
+          <a:xfrm>
+            <a:off x="0" y="676275"/>
+            <a:ext cx="12192000" cy="0"/>
+          </a:xfrm>
+          <a:prstGeom prst="line">
+            <a:avLst/>
+          </a:prstGeom>
+          <a:noFill/>
+          <a:ln w="19050">
+            <a:solidFill>
+              <a:srgbClr val="D6E2F0"/>
+            </a:solidFill>
+            <a:prstDash val="solid"/>
+          </a:ln>
+        </p:spPr>
+      </p:sp>
+      <p:sp>
+        <p:nvSpPr>
+          <p:cNvPr id="4" name=""/>
+          <p:cNvSpPr/>
+          <p:nvPr/>
+        </p:nvSpPr>
+        <p:spPr>
+          <a:xfrm>
+            <a:off x="685800" y="1019175"/>
+            <a:ext cx="914400" cy="438150"/>
+          </a:xfrm>
+          <a:prstGeom prst="roundRect">
+            <a:avLst>
+              <a:gd name="adj" fmla="val 50425"/>
+            </a:avLst>
+          </a:prstGeom>
+          <a:solidFill>
+            <a:srgbClr val="E8461E"/>
+          </a:solidFill>
+          <a:ln/>
+        </p:spPr>
+      </p:sp>
+      <p:sp>
+        <p:nvSpPr>
+          <p:cNvPr id="5" name=""/>
+          <p:cNvSpPr txBox="1"/>
+          <p:nvPr/>
+        </p:nvSpPr>
+        <p:spPr>
+          <a:xfrm>
+            <a:off x="876300" y="1047750"/>
+            <a:ext cx="952500" cy="352425"/>
+          </a:xfrm>
+          <a:prstGeom prst="rect">
+            <a:avLst/>
+          </a:prstGeom>
+          <a:noFill/>
+          <a:ln/>
+        </p:spPr>
+        <p:txBody>
+          <a:bodyPr wrap="square" lIns="0" tIns="0" rIns="0" bIns="0" anchor="ctr"/>
+          <a:lstStyle/>
+          <a:p>
+            <a:pPr/>
+            <a:r>
+              <a:rPr sz="2100" b="1">
+                <a:solidFill>
+                  <a:srgbClr val="FFFFFF"/>
+                </a:solidFill>
+                <a:latin typeface="DM Sans"/>
+                <a:ea typeface="DM Sans"/>
+              </a:rPr>
+              <a:t>Q29</a:t>
+            </a:r>
+          </a:p>
+        </p:txBody>
+      </p:sp>
+      <p:sp>
+        <p:nvSpPr>
+          <p:cNvPr id="6" name=""/>
+          <p:cNvSpPr txBox="1"/>
+          <p:nvPr/>
+        </p:nvSpPr>
+        <p:spPr>
+          <a:xfrm>
+            <a:off x="1752600" y="933450"/>
+            <a:ext cx="3714750" cy="609600"/>
+          </a:xfrm>
+          <a:prstGeom prst="rect">
+            <a:avLst/>
+          </a:prstGeom>
+          <a:noFill/>
+          <a:ln/>
+        </p:spPr>
+        <p:txBody>
+          <a:bodyPr wrap="square" lIns="0" tIns="0" rIns="0" bIns="0" anchor="ctr"/>
+          <a:lstStyle/>
+          <a:p>
+            <a:pPr/>
+            <a:r>
+              <a:rPr sz="3300" b="1">
+                <a:solidFill>
+                  <a:srgbClr val="1C2340"/>
+                </a:solidFill>
+                <a:latin typeface="Noto Sans JP"/>
+                <a:ea typeface="Noto Sans JP"/>
+              </a:rPr>
+              <a:t>英語で言うと？</a:t>
+            </a:r>
+          </a:p>
+        </p:txBody>
+      </p:sp>
+      <p:sp>
+        <p:nvSpPr>
+          <p:cNvPr id="7" name=""/>
+          <p:cNvSpPr/>
+          <p:nvPr/>
+        </p:nvSpPr>
+        <p:spPr>
+          <a:xfrm>
+            <a:off x="685800" y="1724025"/>
+            <a:ext cx="10820400" cy="2857500"/>
+          </a:xfrm>
+          <a:prstGeom prst="roundRect">
+            <a:avLst>
+              <a:gd name="adj" fmla="val 9333"/>
+            </a:avLst>
+          </a:prstGeom>
+          <a:solidFill>
+            <a:srgbClr val="FFFFFF"/>
+          </a:solidFill>
+          <a:ln/>
+        </p:spPr>
+      </p:sp>
+      <p:pic>
+        <p:nvPicPr>
+          <p:cNvPr id="8" name="Image 0" descr="/home/user/hina-english/matome/img/cafe.png">    </p:cNvPr>
+          <p:cNvPicPr>
+            <a:picLocks noChangeAspect="1"/>
+          </p:cNvPicPr>
+          <p:nvPr/>
+        </p:nvPicPr>
+        <p:blipFill>
+          <a:blip r:embed="rId1"/>
+          <a:stretch>
+            <a:fillRect/>
+          </a:stretch>
+        </p:blipFill>
+        <p:spPr>
+          <a:xfrm>
+            <a:off x="971550" y="2200275"/>
+            <a:ext cx="1905000" cy="1905000"/>
+          </a:xfrm>
+          <a:prstGeom prst="rect">
+            <a:avLst/>
+          </a:prstGeom>
+        </p:spPr>
+      </p:pic>
+      <p:sp>
+        <p:nvSpPr>
+          <p:cNvPr id="9" name=""/>
+          <p:cNvSpPr txBox="1"/>
+          <p:nvPr/>
+        </p:nvSpPr>
+        <p:spPr>
+          <a:xfrm>
+            <a:off x="3162300" y="2371725"/>
+            <a:ext cx="5838825" cy="495300"/>
+          </a:xfrm>
+          <a:prstGeom prst="rect">
+            <a:avLst/>
+          </a:prstGeom>
+          <a:noFill/>
+          <a:ln/>
+        </p:spPr>
+        <p:txBody>
+          <a:bodyPr wrap="square" lIns="0" tIns="0" rIns="0" bIns="0" anchor="ctr"/>
+          <a:lstStyle/>
+          <a:p>
+            <a:pPr/>
+            <a:r>
+              <a:rPr sz="3000" b="1">
+                <a:solidFill>
+                  <a:srgbClr val="1C2340"/>
+                </a:solidFill>
+                <a:latin typeface="DM Sans"/>
+                <a:ea typeface="DM Sans"/>
+              </a:rPr>
+              <a:t>I went to </a:t>
+            </a:r>
+            <a:pPr/>
+            <a:r>
+              <a:rPr sz="3000" b="1">
+                <a:solidFill>
+                  <a:srgbClr val="E8461E"/>
+                </a:solidFill>
+                <a:latin typeface="DM Sans"/>
+                <a:ea typeface="DM Sans"/>
+              </a:rPr>
+              <a:t>a</a:t>
+            </a:r>
+            <a:pPr/>
+            <a:r>
+              <a:rPr sz="3000" b="1">
+                <a:solidFill>
+                  <a:srgbClr val="1C2340"/>
+                </a:solidFill>
+                <a:latin typeface="DM Sans"/>
+                <a:ea typeface="DM Sans"/>
+              </a:rPr>
+              <a:t> cafe yesterday.</a:t>
+            </a:r>
+          </a:p>
+        </p:txBody>
+      </p:sp>
+      <p:sp>
+        <p:nvSpPr>
+          <p:cNvPr id="10" name=""/>
+          <p:cNvSpPr txBox="1"/>
+          <p:nvPr/>
+        </p:nvSpPr>
+        <p:spPr>
+          <a:xfrm>
+            <a:off x="3162300" y="2981325"/>
+            <a:ext cx="6191250" cy="495300"/>
+          </a:xfrm>
+          <a:prstGeom prst="rect">
+            <a:avLst/>
+          </a:prstGeom>
+          <a:noFill/>
+          <a:ln/>
+        </p:spPr>
+        <p:txBody>
+          <a:bodyPr wrap="square" lIns="0" tIns="0" rIns="0" bIns="0" anchor="ctr"/>
+          <a:lstStyle/>
+          <a:p>
+            <a:pPr/>
+            <a:r>
+              <a:rPr sz="3000" b="1">
+                <a:solidFill>
+                  <a:srgbClr val="2F86CF"/>
+                </a:solidFill>
+                <a:latin typeface="DM Sans"/>
+                <a:ea typeface="DM Sans"/>
+              </a:rPr>
+              <a:t>The</a:t>
+            </a:r>
+            <a:pPr/>
+            <a:r>
+              <a:rPr sz="3000" b="1">
+                <a:solidFill>
+                  <a:srgbClr val="1C2340"/>
+                </a:solidFill>
+                <a:latin typeface="DM Sans"/>
+                <a:ea typeface="DM Sans"/>
+              </a:rPr>
+              <a:t> cafe was very crowded.</a:t>
+            </a:r>
+          </a:p>
+        </p:txBody>
+      </p:sp>
+      <p:sp>
+        <p:nvSpPr>
+          <p:cNvPr id="11" name=""/>
+          <p:cNvSpPr txBox="1"/>
+          <p:nvPr/>
+        </p:nvSpPr>
+        <p:spPr>
+          <a:xfrm>
+            <a:off x="3162300" y="3638550"/>
+            <a:ext cx="8505825" cy="304800"/>
+          </a:xfrm>
+          <a:prstGeom prst="rect">
+            <a:avLst/>
+          </a:prstGeom>
+          <a:noFill/>
+          <a:ln/>
+        </p:spPr>
+        <p:txBody>
+          <a:bodyPr wrap="square" lIns="0" tIns="0" rIns="0" bIns="0" anchor="ctr"/>
+          <a:lstStyle/>
+          <a:p>
+            <a:pPr/>
+            <a:r>
+              <a:rPr sz="1650">
+                <a:solidFill>
+                  <a:srgbClr val="4A5270"/>
+                </a:solidFill>
+                <a:latin typeface="Noto Sans JP"/>
+                <a:ea typeface="Noto Sans JP"/>
+              </a:rPr>
+              <a:t>私は昨日、あるカフェに行きました。そのカフェはとても混んでいました。</a:t>
+            </a:r>
+          </a:p>
+        </p:txBody>
+      </p:sp>
+      <p:sp>
+        <p:nvSpPr>
+          <p:cNvPr id="12" name=""/>
+          <p:cNvSpPr/>
+          <p:nvPr/>
+        </p:nvSpPr>
+        <p:spPr>
+          <a:xfrm>
+            <a:off x="685800" y="4791075"/>
+            <a:ext cx="10820400" cy="1428750"/>
+          </a:xfrm>
+          <a:prstGeom prst="roundRect">
+            <a:avLst>
+              <a:gd name="adj" fmla="val 18667"/>
+            </a:avLst>
+          </a:prstGeom>
+          <a:solidFill>
+            <a:srgbClr val="FFFFFF"/>
+          </a:solidFill>
+          <a:ln/>
+        </p:spPr>
+      </p:sp>
+      <p:sp>
+        <p:nvSpPr>
+          <p:cNvPr id="13" name=""/>
+          <p:cNvSpPr/>
+          <p:nvPr/>
+        </p:nvSpPr>
+        <p:spPr>
+          <a:xfrm>
+            <a:off x="990600" y="5324475"/>
+            <a:ext cx="1028700" cy="371475"/>
+          </a:xfrm>
+          <a:prstGeom prst="roundRect">
+            <a:avLst>
+              <a:gd name="adj" fmla="val 50000"/>
+            </a:avLst>
+          </a:prstGeom>
+          <a:solidFill>
+            <a:srgbClr val="FFE3D8"/>
+          </a:solidFill>
+          <a:ln/>
+        </p:spPr>
+      </p:sp>
+      <p:sp>
+        <p:nvSpPr>
+          <p:cNvPr id="14" name=""/>
+          <p:cNvSpPr txBox="1"/>
+          <p:nvPr/>
+        </p:nvSpPr>
+        <p:spPr>
+          <a:xfrm>
+            <a:off x="1162050" y="5381625"/>
+            <a:ext cx="1133475" cy="247650"/>
+          </a:xfrm>
+          <a:prstGeom prst="rect">
+            <a:avLst/>
+          </a:prstGeom>
+          <a:noFill/>
+          <a:ln/>
+        </p:spPr>
+        <p:txBody>
+          <a:bodyPr wrap="square" lIns="0" tIns="0" rIns="0" bIns="0" anchor="ctr"/>
+          <a:lstStyle/>
+          <a:p>
+            <a:pPr/>
+            <a:r>
+              <a:rPr sz="1350" b="1">
+                <a:solidFill>
+                  <a:srgbClr val="C8401A"/>
+                </a:solidFill>
+                <a:latin typeface="Noto Sans JP"/>
+                <a:ea typeface="Noto Sans JP"/>
+              </a:rPr>
+              <a:t>ポイント</a:t>
+            </a:r>
+          </a:p>
+        </p:txBody>
+      </p:sp>
+      <p:sp>
+        <p:nvSpPr>
+          <p:cNvPr id="15" name=""/>
+          <p:cNvSpPr txBox="1"/>
+          <p:nvPr/>
+        </p:nvSpPr>
+        <p:spPr>
+          <a:xfrm>
+            <a:off x="2152650" y="5343525"/>
+            <a:ext cx="6457950" cy="333375"/>
+          </a:xfrm>
+          <a:prstGeom prst="rect">
+            <a:avLst/>
+          </a:prstGeom>
+          <a:noFill/>
+          <a:ln/>
+        </p:spPr>
+        <p:txBody>
+          <a:bodyPr wrap="square" lIns="0" tIns="0" rIns="0" bIns="0" anchor="ctr"/>
+          <a:lstStyle/>
+          <a:p>
+            <a:pPr/>
+            <a:r>
+              <a:rPr sz="1800">
+                <a:solidFill>
+                  <a:srgbClr val="1C2340"/>
+                </a:solidFill>
+                <a:latin typeface="Noto Sans JP"/>
+                <a:ea typeface="Noto Sans JP"/>
+              </a:rPr>
+              <a:t>初登場は </a:t>
+            </a:r>
+            <a:pPr/>
+            <a:r>
+              <a:rPr sz="1800" b="1">
+                <a:solidFill>
+                  <a:srgbClr val="E8461E"/>
+                </a:solidFill>
+                <a:latin typeface="DM Sans"/>
+                <a:ea typeface="DM Sans"/>
+              </a:rPr>
+              <a:t>a</a:t>
+            </a:r>
+            <a:pPr/>
+            <a:r>
+              <a:rPr sz="1800">
+                <a:solidFill>
+                  <a:srgbClr val="1C2340"/>
+                </a:solidFill>
+                <a:latin typeface="Noto Sans JP"/>
+                <a:ea typeface="Noto Sans JP"/>
+              </a:rPr>
+              <a:t>、2回目は「さっきのカフェ」なので </a:t>
+            </a:r>
+            <a:pPr/>
+            <a:r>
+              <a:rPr sz="1800" b="1">
+                <a:solidFill>
+                  <a:srgbClr val="2F86CF"/>
+                </a:solidFill>
+                <a:latin typeface="DM Sans"/>
+                <a:ea typeface="DM Sans"/>
+              </a:rPr>
+              <a:t>the</a:t>
+            </a:r>
+          </a:p>
+        </p:txBody>
+      </p:sp>
+    </p:spTree>
+  </p:cSld>
+  <p:clrMapOvr>
+    <a:masterClrMapping/>
+  </p:clrMapOvr>
+</p:sld>
+</file>
+
+<file path=ppt/slides/slide66.xml><?xml version="1.0" encoding="utf-8"?>
+<p:sld xmlns:a="http://schemas.openxmlformats.org/drawingml/2006/main" xmlns:r="http://schemas.openxmlformats.org/officeDocument/2006/relationships" xmlns:p="http://schemas.openxmlformats.org/presentationml/2006/main">
+  <p:cSld name="Slide 66">
+    <p:bg>
+      <p:bgPr>
+        <a:solidFill>
+          <a:srgbClr val="EAF2FB"/>
+        </a:solidFill>
+      </p:bgPr>
+    </p:bg>
+    <p:spTree>
+      <p:nvGrpSpPr>
+        <p:cNvPr id="1" name=""/>
+        <p:cNvGrpSpPr/>
+        <p:nvPr/>
+      </p:nvGrpSpPr>
+      <p:grpSpPr>
+        <a:xfrm>
+          <a:off x="0" y="0"/>
+          <a:ext cx="0" cy="0"/>
+          <a:chOff x="0" y="0"/>
+          <a:chExt cx="0" cy="0"/>
+        </a:xfrm>
+      </p:grpSpPr>
+      <p:sp>
+        <p:nvSpPr>
+          <p:cNvPr id="2" name=""/>
+          <p:cNvSpPr txBox="1"/>
+          <p:nvPr/>
+        </p:nvSpPr>
+        <p:spPr>
+          <a:xfrm>
+            <a:off x="685800" y="219075"/>
+            <a:ext cx="2409825" cy="238125"/>
+          </a:xfrm>
+          <a:prstGeom prst="rect">
+            <a:avLst/>
+          </a:prstGeom>
+          <a:noFill/>
+          <a:ln/>
+        </p:spPr>
+        <p:txBody>
+          <a:bodyPr wrap="square" lIns="0" tIns="0" rIns="0" bIns="0" anchor="ctr"/>
+          <a:lstStyle/>
+          <a:p>
+            <a:pPr/>
+            <a:r>
+              <a:rPr sz="1300">
+                <a:solidFill>
+                  <a:srgbClr val="4A5270"/>
+                </a:solidFill>
+                <a:latin typeface="Noto Sans JP"/>
+                <a:ea typeface="Noto Sans JP"/>
+              </a:rPr>
+              <a:t>文法解説 / 冠詞 練習問題</a:t>
+            </a:r>
+          </a:p>
+        </p:txBody>
+      </p:sp>
+      <p:sp>
+        <p:nvSpPr>
+          <p:cNvPr id="3" name=""/>
+          <p:cNvSpPr/>
+          <p:nvPr/>
+        </p:nvSpPr>
+        <p:spPr>
+          <a:xfrm>
+            <a:off x="0" y="676275"/>
+            <a:ext cx="12192000" cy="0"/>
+          </a:xfrm>
+          <a:prstGeom prst="line">
+            <a:avLst/>
+          </a:prstGeom>
+          <a:noFill/>
+          <a:ln w="19050">
+            <a:solidFill>
+              <a:srgbClr val="D6E2F0"/>
+            </a:solidFill>
+            <a:prstDash val="solid"/>
+          </a:ln>
+        </p:spPr>
+      </p:sp>
+      <p:sp>
+        <p:nvSpPr>
+          <p:cNvPr id="4" name=""/>
+          <p:cNvSpPr/>
+          <p:nvPr/>
+        </p:nvSpPr>
+        <p:spPr>
+          <a:xfrm>
+            <a:off x="685800" y="1019175"/>
+            <a:ext cx="942975" cy="438150"/>
+          </a:xfrm>
+          <a:prstGeom prst="roundRect">
+            <a:avLst>
+              <a:gd name="adj" fmla="val 50425"/>
+            </a:avLst>
+          </a:prstGeom>
+          <a:solidFill>
+            <a:srgbClr val="E8461E"/>
+          </a:solidFill>
+          <a:ln/>
+        </p:spPr>
+      </p:sp>
+      <p:sp>
+        <p:nvSpPr>
+          <p:cNvPr id="5" name=""/>
+          <p:cNvSpPr txBox="1"/>
+          <p:nvPr/>
+        </p:nvSpPr>
+        <p:spPr>
+          <a:xfrm>
+            <a:off x="876300" y="1047750"/>
+            <a:ext cx="990600" cy="352425"/>
+          </a:xfrm>
+          <a:prstGeom prst="rect">
+            <a:avLst/>
+          </a:prstGeom>
+          <a:noFill/>
+          <a:ln/>
+        </p:spPr>
+        <p:txBody>
+          <a:bodyPr wrap="square" lIns="0" tIns="0" rIns="0" bIns="0" anchor="ctr"/>
+          <a:lstStyle/>
+          <a:p>
+            <a:pPr/>
+            <a:r>
+              <a:rPr sz="2100" b="1">
+                <a:solidFill>
+                  <a:srgbClr val="FFFFFF"/>
+                </a:solidFill>
+                <a:latin typeface="DM Sans"/>
+                <a:ea typeface="DM Sans"/>
+              </a:rPr>
+              <a:t>Q30</a:t>
+            </a:r>
+          </a:p>
+        </p:txBody>
+      </p:sp>
+      <p:sp>
+        <p:nvSpPr>
+          <p:cNvPr id="6" name=""/>
+          <p:cNvSpPr txBox="1"/>
+          <p:nvPr/>
+        </p:nvSpPr>
+        <p:spPr>
+          <a:xfrm>
+            <a:off x="1781175" y="933450"/>
+            <a:ext cx="3714750" cy="609600"/>
+          </a:xfrm>
+          <a:prstGeom prst="rect">
+            <a:avLst/>
+          </a:prstGeom>
+          <a:noFill/>
+          <a:ln/>
+        </p:spPr>
+        <p:txBody>
+          <a:bodyPr wrap="square" lIns="0" tIns="0" rIns="0" bIns="0" anchor="ctr"/>
+          <a:lstStyle/>
+          <a:p>
+            <a:pPr/>
+            <a:r>
+              <a:rPr sz="3300" b="1">
+                <a:solidFill>
+                  <a:srgbClr val="1C2340"/>
+                </a:solidFill>
+                <a:latin typeface="Noto Sans JP"/>
+                <a:ea typeface="Noto Sans JP"/>
+              </a:rPr>
+              <a:t>英語で言うと？</a:t>
+            </a:r>
+          </a:p>
+        </p:txBody>
+      </p:sp>
+      <p:sp>
+        <p:nvSpPr>
+          <p:cNvPr id="7" name=""/>
+          <p:cNvSpPr/>
+          <p:nvPr/>
+        </p:nvSpPr>
+        <p:spPr>
+          <a:xfrm>
+            <a:off x="685800" y="1724025"/>
+            <a:ext cx="10820400" cy="2857500"/>
+          </a:xfrm>
+          <a:prstGeom prst="roundRect">
+            <a:avLst>
+              <a:gd name="adj" fmla="val 9333"/>
+            </a:avLst>
+          </a:prstGeom>
+          <a:solidFill>
+            <a:srgbClr val="FFFFFF"/>
+          </a:solidFill>
+          <a:ln/>
+        </p:spPr>
+      </p:sp>
+      <p:pic>
+        <p:nvPicPr>
+          <p:cNvPr id="8" name="Image 0" descr="/home/user/hina-english/matome/img/coffee.png">    </p:cNvPr>
+          <p:cNvPicPr>
+            <a:picLocks noChangeAspect="1"/>
+          </p:cNvPicPr>
+          <p:nvPr/>
+        </p:nvPicPr>
+        <p:blipFill>
+          <a:blip r:embed="rId1"/>
+          <a:stretch>
+            <a:fillRect/>
+          </a:stretch>
+        </p:blipFill>
+        <p:spPr>
+          <a:xfrm>
+            <a:off x="971550" y="2200275"/>
+            <a:ext cx="1905000" cy="1905000"/>
+          </a:xfrm>
+          <a:prstGeom prst="rect">
+            <a:avLst/>
+          </a:prstGeom>
+        </p:spPr>
+      </p:pic>
+      <p:sp>
+        <p:nvSpPr>
+          <p:cNvPr id="9" name=""/>
+          <p:cNvSpPr txBox="1"/>
+          <p:nvPr/>
+        </p:nvSpPr>
+        <p:spPr>
+          <a:xfrm>
+            <a:off x="3162300" y="2895600"/>
+            <a:ext cx="7791450" cy="523875"/>
+          </a:xfrm>
+          <a:prstGeom prst="rect">
+            <a:avLst/>
+          </a:prstGeom>
+          <a:noFill/>
+          <a:ln/>
+        </p:spPr>
+        <p:txBody>
+          <a:bodyPr wrap="square" lIns="0" tIns="0" rIns="0" bIns="0" anchor="ctr"/>
+          <a:lstStyle/>
+          <a:p>
+            <a:pPr/>
+            <a:r>
+              <a:rPr sz="2850" b="1">
+                <a:solidFill>
+                  <a:srgbClr val="1C2340"/>
+                </a:solidFill>
+                <a:latin typeface="Noto Sans JP"/>
+                <a:ea typeface="Noto Sans JP"/>
+              </a:rPr>
+              <a:t>私はこのカフェのコーヒーが好きです。</a:t>
+            </a:r>
+          </a:p>
+        </p:txBody>
+      </p:sp>
+      <p:sp>
+        <p:nvSpPr>
+          <p:cNvPr id="10" name=""/>
+          <p:cNvSpPr/>
+          <p:nvPr/>
+        </p:nvSpPr>
+        <p:spPr>
+          <a:xfrm>
+            <a:off x="685800" y="5324475"/>
+            <a:ext cx="857250" cy="371475"/>
+          </a:xfrm>
+          <a:prstGeom prst="roundRect">
+            <a:avLst>
+              <a:gd name="adj" fmla="val 50000"/>
+            </a:avLst>
+          </a:prstGeom>
+          <a:solidFill>
+            <a:srgbClr val="FFE3D8"/>
+          </a:solidFill>
+          <a:ln/>
+        </p:spPr>
+      </p:sp>
+      <p:sp>
+        <p:nvSpPr>
+          <p:cNvPr id="11" name=""/>
+          <p:cNvSpPr txBox="1"/>
+          <p:nvPr/>
+        </p:nvSpPr>
+        <p:spPr>
+          <a:xfrm>
+            <a:off x="857250" y="5381625"/>
+            <a:ext cx="933450" cy="247650"/>
+          </a:xfrm>
+          <a:prstGeom prst="rect">
+            <a:avLst/>
+          </a:prstGeom>
+          <a:noFill/>
+          <a:ln/>
+        </p:spPr>
+        <p:txBody>
+          <a:bodyPr wrap="square" lIns="0" tIns="0" rIns="0" bIns="0" anchor="ctr"/>
+          <a:lstStyle/>
+          <a:p>
+            <a:pPr/>
+            <a:r>
+              <a:rPr sz="1350" b="1">
+                <a:solidFill>
+                  <a:srgbClr val="C8401A"/>
+                </a:solidFill>
+                <a:latin typeface="Noto Sans JP"/>
+                <a:ea typeface="Noto Sans JP"/>
+              </a:rPr>
+              <a:t>ヒント</a:t>
+            </a:r>
+          </a:p>
+        </p:txBody>
+      </p:sp>
+      <p:sp>
+        <p:nvSpPr>
+          <p:cNvPr id="12" name=""/>
+          <p:cNvSpPr txBox="1"/>
+          <p:nvPr/>
+        </p:nvSpPr>
+        <p:spPr>
+          <a:xfrm>
+            <a:off x="1847850" y="5314950"/>
+            <a:ext cx="3714750" cy="381000"/>
+          </a:xfrm>
+          <a:prstGeom prst="rect">
+            <a:avLst/>
+          </a:prstGeom>
+          <a:noFill/>
+          <a:ln/>
+        </p:spPr>
+        <p:txBody>
+          <a:bodyPr wrap="square" lIns="0" tIns="0" rIns="0" bIns="0" anchor="ctr"/>
+          <a:lstStyle/>
+          <a:p>
+            <a:pPr/>
+            <a:r>
+              <a:rPr sz="2100" b="1">
+                <a:solidFill>
+                  <a:srgbClr val="1C2340"/>
+                </a:solidFill>
+                <a:latin typeface="Noto Sans JP"/>
+                <a:ea typeface="Noto Sans JP"/>
+              </a:rPr>
+              <a:t>冠詞はいる？いらない？</a:t>
+            </a:r>
+          </a:p>
+        </p:txBody>
+      </p:sp>
+    </p:spTree>
+  </p:cSld>
+  <p:clrMapOvr>
+    <a:masterClrMapping/>
+  </p:clrMapOvr>
+</p:sld>
+</file>
+
+<file path=ppt/slides/slide67.xml><?xml version="1.0" encoding="utf-8"?>
+<p:sld xmlns:a="http://schemas.openxmlformats.org/drawingml/2006/main" xmlns:r="http://schemas.openxmlformats.org/officeDocument/2006/relationships" xmlns:p="http://schemas.openxmlformats.org/presentationml/2006/main">
+  <p:cSld name="Slide 67">
+    <p:bg>
+      <p:bgPr>
+        <a:solidFill>
+          <a:srgbClr val="EAF2FB"/>
+        </a:solidFill>
+      </p:bgPr>
+    </p:bg>
+    <p:spTree>
+      <p:nvGrpSpPr>
+        <p:cNvPr id="1" name=""/>
+        <p:cNvGrpSpPr/>
+        <p:nvPr/>
+      </p:nvGrpSpPr>
+      <p:grpSpPr>
+        <a:xfrm>
+          <a:off x="0" y="0"/>
+          <a:ext cx="0" cy="0"/>
+          <a:chOff x="0" y="0"/>
+          <a:chExt cx="0" cy="0"/>
+        </a:xfrm>
+      </p:grpSpPr>
+      <p:sp>
+        <p:nvSpPr>
+          <p:cNvPr id="2" name=""/>
+          <p:cNvSpPr txBox="1"/>
+          <p:nvPr/>
+        </p:nvSpPr>
+        <p:spPr>
+          <a:xfrm>
+            <a:off x="685800" y="219075"/>
+            <a:ext cx="2409825" cy="238125"/>
+          </a:xfrm>
+          <a:prstGeom prst="rect">
+            <a:avLst/>
+          </a:prstGeom>
+          <a:noFill/>
+          <a:ln/>
+        </p:spPr>
+        <p:txBody>
+          <a:bodyPr wrap="square" lIns="0" tIns="0" rIns="0" bIns="0" anchor="ctr"/>
+          <a:lstStyle/>
+          <a:p>
+            <a:pPr/>
+            <a:r>
+              <a:rPr sz="1300">
+                <a:solidFill>
+                  <a:srgbClr val="4A5270"/>
+                </a:solidFill>
+                <a:latin typeface="Noto Sans JP"/>
+                <a:ea typeface="Noto Sans JP"/>
+              </a:rPr>
+              <a:t>文法解説 / 冠詞 練習問題</a:t>
+            </a:r>
+          </a:p>
+        </p:txBody>
+      </p:sp>
+      <p:sp>
+        <p:nvSpPr>
+          <p:cNvPr id="3" name=""/>
+          <p:cNvSpPr/>
+          <p:nvPr/>
+        </p:nvSpPr>
+        <p:spPr>
+          <a:xfrm>
+            <a:off x="0" y="676275"/>
+            <a:ext cx="12192000" cy="0"/>
+          </a:xfrm>
+          <a:prstGeom prst="line">
+            <a:avLst/>
+          </a:prstGeom>
+          <a:noFill/>
+          <a:ln w="19050">
+            <a:solidFill>
+              <a:srgbClr val="D6E2F0"/>
+            </a:solidFill>
+            <a:prstDash val="solid"/>
+          </a:ln>
+        </p:spPr>
+      </p:sp>
+      <p:sp>
+        <p:nvSpPr>
+          <p:cNvPr id="4" name=""/>
+          <p:cNvSpPr/>
+          <p:nvPr/>
+        </p:nvSpPr>
+        <p:spPr>
+          <a:xfrm>
+            <a:off x="685800" y="1019175"/>
+            <a:ext cx="942975" cy="438150"/>
+          </a:xfrm>
+          <a:prstGeom prst="roundRect">
+            <a:avLst>
+              <a:gd name="adj" fmla="val 50425"/>
+            </a:avLst>
+          </a:prstGeom>
+          <a:solidFill>
+            <a:srgbClr val="E8461E"/>
+          </a:solidFill>
+          <a:ln/>
+        </p:spPr>
+      </p:sp>
+      <p:sp>
+        <p:nvSpPr>
+          <p:cNvPr id="5" name=""/>
+          <p:cNvSpPr txBox="1"/>
+          <p:nvPr/>
+        </p:nvSpPr>
+        <p:spPr>
+          <a:xfrm>
+            <a:off x="876300" y="1047750"/>
+            <a:ext cx="990600" cy="352425"/>
+          </a:xfrm>
+          <a:prstGeom prst="rect">
+            <a:avLst/>
+          </a:prstGeom>
+          <a:noFill/>
+          <a:ln/>
+        </p:spPr>
+        <p:txBody>
+          <a:bodyPr wrap="square" lIns="0" tIns="0" rIns="0" bIns="0" anchor="ctr"/>
+          <a:lstStyle/>
+          <a:p>
+            <a:pPr/>
+            <a:r>
+              <a:rPr sz="2100" b="1">
+                <a:solidFill>
+                  <a:srgbClr val="FFFFFF"/>
+                </a:solidFill>
+                <a:latin typeface="DM Sans"/>
+                <a:ea typeface="DM Sans"/>
+              </a:rPr>
+              <a:t>Q30</a:t>
+            </a:r>
+          </a:p>
+        </p:txBody>
+      </p:sp>
+      <p:sp>
+        <p:nvSpPr>
+          <p:cNvPr id="6" name=""/>
+          <p:cNvSpPr txBox="1"/>
+          <p:nvPr/>
+        </p:nvSpPr>
+        <p:spPr>
+          <a:xfrm>
+            <a:off x="1781175" y="933450"/>
+            <a:ext cx="3714750" cy="609600"/>
+          </a:xfrm>
+          <a:prstGeom prst="rect">
+            <a:avLst/>
+          </a:prstGeom>
+          <a:noFill/>
+          <a:ln/>
+        </p:spPr>
+        <p:txBody>
+          <a:bodyPr wrap="square" lIns="0" tIns="0" rIns="0" bIns="0" anchor="ctr"/>
+          <a:lstStyle/>
+          <a:p>
+            <a:pPr/>
+            <a:r>
+              <a:rPr sz="3300" b="1">
+                <a:solidFill>
+                  <a:srgbClr val="1C2340"/>
+                </a:solidFill>
+                <a:latin typeface="Noto Sans JP"/>
+                <a:ea typeface="Noto Sans JP"/>
+              </a:rPr>
+              <a:t>英語で言うと？</a:t>
+            </a:r>
+          </a:p>
+        </p:txBody>
+      </p:sp>
+      <p:sp>
+        <p:nvSpPr>
+          <p:cNvPr id="7" name=""/>
+          <p:cNvSpPr/>
+          <p:nvPr/>
+        </p:nvSpPr>
+        <p:spPr>
+          <a:xfrm>
+            <a:off x="685800" y="1724025"/>
+            <a:ext cx="10820400" cy="2857500"/>
+          </a:xfrm>
+          <a:prstGeom prst="roundRect">
+            <a:avLst>
+              <a:gd name="adj" fmla="val 9333"/>
+            </a:avLst>
+          </a:prstGeom>
+          <a:solidFill>
+            <a:srgbClr val="FFFFFF"/>
+          </a:solidFill>
+          <a:ln/>
+        </p:spPr>
+      </p:sp>
+      <p:pic>
+        <p:nvPicPr>
+          <p:cNvPr id="8" name="Image 0" descr="/home/user/hina-english/matome/img/coffee.png">    </p:cNvPr>
+          <p:cNvPicPr>
+            <a:picLocks noChangeAspect="1"/>
+          </p:cNvPicPr>
+          <p:nvPr/>
+        </p:nvPicPr>
+        <p:blipFill>
+          <a:blip r:embed="rId1"/>
+          <a:stretch>
+            <a:fillRect/>
+          </a:stretch>
+        </p:blipFill>
+        <p:spPr>
+          <a:xfrm>
+            <a:off x="971550" y="2200275"/>
+            <a:ext cx="1905000" cy="1905000"/>
+          </a:xfrm>
+          <a:prstGeom prst="rect">
+            <a:avLst/>
+          </a:prstGeom>
+        </p:spPr>
+      </p:pic>
+      <p:sp>
+        <p:nvSpPr>
+          <p:cNvPr id="9" name=""/>
+          <p:cNvSpPr txBox="1"/>
+          <p:nvPr/>
+        </p:nvSpPr>
+        <p:spPr>
+          <a:xfrm>
+            <a:off x="3162300" y="2676525"/>
+            <a:ext cx="6172200" cy="495300"/>
+          </a:xfrm>
+          <a:prstGeom prst="rect">
+            <a:avLst/>
+          </a:prstGeom>
+          <a:noFill/>
+          <a:ln/>
+        </p:spPr>
+        <p:txBody>
+          <a:bodyPr wrap="square" lIns="0" tIns="0" rIns="0" bIns="0" anchor="ctr"/>
+          <a:lstStyle/>
+          <a:p>
+            <a:pPr/>
+            <a:r>
+              <a:rPr sz="3000" b="1">
+                <a:solidFill>
+                  <a:srgbClr val="1C2340"/>
+                </a:solidFill>
+                <a:latin typeface="DM Sans"/>
+                <a:ea typeface="DM Sans"/>
+              </a:rPr>
+              <a:t>I like </a:t>
+            </a:r>
+            <a:pPr/>
+            <a:r>
+              <a:rPr sz="3000" b="1">
+                <a:solidFill>
+                  <a:srgbClr val="2F86CF"/>
+                </a:solidFill>
+                <a:latin typeface="DM Sans"/>
+                <a:ea typeface="DM Sans"/>
+              </a:rPr>
+              <a:t>the</a:t>
+            </a:r>
+            <a:pPr/>
+            <a:r>
+              <a:rPr sz="3000" b="1">
+                <a:solidFill>
+                  <a:srgbClr val="1C2340"/>
+                </a:solidFill>
+                <a:latin typeface="DM Sans"/>
+                <a:ea typeface="DM Sans"/>
+              </a:rPr>
+              <a:t> coffee at this cafe.</a:t>
+            </a:r>
+          </a:p>
+        </p:txBody>
+      </p:sp>
+      <p:sp>
+        <p:nvSpPr>
+          <p:cNvPr id="10" name=""/>
+          <p:cNvSpPr txBox="1"/>
+          <p:nvPr/>
+        </p:nvSpPr>
+        <p:spPr>
+          <a:xfrm>
+            <a:off x="3162300" y="3333750"/>
+            <a:ext cx="4657725" cy="304800"/>
+          </a:xfrm>
+          <a:prstGeom prst="rect">
+            <a:avLst/>
+          </a:prstGeom>
+          <a:noFill/>
+          <a:ln/>
+        </p:spPr>
+        <p:txBody>
+          <a:bodyPr wrap="square" lIns="0" tIns="0" rIns="0" bIns="0" anchor="ctr"/>
+          <a:lstStyle/>
+          <a:p>
+            <a:pPr/>
+            <a:r>
+              <a:rPr sz="1650">
+                <a:solidFill>
+                  <a:srgbClr val="4A5270"/>
+                </a:solidFill>
+                <a:latin typeface="Noto Sans JP"/>
+                <a:ea typeface="Noto Sans JP"/>
+              </a:rPr>
+              <a:t>私はこのカフェのコーヒーが好きです。</a:t>
+            </a:r>
+          </a:p>
+        </p:txBody>
+      </p:sp>
+      <p:sp>
+        <p:nvSpPr>
+          <p:cNvPr id="11" name=""/>
+          <p:cNvSpPr/>
+          <p:nvPr/>
+        </p:nvSpPr>
+        <p:spPr>
+          <a:xfrm>
+            <a:off x="685800" y="4791075"/>
+            <a:ext cx="10820400" cy="1428750"/>
+          </a:xfrm>
+          <a:prstGeom prst="roundRect">
+            <a:avLst>
+              <a:gd name="adj" fmla="val 18667"/>
+            </a:avLst>
+          </a:prstGeom>
+          <a:solidFill>
+            <a:srgbClr val="FFFFFF"/>
+          </a:solidFill>
+          <a:ln/>
+        </p:spPr>
+      </p:sp>
+      <p:sp>
+        <p:nvSpPr>
+          <p:cNvPr id="12" name=""/>
+          <p:cNvSpPr/>
+          <p:nvPr/>
+        </p:nvSpPr>
+        <p:spPr>
+          <a:xfrm>
+            <a:off x="990600" y="5324475"/>
+            <a:ext cx="1028700" cy="371475"/>
+          </a:xfrm>
+          <a:prstGeom prst="roundRect">
+            <a:avLst>
+              <a:gd name="adj" fmla="val 50000"/>
+            </a:avLst>
+          </a:prstGeom>
+          <a:solidFill>
+            <a:srgbClr val="FFE3D8"/>
+          </a:solidFill>
+          <a:ln/>
+        </p:spPr>
+      </p:sp>
+      <p:sp>
+        <p:nvSpPr>
+          <p:cNvPr id="13" name=""/>
+          <p:cNvSpPr txBox="1"/>
+          <p:nvPr/>
+        </p:nvSpPr>
+        <p:spPr>
+          <a:xfrm>
+            <a:off x="1162050" y="5381625"/>
+            <a:ext cx="1133475" cy="247650"/>
+          </a:xfrm>
+          <a:prstGeom prst="rect">
+            <a:avLst/>
+          </a:prstGeom>
+          <a:noFill/>
+          <a:ln/>
+        </p:spPr>
+        <p:txBody>
+          <a:bodyPr wrap="square" lIns="0" tIns="0" rIns="0" bIns="0" anchor="ctr"/>
+          <a:lstStyle/>
+          <a:p>
+            <a:pPr/>
+            <a:r>
+              <a:rPr sz="1350" b="1">
+                <a:solidFill>
+                  <a:srgbClr val="C8401A"/>
+                </a:solidFill>
+                <a:latin typeface="Noto Sans JP"/>
+                <a:ea typeface="Noto Sans JP"/>
+              </a:rPr>
+              <a:t>ポイント</a:t>
+            </a:r>
+          </a:p>
+        </p:txBody>
+      </p:sp>
+      <p:sp>
+        <p:nvSpPr>
+          <p:cNvPr id="14" name=""/>
+          <p:cNvSpPr txBox="1"/>
+          <p:nvPr/>
+        </p:nvSpPr>
+        <p:spPr>
+          <a:xfrm>
+            <a:off x="2152650" y="5343525"/>
+            <a:ext cx="6096000" cy="333375"/>
+          </a:xfrm>
+          <a:prstGeom prst="rect">
+            <a:avLst/>
+          </a:prstGeom>
+          <a:noFill/>
+          <a:ln/>
+        </p:spPr>
+        <p:txBody>
+          <a:bodyPr wrap="square" lIns="0" tIns="0" rIns="0" bIns="0" anchor="ctr"/>
+          <a:lstStyle/>
+          <a:p>
+            <a:pPr/>
+            <a:r>
+              <a:rPr sz="1800">
+                <a:solidFill>
+                  <a:srgbClr val="1C2340"/>
+                </a:solidFill>
+                <a:latin typeface="Noto Sans JP"/>
+                <a:ea typeface="Noto Sans JP"/>
+              </a:rPr>
+              <a:t>「このカフェの」コーヒーと特定できるので </a:t>
+            </a:r>
+            <a:pPr/>
+            <a:r>
+              <a:rPr sz="1800" b="1">
+                <a:solidFill>
+                  <a:srgbClr val="2F86CF"/>
+                </a:solidFill>
+                <a:latin typeface="DM Sans"/>
+                <a:ea typeface="DM Sans"/>
+              </a:rPr>
+              <a:t>the</a:t>
+            </a:r>
+          </a:p>
+        </p:txBody>
+      </p:sp>
+    </p:spTree>
+  </p:cSld>
+  <p:clrMapOvr>
+    <a:masterClrMapping/>
+  </p:clrMapOvr>
+</p:sld>
+</file>
+
 <file path=ppt/slides/slide7.xml><?xml version="1.0" encoding="utf-8"?>
 <p:sld xmlns:a="http://schemas.openxmlformats.org/drawingml/2006/main" xmlns:r="http://schemas.openxmlformats.org/officeDocument/2006/relationships" xmlns:p="http://schemas.openxmlformats.org/presentationml/2006/main">
   <p:cSld name="Slide 7">
@@ -31362,41 +34979,6 @@
                 <a:ea typeface="Noto Sans JP"/>
               </a:rPr>
               <a:t>なし</a:t>
-            </a:r>
-          </a:p>
-        </p:txBody>
-      </p:sp>
-      <p:sp>
-        <p:nvSpPr>
-          <p:cNvPr id="21" name=""/>
-          <p:cNvSpPr txBox="1"/>
-          <p:nvPr/>
-        </p:nvSpPr>
-        <p:spPr>
-          <a:xfrm>
-            <a:off x="5162550" y="5314950"/>
-            <a:ext cx="4000500" cy="381000"/>
-          </a:xfrm>
-          <a:prstGeom prst="rect">
-            <a:avLst/>
-          </a:prstGeom>
-          <a:noFill/>
-          <a:ln/>
-        </p:spPr>
-        <p:txBody>
-          <a:bodyPr wrap="square" lIns="0" tIns="0" rIns="0" bIns="0" anchor="ctr"/>
-          <a:lstStyle/>
-          <a:p>
-            <a:pPr/>
-            <a:r>
-              <a:rPr sz="2100" b="1">
-                <a:solidFill>
-                  <a:srgbClr val="1C2340"/>
-                </a:solidFill>
-                <a:latin typeface="Noto Sans JP"/>
-                <a:ea typeface="Noto Sans JP"/>
-              </a:rPr>
-              <a:t>声に出して答えてみよう！</a:t>
             </a:r>
           </a:p>
         </p:txBody>
@@ -32603,41 +36185,6 @@
                 <a:ea typeface="Noto Sans JP"/>
               </a:rPr>
               <a:t>なし</a:t>
-            </a:r>
-          </a:p>
-        </p:txBody>
-      </p:sp>
-      <p:sp>
-        <p:nvSpPr>
-          <p:cNvPr id="21" name=""/>
-          <p:cNvSpPr txBox="1"/>
-          <p:nvPr/>
-        </p:nvSpPr>
-        <p:spPr>
-          <a:xfrm>
-            <a:off x="5162550" y="5314950"/>
-            <a:ext cx="4000500" cy="381000"/>
-          </a:xfrm>
-          <a:prstGeom prst="rect">
-            <a:avLst/>
-          </a:prstGeom>
-          <a:noFill/>
-          <a:ln/>
-        </p:spPr>
-        <p:txBody>
-          <a:bodyPr wrap="square" lIns="0" tIns="0" rIns="0" bIns="0" anchor="ctr"/>
-          <a:lstStyle/>
-          <a:p>
-            <a:pPr/>
-            <a:r>
-              <a:rPr sz="2100" b="1">
-                <a:solidFill>
-                  <a:srgbClr val="1C2340"/>
-                </a:solidFill>
-                <a:latin typeface="Noto Sans JP"/>
-                <a:ea typeface="Noto Sans JP"/>
-              </a:rPr>
-              <a:t>声に出して答えてみよう！</a:t>
             </a:r>
           </a:p>
         </p:txBody>

--- a/matome/articles-4/articles-4-slides.pptx
+++ b/matome/articles-4/articles-4-slides.pptx
@@ -915,98 +915,6 @@
           </a:p>
         </p:txBody>
       </p:sp>
-      <p:sp>
-        <p:nvSpPr>
-          <p:cNvPr id="10" name=""/>
-          <p:cNvSpPr/>
-          <p:nvPr/>
-        </p:nvSpPr>
-        <p:spPr>
-          <a:xfrm>
-            <a:off x="685800" y="5324475"/>
-            <a:ext cx="857250" cy="371475"/>
-          </a:xfrm>
-          <a:prstGeom prst="roundRect">
-            <a:avLst>
-              <a:gd name="adj" fmla="val 50000"/>
-            </a:avLst>
-          </a:prstGeom>
-          <a:solidFill>
-            <a:srgbClr val="FFE3D8"/>
-          </a:solidFill>
-          <a:ln/>
-        </p:spPr>
-      </p:sp>
-      <p:sp>
-        <p:nvSpPr>
-          <p:cNvPr id="11" name=""/>
-          <p:cNvSpPr txBox="1"/>
-          <p:nvPr/>
-        </p:nvSpPr>
-        <p:spPr>
-          <a:xfrm>
-            <a:off x="857250" y="5381625"/>
-            <a:ext cx="933450" cy="247650"/>
-          </a:xfrm>
-          <a:prstGeom prst="rect">
-            <a:avLst/>
-          </a:prstGeom>
-          <a:noFill/>
-          <a:ln/>
-        </p:spPr>
-        <p:txBody>
-          <a:bodyPr wrap="square" lIns="0" tIns="0" rIns="0" bIns="0" anchor="ctr"/>
-          <a:lstStyle/>
-          <a:p>
-            <a:pPr/>
-            <a:r>
-              <a:rPr sz="1350" b="1">
-                <a:solidFill>
-                  <a:srgbClr val="C8401A"/>
-                </a:solidFill>
-                <a:latin typeface="Noto Sans JP"/>
-                <a:ea typeface="Noto Sans JP"/>
-              </a:rPr>
-              <a:t>ヒント</a:t>
-            </a:r>
-          </a:p>
-        </p:txBody>
-      </p:sp>
-      <p:sp>
-        <p:nvSpPr>
-          <p:cNvPr id="12" name=""/>
-          <p:cNvSpPr txBox="1"/>
-          <p:nvPr/>
-        </p:nvSpPr>
-        <p:spPr>
-          <a:xfrm>
-            <a:off x="1847850" y="5314950"/>
-            <a:ext cx="3714750" cy="381000"/>
-          </a:xfrm>
-          <a:prstGeom prst="rect">
-            <a:avLst/>
-          </a:prstGeom>
-          <a:noFill/>
-          <a:ln/>
-        </p:spPr>
-        <p:txBody>
-          <a:bodyPr wrap="square" lIns="0" tIns="0" rIns="0" bIns="0" anchor="ctr"/>
-          <a:lstStyle/>
-          <a:p>
-            <a:pPr/>
-            <a:r>
-              <a:rPr sz="2100" b="1">
-                <a:solidFill>
-                  <a:srgbClr val="1C2340"/>
-                </a:solidFill>
-                <a:latin typeface="Noto Sans JP"/>
-                <a:ea typeface="Noto Sans JP"/>
-              </a:rPr>
-              <a:t>冠詞はいる？いらない？</a:t>
-            </a:r>
-          </a:p>
-        </p:txBody>
-      </p:sp>
     </p:spTree>
   </p:cSld>
   <p:clrMapOvr>
@@ -4756,98 +4664,6 @@
           </a:p>
         </p:txBody>
       </p:sp>
-      <p:sp>
-        <p:nvSpPr>
-          <p:cNvPr id="10" name=""/>
-          <p:cNvSpPr/>
-          <p:nvPr/>
-        </p:nvSpPr>
-        <p:spPr>
-          <a:xfrm>
-            <a:off x="685800" y="5324475"/>
-            <a:ext cx="857250" cy="371475"/>
-          </a:xfrm>
-          <a:prstGeom prst="roundRect">
-            <a:avLst>
-              <a:gd name="adj" fmla="val 50000"/>
-            </a:avLst>
-          </a:prstGeom>
-          <a:solidFill>
-            <a:srgbClr val="FFE3D8"/>
-          </a:solidFill>
-          <a:ln/>
-        </p:spPr>
-      </p:sp>
-      <p:sp>
-        <p:nvSpPr>
-          <p:cNvPr id="11" name=""/>
-          <p:cNvSpPr txBox="1"/>
-          <p:nvPr/>
-        </p:nvSpPr>
-        <p:spPr>
-          <a:xfrm>
-            <a:off x="857250" y="5381625"/>
-            <a:ext cx="933450" cy="247650"/>
-          </a:xfrm>
-          <a:prstGeom prst="rect">
-            <a:avLst/>
-          </a:prstGeom>
-          <a:noFill/>
-          <a:ln/>
-        </p:spPr>
-        <p:txBody>
-          <a:bodyPr wrap="square" lIns="0" tIns="0" rIns="0" bIns="0" anchor="ctr"/>
-          <a:lstStyle/>
-          <a:p>
-            <a:pPr/>
-            <a:r>
-              <a:rPr sz="1350" b="1">
-                <a:solidFill>
-                  <a:srgbClr val="C8401A"/>
-                </a:solidFill>
-                <a:latin typeface="Noto Sans JP"/>
-                <a:ea typeface="Noto Sans JP"/>
-              </a:rPr>
-              <a:t>ヒント</a:t>
-            </a:r>
-          </a:p>
-        </p:txBody>
-      </p:sp>
-      <p:sp>
-        <p:nvSpPr>
-          <p:cNvPr id="12" name=""/>
-          <p:cNvSpPr txBox="1"/>
-          <p:nvPr/>
-        </p:nvSpPr>
-        <p:spPr>
-          <a:xfrm>
-            <a:off x="1847850" y="5314950"/>
-            <a:ext cx="3714750" cy="381000"/>
-          </a:xfrm>
-          <a:prstGeom prst="rect">
-            <a:avLst/>
-          </a:prstGeom>
-          <a:noFill/>
-          <a:ln/>
-        </p:spPr>
-        <p:txBody>
-          <a:bodyPr wrap="square" lIns="0" tIns="0" rIns="0" bIns="0" anchor="ctr"/>
-          <a:lstStyle/>
-          <a:p>
-            <a:pPr/>
-            <a:r>
-              <a:rPr sz="2100" b="1">
-                <a:solidFill>
-                  <a:srgbClr val="1C2340"/>
-                </a:solidFill>
-                <a:latin typeface="Noto Sans JP"/>
-                <a:ea typeface="Noto Sans JP"/>
-              </a:rPr>
-              <a:t>冠詞はいる？いらない？</a:t>
-            </a:r>
-          </a:p>
-        </p:txBody>
-      </p:sp>
     </p:spTree>
   </p:cSld>
   <p:clrMapOvr>
@@ -5636,7 +5452,7 @@
         <p:spPr>
           <a:xfrm>
             <a:off x="1847850" y="5314950"/>
-            <a:ext cx="3714750" cy="381000"/>
+            <a:ext cx="3419475" cy="390525"/>
           </a:xfrm>
           <a:prstGeom prst="rect">
             <a:avLst/>
@@ -5654,10 +5470,43 @@
                 <a:solidFill>
                   <a:srgbClr val="1C2340"/>
                 </a:solidFill>
-                <a:latin typeface="Noto Sans JP"/>
-                <a:ea typeface="Noto Sans JP"/>
-              </a:rPr>
-              <a:t>冠詞はいる？いらない？</a:t>
+                <a:latin typeface="DM Sans"/>
+                <a:ea typeface="DM Sans"/>
+              </a:rPr>
+              <a:t>Can I have </a:t>
+            </a:r>
+            <a:pPr/>
+            <a:r>
+              <a:rPr sz="2100" b="1">
+                <a:solidFill>
+                  <a:srgbClr val="1C2340"/>
+                </a:solidFill>
+                <a:latin typeface="Noto Sans JP"/>
+                <a:ea typeface="Noto Sans JP"/>
+              </a:rPr>
+              <a:t>〜</a:t>
+            </a:r>
+            <a:pPr/>
+            <a:r>
+              <a:rPr sz="2100" b="1">
+                <a:solidFill>
+                  <a:srgbClr val="1C2340"/>
+                </a:solidFill>
+                <a:latin typeface="DM Sans"/>
+                <a:ea typeface="DM Sans"/>
+              </a:rPr>
+              <a:t>?</a:t>
+            </a:r>
+            <a:pPr/>
+            <a:r>
+              <a:rPr sz="2100" b="1">
+                <a:solidFill>
+                  <a:srgbClr val="1C2340"/>
+                </a:solidFill>
+                <a:latin typeface="Noto Sans JP"/>
+                <a:ea typeface="Noto Sans JP"/>
+              </a:rPr>
+              <a:t> の形で</a:t>
             </a:r>
           </a:p>
         </p:txBody>
@@ -10438,98 +10287,6 @@
           </a:p>
         </p:txBody>
       </p:sp>
-      <p:sp>
-        <p:nvSpPr>
-          <p:cNvPr id="10" name=""/>
-          <p:cNvSpPr/>
-          <p:nvPr/>
-        </p:nvSpPr>
-        <p:spPr>
-          <a:xfrm>
-            <a:off x="685800" y="5324475"/>
-            <a:ext cx="857250" cy="371475"/>
-          </a:xfrm>
-          <a:prstGeom prst="roundRect">
-            <a:avLst>
-              <a:gd name="adj" fmla="val 50000"/>
-            </a:avLst>
-          </a:prstGeom>
-          <a:solidFill>
-            <a:srgbClr val="FFE3D8"/>
-          </a:solidFill>
-          <a:ln/>
-        </p:spPr>
-      </p:sp>
-      <p:sp>
-        <p:nvSpPr>
-          <p:cNvPr id="11" name=""/>
-          <p:cNvSpPr txBox="1"/>
-          <p:nvPr/>
-        </p:nvSpPr>
-        <p:spPr>
-          <a:xfrm>
-            <a:off x="857250" y="5381625"/>
-            <a:ext cx="933450" cy="247650"/>
-          </a:xfrm>
-          <a:prstGeom prst="rect">
-            <a:avLst/>
-          </a:prstGeom>
-          <a:noFill/>
-          <a:ln/>
-        </p:spPr>
-        <p:txBody>
-          <a:bodyPr wrap="square" lIns="0" tIns="0" rIns="0" bIns="0" anchor="ctr"/>
-          <a:lstStyle/>
-          <a:p>
-            <a:pPr/>
-            <a:r>
-              <a:rPr sz="1350" b="1">
-                <a:solidFill>
-                  <a:srgbClr val="C8401A"/>
-                </a:solidFill>
-                <a:latin typeface="Noto Sans JP"/>
-                <a:ea typeface="Noto Sans JP"/>
-              </a:rPr>
-              <a:t>ヒント</a:t>
-            </a:r>
-          </a:p>
-        </p:txBody>
-      </p:sp>
-      <p:sp>
-        <p:nvSpPr>
-          <p:cNvPr id="12" name=""/>
-          <p:cNvSpPr txBox="1"/>
-          <p:nvPr/>
-        </p:nvSpPr>
-        <p:spPr>
-          <a:xfrm>
-            <a:off x="1847850" y="5314950"/>
-            <a:ext cx="3714750" cy="381000"/>
-          </a:xfrm>
-          <a:prstGeom prst="rect">
-            <a:avLst/>
-          </a:prstGeom>
-          <a:noFill/>
-          <a:ln/>
-        </p:spPr>
-        <p:txBody>
-          <a:bodyPr wrap="square" lIns="0" tIns="0" rIns="0" bIns="0" anchor="ctr"/>
-          <a:lstStyle/>
-          <a:p>
-            <a:pPr/>
-            <a:r>
-              <a:rPr sz="2100" b="1">
-                <a:solidFill>
-                  <a:srgbClr val="1C2340"/>
-                </a:solidFill>
-                <a:latin typeface="Noto Sans JP"/>
-                <a:ea typeface="Noto Sans JP"/>
-              </a:rPr>
-              <a:t>冠詞はいる？いらない？</a:t>
-            </a:r>
-          </a:p>
-        </p:txBody>
-      </p:sp>
     </p:spTree>
   </p:cSld>
   <p:clrMapOvr>
@@ -11226,98 +10983,6 @@
                 <a:ea typeface="Noto Sans JP"/>
               </a:rPr>
               <a:t>彼女は英語を話します。</a:t>
-            </a:r>
-          </a:p>
-        </p:txBody>
-      </p:sp>
-      <p:sp>
-        <p:nvSpPr>
-          <p:cNvPr id="10" name=""/>
-          <p:cNvSpPr/>
-          <p:nvPr/>
-        </p:nvSpPr>
-        <p:spPr>
-          <a:xfrm>
-            <a:off x="685800" y="5324475"/>
-            <a:ext cx="857250" cy="371475"/>
-          </a:xfrm>
-          <a:prstGeom prst="roundRect">
-            <a:avLst>
-              <a:gd name="adj" fmla="val 50000"/>
-            </a:avLst>
-          </a:prstGeom>
-          <a:solidFill>
-            <a:srgbClr val="FFE3D8"/>
-          </a:solidFill>
-          <a:ln/>
-        </p:spPr>
-      </p:sp>
-      <p:sp>
-        <p:nvSpPr>
-          <p:cNvPr id="11" name=""/>
-          <p:cNvSpPr txBox="1"/>
-          <p:nvPr/>
-        </p:nvSpPr>
-        <p:spPr>
-          <a:xfrm>
-            <a:off x="857250" y="5381625"/>
-            <a:ext cx="933450" cy="247650"/>
-          </a:xfrm>
-          <a:prstGeom prst="rect">
-            <a:avLst/>
-          </a:prstGeom>
-          <a:noFill/>
-          <a:ln/>
-        </p:spPr>
-        <p:txBody>
-          <a:bodyPr wrap="square" lIns="0" tIns="0" rIns="0" bIns="0" anchor="ctr"/>
-          <a:lstStyle/>
-          <a:p>
-            <a:pPr/>
-            <a:r>
-              <a:rPr sz="1350" b="1">
-                <a:solidFill>
-                  <a:srgbClr val="C8401A"/>
-                </a:solidFill>
-                <a:latin typeface="Noto Sans JP"/>
-                <a:ea typeface="Noto Sans JP"/>
-              </a:rPr>
-              <a:t>ヒント</a:t>
-            </a:r>
-          </a:p>
-        </p:txBody>
-      </p:sp>
-      <p:sp>
-        <p:nvSpPr>
-          <p:cNvPr id="12" name=""/>
-          <p:cNvSpPr txBox="1"/>
-          <p:nvPr/>
-        </p:nvSpPr>
-        <p:spPr>
-          <a:xfrm>
-            <a:off x="1847850" y="5314950"/>
-            <a:ext cx="3714750" cy="381000"/>
-          </a:xfrm>
-          <a:prstGeom prst="rect">
-            <a:avLst/>
-          </a:prstGeom>
-          <a:noFill/>
-          <a:ln/>
-        </p:spPr>
-        <p:txBody>
-          <a:bodyPr wrap="square" lIns="0" tIns="0" rIns="0" bIns="0" anchor="ctr"/>
-          <a:lstStyle/>
-          <a:p>
-            <a:pPr/>
-            <a:r>
-              <a:rPr sz="2100" b="1">
-                <a:solidFill>
-                  <a:srgbClr val="1C2340"/>
-                </a:solidFill>
-                <a:latin typeface="Noto Sans JP"/>
-                <a:ea typeface="Noto Sans JP"/>
-              </a:rPr>
-              <a:t>冠詞はいる？いらない？</a:t>
             </a:r>
           </a:p>
         </p:txBody>
@@ -18122,98 +17787,6 @@
           </a:p>
         </p:txBody>
       </p:sp>
-      <p:sp>
-        <p:nvSpPr>
-          <p:cNvPr id="10" name=""/>
-          <p:cNvSpPr/>
-          <p:nvPr/>
-        </p:nvSpPr>
-        <p:spPr>
-          <a:xfrm>
-            <a:off x="685800" y="5324475"/>
-            <a:ext cx="857250" cy="371475"/>
-          </a:xfrm>
-          <a:prstGeom prst="roundRect">
-            <a:avLst>
-              <a:gd name="adj" fmla="val 50000"/>
-            </a:avLst>
-          </a:prstGeom>
-          <a:solidFill>
-            <a:srgbClr val="FFE3D8"/>
-          </a:solidFill>
-          <a:ln/>
-        </p:spPr>
-      </p:sp>
-      <p:sp>
-        <p:nvSpPr>
-          <p:cNvPr id="11" name=""/>
-          <p:cNvSpPr txBox="1"/>
-          <p:nvPr/>
-        </p:nvSpPr>
-        <p:spPr>
-          <a:xfrm>
-            <a:off x="857250" y="5381625"/>
-            <a:ext cx="933450" cy="247650"/>
-          </a:xfrm>
-          <a:prstGeom prst="rect">
-            <a:avLst/>
-          </a:prstGeom>
-          <a:noFill/>
-          <a:ln/>
-        </p:spPr>
-        <p:txBody>
-          <a:bodyPr wrap="square" lIns="0" tIns="0" rIns="0" bIns="0" anchor="ctr"/>
-          <a:lstStyle/>
-          <a:p>
-            <a:pPr/>
-            <a:r>
-              <a:rPr sz="1350" b="1">
-                <a:solidFill>
-                  <a:srgbClr val="C8401A"/>
-                </a:solidFill>
-                <a:latin typeface="Noto Sans JP"/>
-                <a:ea typeface="Noto Sans JP"/>
-              </a:rPr>
-              <a:t>ヒント</a:t>
-            </a:r>
-          </a:p>
-        </p:txBody>
-      </p:sp>
-      <p:sp>
-        <p:nvSpPr>
-          <p:cNvPr id="12" name=""/>
-          <p:cNvSpPr txBox="1"/>
-          <p:nvPr/>
-        </p:nvSpPr>
-        <p:spPr>
-          <a:xfrm>
-            <a:off x="1847850" y="5314950"/>
-            <a:ext cx="3714750" cy="381000"/>
-          </a:xfrm>
-          <a:prstGeom prst="rect">
-            <a:avLst/>
-          </a:prstGeom>
-          <a:noFill/>
-          <a:ln/>
-        </p:spPr>
-        <p:txBody>
-          <a:bodyPr wrap="square" lIns="0" tIns="0" rIns="0" bIns="0" anchor="ctr"/>
-          <a:lstStyle/>
-          <a:p>
-            <a:pPr/>
-            <a:r>
-              <a:rPr sz="2100" b="1">
-                <a:solidFill>
-                  <a:srgbClr val="1C2340"/>
-                </a:solidFill>
-                <a:latin typeface="Noto Sans JP"/>
-                <a:ea typeface="Noto Sans JP"/>
-              </a:rPr>
-              <a:t>冠詞はいる？いらない？</a:t>
-            </a:r>
-          </a:p>
-        </p:txBody>
-      </p:sp>
     </p:spTree>
   </p:cSld>
   <p:clrMapOvr>
@@ -19618,98 +19191,6 @@
           </a:p>
         </p:txBody>
       </p:sp>
-      <p:sp>
-        <p:nvSpPr>
-          <p:cNvPr id="10" name=""/>
-          <p:cNvSpPr/>
-          <p:nvPr/>
-        </p:nvSpPr>
-        <p:spPr>
-          <a:xfrm>
-            <a:off x="685800" y="5324475"/>
-            <a:ext cx="857250" cy="371475"/>
-          </a:xfrm>
-          <a:prstGeom prst="roundRect">
-            <a:avLst>
-              <a:gd name="adj" fmla="val 50000"/>
-            </a:avLst>
-          </a:prstGeom>
-          <a:solidFill>
-            <a:srgbClr val="FFE3D8"/>
-          </a:solidFill>
-          <a:ln/>
-        </p:spPr>
-      </p:sp>
-      <p:sp>
-        <p:nvSpPr>
-          <p:cNvPr id="11" name=""/>
-          <p:cNvSpPr txBox="1"/>
-          <p:nvPr/>
-        </p:nvSpPr>
-        <p:spPr>
-          <a:xfrm>
-            <a:off x="857250" y="5381625"/>
-            <a:ext cx="933450" cy="247650"/>
-          </a:xfrm>
-          <a:prstGeom prst="rect">
-            <a:avLst/>
-          </a:prstGeom>
-          <a:noFill/>
-          <a:ln/>
-        </p:spPr>
-        <p:txBody>
-          <a:bodyPr wrap="square" lIns="0" tIns="0" rIns="0" bIns="0" anchor="ctr"/>
-          <a:lstStyle/>
-          <a:p>
-            <a:pPr/>
-            <a:r>
-              <a:rPr sz="1350" b="1">
-                <a:solidFill>
-                  <a:srgbClr val="C8401A"/>
-                </a:solidFill>
-                <a:latin typeface="Noto Sans JP"/>
-                <a:ea typeface="Noto Sans JP"/>
-              </a:rPr>
-              <a:t>ヒント</a:t>
-            </a:r>
-          </a:p>
-        </p:txBody>
-      </p:sp>
-      <p:sp>
-        <p:nvSpPr>
-          <p:cNvPr id="12" name=""/>
-          <p:cNvSpPr txBox="1"/>
-          <p:nvPr/>
-        </p:nvSpPr>
-        <p:spPr>
-          <a:xfrm>
-            <a:off x="1847850" y="5314950"/>
-            <a:ext cx="3714750" cy="381000"/>
-          </a:xfrm>
-          <a:prstGeom prst="rect">
-            <a:avLst/>
-          </a:prstGeom>
-          <a:noFill/>
-          <a:ln/>
-        </p:spPr>
-        <p:txBody>
-          <a:bodyPr wrap="square" lIns="0" tIns="0" rIns="0" bIns="0" anchor="ctr"/>
-          <a:lstStyle/>
-          <a:p>
-            <a:pPr/>
-            <a:r>
-              <a:rPr sz="2100" b="1">
-                <a:solidFill>
-                  <a:srgbClr val="1C2340"/>
-                </a:solidFill>
-                <a:latin typeface="Noto Sans JP"/>
-                <a:ea typeface="Noto Sans JP"/>
-              </a:rPr>
-              <a:t>冠詞はいる？いらない？</a:t>
-            </a:r>
-          </a:p>
-        </p:txBody>
-      </p:sp>
     </p:spTree>
   </p:cSld>
   <p:clrMapOvr>
@@ -20429,98 +19910,6 @@
           </a:p>
         </p:txBody>
       </p:sp>
-      <p:sp>
-        <p:nvSpPr>
-          <p:cNvPr id="10" name=""/>
-          <p:cNvSpPr/>
-          <p:nvPr/>
-        </p:nvSpPr>
-        <p:spPr>
-          <a:xfrm>
-            <a:off x="685800" y="5324475"/>
-            <a:ext cx="857250" cy="371475"/>
-          </a:xfrm>
-          <a:prstGeom prst="roundRect">
-            <a:avLst>
-              <a:gd name="adj" fmla="val 50000"/>
-            </a:avLst>
-          </a:prstGeom>
-          <a:solidFill>
-            <a:srgbClr val="FFE3D8"/>
-          </a:solidFill>
-          <a:ln/>
-        </p:spPr>
-      </p:sp>
-      <p:sp>
-        <p:nvSpPr>
-          <p:cNvPr id="11" name=""/>
-          <p:cNvSpPr txBox="1"/>
-          <p:nvPr/>
-        </p:nvSpPr>
-        <p:spPr>
-          <a:xfrm>
-            <a:off x="857250" y="5381625"/>
-            <a:ext cx="933450" cy="247650"/>
-          </a:xfrm>
-          <a:prstGeom prst="rect">
-            <a:avLst/>
-          </a:prstGeom>
-          <a:noFill/>
-          <a:ln/>
-        </p:spPr>
-        <p:txBody>
-          <a:bodyPr wrap="square" lIns="0" tIns="0" rIns="0" bIns="0" anchor="ctr"/>
-          <a:lstStyle/>
-          <a:p>
-            <a:pPr/>
-            <a:r>
-              <a:rPr sz="1350" b="1">
-                <a:solidFill>
-                  <a:srgbClr val="C8401A"/>
-                </a:solidFill>
-                <a:latin typeface="Noto Sans JP"/>
-                <a:ea typeface="Noto Sans JP"/>
-              </a:rPr>
-              <a:t>ヒント</a:t>
-            </a:r>
-          </a:p>
-        </p:txBody>
-      </p:sp>
-      <p:sp>
-        <p:nvSpPr>
-          <p:cNvPr id="12" name=""/>
-          <p:cNvSpPr txBox="1"/>
-          <p:nvPr/>
-        </p:nvSpPr>
-        <p:spPr>
-          <a:xfrm>
-            <a:off x="1847850" y="5314950"/>
-            <a:ext cx="3714750" cy="381000"/>
-          </a:xfrm>
-          <a:prstGeom prst="rect">
-            <a:avLst/>
-          </a:prstGeom>
-          <a:noFill/>
-          <a:ln/>
-        </p:spPr>
-        <p:txBody>
-          <a:bodyPr wrap="square" lIns="0" tIns="0" rIns="0" bIns="0" anchor="ctr"/>
-          <a:lstStyle/>
-          <a:p>
-            <a:pPr/>
-            <a:r>
-              <a:rPr sz="2100" b="1">
-                <a:solidFill>
-                  <a:srgbClr val="1C2340"/>
-                </a:solidFill>
-                <a:latin typeface="Noto Sans JP"/>
-                <a:ea typeface="Noto Sans JP"/>
-              </a:rPr>
-              <a:t>冠詞はいる？いらない？</a:t>
-            </a:r>
-          </a:p>
-        </p:txBody>
-      </p:sp>
     </p:spTree>
   </p:cSld>
   <p:clrMapOvr>
@@ -21232,98 +20621,6 @@
           </a:p>
         </p:txBody>
       </p:sp>
-      <p:sp>
-        <p:nvSpPr>
-          <p:cNvPr id="10" name=""/>
-          <p:cNvSpPr/>
-          <p:nvPr/>
-        </p:nvSpPr>
-        <p:spPr>
-          <a:xfrm>
-            <a:off x="685800" y="5324475"/>
-            <a:ext cx="857250" cy="371475"/>
-          </a:xfrm>
-          <a:prstGeom prst="roundRect">
-            <a:avLst>
-              <a:gd name="adj" fmla="val 50000"/>
-            </a:avLst>
-          </a:prstGeom>
-          <a:solidFill>
-            <a:srgbClr val="FFE3D8"/>
-          </a:solidFill>
-          <a:ln/>
-        </p:spPr>
-      </p:sp>
-      <p:sp>
-        <p:nvSpPr>
-          <p:cNvPr id="11" name=""/>
-          <p:cNvSpPr txBox="1"/>
-          <p:nvPr/>
-        </p:nvSpPr>
-        <p:spPr>
-          <a:xfrm>
-            <a:off x="857250" y="5381625"/>
-            <a:ext cx="933450" cy="247650"/>
-          </a:xfrm>
-          <a:prstGeom prst="rect">
-            <a:avLst/>
-          </a:prstGeom>
-          <a:noFill/>
-          <a:ln/>
-        </p:spPr>
-        <p:txBody>
-          <a:bodyPr wrap="square" lIns="0" tIns="0" rIns="0" bIns="0" anchor="ctr"/>
-          <a:lstStyle/>
-          <a:p>
-            <a:pPr/>
-            <a:r>
-              <a:rPr sz="1350" b="1">
-                <a:solidFill>
-                  <a:srgbClr val="C8401A"/>
-                </a:solidFill>
-                <a:latin typeface="Noto Sans JP"/>
-                <a:ea typeface="Noto Sans JP"/>
-              </a:rPr>
-              <a:t>ヒント</a:t>
-            </a:r>
-          </a:p>
-        </p:txBody>
-      </p:sp>
-      <p:sp>
-        <p:nvSpPr>
-          <p:cNvPr id="12" name=""/>
-          <p:cNvSpPr txBox="1"/>
-          <p:nvPr/>
-        </p:nvSpPr>
-        <p:spPr>
-          <a:xfrm>
-            <a:off x="1847850" y="5314950"/>
-            <a:ext cx="3714750" cy="381000"/>
-          </a:xfrm>
-          <a:prstGeom prst="rect">
-            <a:avLst/>
-          </a:prstGeom>
-          <a:noFill/>
-          <a:ln/>
-        </p:spPr>
-        <p:txBody>
-          <a:bodyPr wrap="square" lIns="0" tIns="0" rIns="0" bIns="0" anchor="ctr"/>
-          <a:lstStyle/>
-          <a:p>
-            <a:pPr/>
-            <a:r>
-              <a:rPr sz="2100" b="1">
-                <a:solidFill>
-                  <a:srgbClr val="1C2340"/>
-                </a:solidFill>
-                <a:latin typeface="Noto Sans JP"/>
-                <a:ea typeface="Noto Sans JP"/>
-              </a:rPr>
-              <a:t>冠詞はいる？いらない？</a:t>
-            </a:r>
-          </a:p>
-        </p:txBody>
-      </p:sp>
     </p:spTree>
   </p:cSld>
   <p:clrMapOvr>
@@ -22057,98 +21354,6 @@
           </a:p>
         </p:txBody>
       </p:sp>
-      <p:sp>
-        <p:nvSpPr>
-          <p:cNvPr id="10" name=""/>
-          <p:cNvSpPr/>
-          <p:nvPr/>
-        </p:nvSpPr>
-        <p:spPr>
-          <a:xfrm>
-            <a:off x="685800" y="5324475"/>
-            <a:ext cx="857250" cy="371475"/>
-          </a:xfrm>
-          <a:prstGeom prst="roundRect">
-            <a:avLst>
-              <a:gd name="adj" fmla="val 50000"/>
-            </a:avLst>
-          </a:prstGeom>
-          <a:solidFill>
-            <a:srgbClr val="FFE3D8"/>
-          </a:solidFill>
-          <a:ln/>
-        </p:spPr>
-      </p:sp>
-      <p:sp>
-        <p:nvSpPr>
-          <p:cNvPr id="11" name=""/>
-          <p:cNvSpPr txBox="1"/>
-          <p:nvPr/>
-        </p:nvSpPr>
-        <p:spPr>
-          <a:xfrm>
-            <a:off x="857250" y="5381625"/>
-            <a:ext cx="933450" cy="247650"/>
-          </a:xfrm>
-          <a:prstGeom prst="rect">
-            <a:avLst/>
-          </a:prstGeom>
-          <a:noFill/>
-          <a:ln/>
-        </p:spPr>
-        <p:txBody>
-          <a:bodyPr wrap="square" lIns="0" tIns="0" rIns="0" bIns="0" anchor="ctr"/>
-          <a:lstStyle/>
-          <a:p>
-            <a:pPr/>
-            <a:r>
-              <a:rPr sz="1350" b="1">
-                <a:solidFill>
-                  <a:srgbClr val="C8401A"/>
-                </a:solidFill>
-                <a:latin typeface="Noto Sans JP"/>
-                <a:ea typeface="Noto Sans JP"/>
-              </a:rPr>
-              <a:t>ヒント</a:t>
-            </a:r>
-          </a:p>
-        </p:txBody>
-      </p:sp>
-      <p:sp>
-        <p:nvSpPr>
-          <p:cNvPr id="12" name=""/>
-          <p:cNvSpPr txBox="1"/>
-          <p:nvPr/>
-        </p:nvSpPr>
-        <p:spPr>
-          <a:xfrm>
-            <a:off x="1847850" y="5314950"/>
-            <a:ext cx="3714750" cy="381000"/>
-          </a:xfrm>
-          <a:prstGeom prst="rect">
-            <a:avLst/>
-          </a:prstGeom>
-          <a:noFill/>
-          <a:ln/>
-        </p:spPr>
-        <p:txBody>
-          <a:bodyPr wrap="square" lIns="0" tIns="0" rIns="0" bIns="0" anchor="ctr"/>
-          <a:lstStyle/>
-          <a:p>
-            <a:pPr/>
-            <a:r>
-              <a:rPr sz="2100" b="1">
-                <a:solidFill>
-                  <a:srgbClr val="1C2340"/>
-                </a:solidFill>
-                <a:latin typeface="Noto Sans JP"/>
-                <a:ea typeface="Noto Sans JP"/>
-              </a:rPr>
-              <a:t>冠詞はいる？いらない？</a:t>
-            </a:r>
-          </a:p>
-        </p:txBody>
-      </p:sp>
     </p:spTree>
   </p:cSld>
   <p:clrMapOvr>
@@ -22871,98 +22076,6 @@
           </a:p>
         </p:txBody>
       </p:sp>
-      <p:sp>
-        <p:nvSpPr>
-          <p:cNvPr id="10" name=""/>
-          <p:cNvSpPr/>
-          <p:nvPr/>
-        </p:nvSpPr>
-        <p:spPr>
-          <a:xfrm>
-            <a:off x="685800" y="5324475"/>
-            <a:ext cx="857250" cy="371475"/>
-          </a:xfrm>
-          <a:prstGeom prst="roundRect">
-            <a:avLst>
-              <a:gd name="adj" fmla="val 50000"/>
-            </a:avLst>
-          </a:prstGeom>
-          <a:solidFill>
-            <a:srgbClr val="FFE3D8"/>
-          </a:solidFill>
-          <a:ln/>
-        </p:spPr>
-      </p:sp>
-      <p:sp>
-        <p:nvSpPr>
-          <p:cNvPr id="11" name=""/>
-          <p:cNvSpPr txBox="1"/>
-          <p:nvPr/>
-        </p:nvSpPr>
-        <p:spPr>
-          <a:xfrm>
-            <a:off x="857250" y="5381625"/>
-            <a:ext cx="933450" cy="247650"/>
-          </a:xfrm>
-          <a:prstGeom prst="rect">
-            <a:avLst/>
-          </a:prstGeom>
-          <a:noFill/>
-          <a:ln/>
-        </p:spPr>
-        <p:txBody>
-          <a:bodyPr wrap="square" lIns="0" tIns="0" rIns="0" bIns="0" anchor="ctr"/>
-          <a:lstStyle/>
-          <a:p>
-            <a:pPr/>
-            <a:r>
-              <a:rPr sz="1350" b="1">
-                <a:solidFill>
-                  <a:srgbClr val="C8401A"/>
-                </a:solidFill>
-                <a:latin typeface="Noto Sans JP"/>
-                <a:ea typeface="Noto Sans JP"/>
-              </a:rPr>
-              <a:t>ヒント</a:t>
-            </a:r>
-          </a:p>
-        </p:txBody>
-      </p:sp>
-      <p:sp>
-        <p:nvSpPr>
-          <p:cNvPr id="12" name=""/>
-          <p:cNvSpPr txBox="1"/>
-          <p:nvPr/>
-        </p:nvSpPr>
-        <p:spPr>
-          <a:xfrm>
-            <a:off x="1847850" y="5314950"/>
-            <a:ext cx="3714750" cy="381000"/>
-          </a:xfrm>
-          <a:prstGeom prst="rect">
-            <a:avLst/>
-          </a:prstGeom>
-          <a:noFill/>
-          <a:ln/>
-        </p:spPr>
-        <p:txBody>
-          <a:bodyPr wrap="square" lIns="0" tIns="0" rIns="0" bIns="0" anchor="ctr"/>
-          <a:lstStyle/>
-          <a:p>
-            <a:pPr/>
-            <a:r>
-              <a:rPr sz="2100" b="1">
-                <a:solidFill>
-                  <a:srgbClr val="1C2340"/>
-                </a:solidFill>
-                <a:latin typeface="Noto Sans JP"/>
-                <a:ea typeface="Noto Sans JP"/>
-              </a:rPr>
-              <a:t>冠詞はいる？いらない？</a:t>
-            </a:r>
-          </a:p>
-        </p:txBody>
-      </p:sp>
     </p:spTree>
   </p:cSld>
   <p:clrMapOvr>
@@ -24484,98 +23597,6 @@
           </a:p>
         </p:txBody>
       </p:sp>
-      <p:sp>
-        <p:nvSpPr>
-          <p:cNvPr id="10" name=""/>
-          <p:cNvSpPr/>
-          <p:nvPr/>
-        </p:nvSpPr>
-        <p:spPr>
-          <a:xfrm>
-            <a:off x="685800" y="5324475"/>
-            <a:ext cx="857250" cy="371475"/>
-          </a:xfrm>
-          <a:prstGeom prst="roundRect">
-            <a:avLst>
-              <a:gd name="adj" fmla="val 50000"/>
-            </a:avLst>
-          </a:prstGeom>
-          <a:solidFill>
-            <a:srgbClr val="FFE3D8"/>
-          </a:solidFill>
-          <a:ln/>
-        </p:spPr>
-      </p:sp>
-      <p:sp>
-        <p:nvSpPr>
-          <p:cNvPr id="11" name=""/>
-          <p:cNvSpPr txBox="1"/>
-          <p:nvPr/>
-        </p:nvSpPr>
-        <p:spPr>
-          <a:xfrm>
-            <a:off x="857250" y="5381625"/>
-            <a:ext cx="933450" cy="247650"/>
-          </a:xfrm>
-          <a:prstGeom prst="rect">
-            <a:avLst/>
-          </a:prstGeom>
-          <a:noFill/>
-          <a:ln/>
-        </p:spPr>
-        <p:txBody>
-          <a:bodyPr wrap="square" lIns="0" tIns="0" rIns="0" bIns="0" anchor="ctr"/>
-          <a:lstStyle/>
-          <a:p>
-            <a:pPr/>
-            <a:r>
-              <a:rPr sz="1350" b="1">
-                <a:solidFill>
-                  <a:srgbClr val="C8401A"/>
-                </a:solidFill>
-                <a:latin typeface="Noto Sans JP"/>
-                <a:ea typeface="Noto Sans JP"/>
-              </a:rPr>
-              <a:t>ヒント</a:t>
-            </a:r>
-          </a:p>
-        </p:txBody>
-      </p:sp>
-      <p:sp>
-        <p:nvSpPr>
-          <p:cNvPr id="12" name=""/>
-          <p:cNvSpPr txBox="1"/>
-          <p:nvPr/>
-        </p:nvSpPr>
-        <p:spPr>
-          <a:xfrm>
-            <a:off x="1847850" y="5314950"/>
-            <a:ext cx="3714750" cy="381000"/>
-          </a:xfrm>
-          <a:prstGeom prst="rect">
-            <a:avLst/>
-          </a:prstGeom>
-          <a:noFill/>
-          <a:ln/>
-        </p:spPr>
-        <p:txBody>
-          <a:bodyPr wrap="square" lIns="0" tIns="0" rIns="0" bIns="0" anchor="ctr"/>
-          <a:lstStyle/>
-          <a:p>
-            <a:pPr/>
-            <a:r>
-              <a:rPr sz="2100" b="1">
-                <a:solidFill>
-                  <a:srgbClr val="1C2340"/>
-                </a:solidFill>
-                <a:latin typeface="Noto Sans JP"/>
-                <a:ea typeface="Noto Sans JP"/>
-              </a:rPr>
-              <a:t>冠詞はいる？いらない？</a:t>
-            </a:r>
-          </a:p>
-        </p:txBody>
-      </p:sp>
     </p:spTree>
   </p:cSld>
   <p:clrMapOvr>
@@ -25284,98 +24305,6 @@
           </a:p>
         </p:txBody>
       </p:sp>
-      <p:sp>
-        <p:nvSpPr>
-          <p:cNvPr id="10" name=""/>
-          <p:cNvSpPr/>
-          <p:nvPr/>
-        </p:nvSpPr>
-        <p:spPr>
-          <a:xfrm>
-            <a:off x="685800" y="5324475"/>
-            <a:ext cx="857250" cy="371475"/>
-          </a:xfrm>
-          <a:prstGeom prst="roundRect">
-            <a:avLst>
-              <a:gd name="adj" fmla="val 50000"/>
-            </a:avLst>
-          </a:prstGeom>
-          <a:solidFill>
-            <a:srgbClr val="FFE3D8"/>
-          </a:solidFill>
-          <a:ln/>
-        </p:spPr>
-      </p:sp>
-      <p:sp>
-        <p:nvSpPr>
-          <p:cNvPr id="11" name=""/>
-          <p:cNvSpPr txBox="1"/>
-          <p:nvPr/>
-        </p:nvSpPr>
-        <p:spPr>
-          <a:xfrm>
-            <a:off x="857250" y="5381625"/>
-            <a:ext cx="933450" cy="247650"/>
-          </a:xfrm>
-          <a:prstGeom prst="rect">
-            <a:avLst/>
-          </a:prstGeom>
-          <a:noFill/>
-          <a:ln/>
-        </p:spPr>
-        <p:txBody>
-          <a:bodyPr wrap="square" lIns="0" tIns="0" rIns="0" bIns="0" anchor="ctr"/>
-          <a:lstStyle/>
-          <a:p>
-            <a:pPr/>
-            <a:r>
-              <a:rPr sz="1350" b="1">
-                <a:solidFill>
-                  <a:srgbClr val="C8401A"/>
-                </a:solidFill>
-                <a:latin typeface="Noto Sans JP"/>
-                <a:ea typeface="Noto Sans JP"/>
-              </a:rPr>
-              <a:t>ヒント</a:t>
-            </a:r>
-          </a:p>
-        </p:txBody>
-      </p:sp>
-      <p:sp>
-        <p:nvSpPr>
-          <p:cNvPr id="12" name=""/>
-          <p:cNvSpPr txBox="1"/>
-          <p:nvPr/>
-        </p:nvSpPr>
-        <p:spPr>
-          <a:xfrm>
-            <a:off x="1847850" y="5314950"/>
-            <a:ext cx="3714750" cy="381000"/>
-          </a:xfrm>
-          <a:prstGeom prst="rect">
-            <a:avLst/>
-          </a:prstGeom>
-          <a:noFill/>
-          <a:ln/>
-        </p:spPr>
-        <p:txBody>
-          <a:bodyPr wrap="square" lIns="0" tIns="0" rIns="0" bIns="0" anchor="ctr"/>
-          <a:lstStyle/>
-          <a:p>
-            <a:pPr/>
-            <a:r>
-              <a:rPr sz="2100" b="1">
-                <a:solidFill>
-                  <a:srgbClr val="1C2340"/>
-                </a:solidFill>
-                <a:latin typeface="Noto Sans JP"/>
-                <a:ea typeface="Noto Sans JP"/>
-              </a:rPr>
-              <a:t>冠詞はいる？いらない？</a:t>
-            </a:r>
-          </a:p>
-        </p:txBody>
-      </p:sp>
     </p:spTree>
   </p:cSld>
   <p:clrMapOvr>
@@ -26084,98 +25013,6 @@
           </a:p>
         </p:txBody>
       </p:sp>
-      <p:sp>
-        <p:nvSpPr>
-          <p:cNvPr id="10" name=""/>
-          <p:cNvSpPr/>
-          <p:nvPr/>
-        </p:nvSpPr>
-        <p:spPr>
-          <a:xfrm>
-            <a:off x="685800" y="5324475"/>
-            <a:ext cx="857250" cy="371475"/>
-          </a:xfrm>
-          <a:prstGeom prst="roundRect">
-            <a:avLst>
-              <a:gd name="adj" fmla="val 50000"/>
-            </a:avLst>
-          </a:prstGeom>
-          <a:solidFill>
-            <a:srgbClr val="FFE3D8"/>
-          </a:solidFill>
-          <a:ln/>
-        </p:spPr>
-      </p:sp>
-      <p:sp>
-        <p:nvSpPr>
-          <p:cNvPr id="11" name=""/>
-          <p:cNvSpPr txBox="1"/>
-          <p:nvPr/>
-        </p:nvSpPr>
-        <p:spPr>
-          <a:xfrm>
-            <a:off x="857250" y="5381625"/>
-            <a:ext cx="933450" cy="247650"/>
-          </a:xfrm>
-          <a:prstGeom prst="rect">
-            <a:avLst/>
-          </a:prstGeom>
-          <a:noFill/>
-          <a:ln/>
-        </p:spPr>
-        <p:txBody>
-          <a:bodyPr wrap="square" lIns="0" tIns="0" rIns="0" bIns="0" anchor="ctr"/>
-          <a:lstStyle/>
-          <a:p>
-            <a:pPr/>
-            <a:r>
-              <a:rPr sz="1350" b="1">
-                <a:solidFill>
-                  <a:srgbClr val="C8401A"/>
-                </a:solidFill>
-                <a:latin typeface="Noto Sans JP"/>
-                <a:ea typeface="Noto Sans JP"/>
-              </a:rPr>
-              <a:t>ヒント</a:t>
-            </a:r>
-          </a:p>
-        </p:txBody>
-      </p:sp>
-      <p:sp>
-        <p:nvSpPr>
-          <p:cNvPr id="12" name=""/>
-          <p:cNvSpPr txBox="1"/>
-          <p:nvPr/>
-        </p:nvSpPr>
-        <p:spPr>
-          <a:xfrm>
-            <a:off x="1847850" y="5314950"/>
-            <a:ext cx="3714750" cy="381000"/>
-          </a:xfrm>
-          <a:prstGeom prst="rect">
-            <a:avLst/>
-          </a:prstGeom>
-          <a:noFill/>
-          <a:ln/>
-        </p:spPr>
-        <p:txBody>
-          <a:bodyPr wrap="square" lIns="0" tIns="0" rIns="0" bIns="0" anchor="ctr"/>
-          <a:lstStyle/>
-          <a:p>
-            <a:pPr/>
-            <a:r>
-              <a:rPr sz="2100" b="1">
-                <a:solidFill>
-                  <a:srgbClr val="1C2340"/>
-                </a:solidFill>
-                <a:latin typeface="Noto Sans JP"/>
-                <a:ea typeface="Noto Sans JP"/>
-              </a:rPr>
-              <a:t>冠詞はいる？いらない？</a:t>
-            </a:r>
-          </a:p>
-        </p:txBody>
-      </p:sp>
     </p:spTree>
   </p:cSld>
   <p:clrMapOvr>
@@ -28052,98 +26889,6 @@
                 <a:ea typeface="Noto Sans JP"/>
               </a:rPr>
               <a:t>彼は大学生です。</a:t>
-            </a:r>
-          </a:p>
-        </p:txBody>
-      </p:sp>
-      <p:sp>
-        <p:nvSpPr>
-          <p:cNvPr id="10" name=""/>
-          <p:cNvSpPr/>
-          <p:nvPr/>
-        </p:nvSpPr>
-        <p:spPr>
-          <a:xfrm>
-            <a:off x="685800" y="5324475"/>
-            <a:ext cx="857250" cy="371475"/>
-          </a:xfrm>
-          <a:prstGeom prst="roundRect">
-            <a:avLst>
-              <a:gd name="adj" fmla="val 50000"/>
-            </a:avLst>
-          </a:prstGeom>
-          <a:solidFill>
-            <a:srgbClr val="FFE3D8"/>
-          </a:solidFill>
-          <a:ln/>
-        </p:spPr>
-      </p:sp>
-      <p:sp>
-        <p:nvSpPr>
-          <p:cNvPr id="11" name=""/>
-          <p:cNvSpPr txBox="1"/>
-          <p:nvPr/>
-        </p:nvSpPr>
-        <p:spPr>
-          <a:xfrm>
-            <a:off x="857250" y="5381625"/>
-            <a:ext cx="933450" cy="247650"/>
-          </a:xfrm>
-          <a:prstGeom prst="rect">
-            <a:avLst/>
-          </a:prstGeom>
-          <a:noFill/>
-          <a:ln/>
-        </p:spPr>
-        <p:txBody>
-          <a:bodyPr wrap="square" lIns="0" tIns="0" rIns="0" bIns="0" anchor="ctr"/>
-          <a:lstStyle/>
-          <a:p>
-            <a:pPr/>
-            <a:r>
-              <a:rPr sz="1350" b="1">
-                <a:solidFill>
-                  <a:srgbClr val="C8401A"/>
-                </a:solidFill>
-                <a:latin typeface="Noto Sans JP"/>
-                <a:ea typeface="Noto Sans JP"/>
-              </a:rPr>
-              <a:t>ヒント</a:t>
-            </a:r>
-          </a:p>
-        </p:txBody>
-      </p:sp>
-      <p:sp>
-        <p:nvSpPr>
-          <p:cNvPr id="12" name=""/>
-          <p:cNvSpPr txBox="1"/>
-          <p:nvPr/>
-        </p:nvSpPr>
-        <p:spPr>
-          <a:xfrm>
-            <a:off x="1847850" y="5314950"/>
-            <a:ext cx="3714750" cy="381000"/>
-          </a:xfrm>
-          <a:prstGeom prst="rect">
-            <a:avLst/>
-          </a:prstGeom>
-          <a:noFill/>
-          <a:ln/>
-        </p:spPr>
-        <p:txBody>
-          <a:bodyPr wrap="square" lIns="0" tIns="0" rIns="0" bIns="0" anchor="ctr"/>
-          <a:lstStyle/>
-          <a:p>
-            <a:pPr/>
-            <a:r>
-              <a:rPr sz="2100" b="1">
-                <a:solidFill>
-                  <a:srgbClr val="1C2340"/>
-                </a:solidFill>
-                <a:latin typeface="Noto Sans JP"/>
-                <a:ea typeface="Noto Sans JP"/>
-              </a:rPr>
-              <a:t>冠詞はいる？いらない？</a:t>
             </a:r>
           </a:p>
         </p:txBody>

--- a/matome/articles-4/articles-4-slides.pptx
+++ b/matome/articles-4/articles-4-slides.pptx
@@ -5386,131 +5386,6 @@
           </a:p>
         </p:txBody>
       </p:sp>
-      <p:sp>
-        <p:nvSpPr>
-          <p:cNvPr id="10" name=""/>
-          <p:cNvSpPr/>
-          <p:nvPr/>
-        </p:nvSpPr>
-        <p:spPr>
-          <a:xfrm>
-            <a:off x="685800" y="5324475"/>
-            <a:ext cx="857250" cy="371475"/>
-          </a:xfrm>
-          <a:prstGeom prst="roundRect">
-            <a:avLst>
-              <a:gd name="adj" fmla="val 50000"/>
-            </a:avLst>
-          </a:prstGeom>
-          <a:solidFill>
-            <a:srgbClr val="FFE3D8"/>
-          </a:solidFill>
-          <a:ln/>
-        </p:spPr>
-      </p:sp>
-      <p:sp>
-        <p:nvSpPr>
-          <p:cNvPr id="11" name=""/>
-          <p:cNvSpPr txBox="1"/>
-          <p:nvPr/>
-        </p:nvSpPr>
-        <p:spPr>
-          <a:xfrm>
-            <a:off x="857250" y="5381625"/>
-            <a:ext cx="933450" cy="247650"/>
-          </a:xfrm>
-          <a:prstGeom prst="rect">
-            <a:avLst/>
-          </a:prstGeom>
-          <a:noFill/>
-          <a:ln/>
-        </p:spPr>
-        <p:txBody>
-          <a:bodyPr wrap="square" lIns="0" tIns="0" rIns="0" bIns="0" anchor="ctr"/>
-          <a:lstStyle/>
-          <a:p>
-            <a:pPr/>
-            <a:r>
-              <a:rPr sz="1350" b="1">
-                <a:solidFill>
-                  <a:srgbClr val="C8401A"/>
-                </a:solidFill>
-                <a:latin typeface="Noto Sans JP"/>
-                <a:ea typeface="Noto Sans JP"/>
-              </a:rPr>
-              <a:t>ヒント</a:t>
-            </a:r>
-          </a:p>
-        </p:txBody>
-      </p:sp>
-      <p:sp>
-        <p:nvSpPr>
-          <p:cNvPr id="12" name=""/>
-          <p:cNvSpPr txBox="1"/>
-          <p:nvPr/>
-        </p:nvSpPr>
-        <p:spPr>
-          <a:xfrm>
-            <a:off x="1847850" y="5314950"/>
-            <a:ext cx="3419475" cy="390525"/>
-          </a:xfrm>
-          <a:prstGeom prst="rect">
-            <a:avLst/>
-          </a:prstGeom>
-          <a:noFill/>
-          <a:ln/>
-        </p:spPr>
-        <p:txBody>
-          <a:bodyPr wrap="square" lIns="0" tIns="0" rIns="0" bIns="0" anchor="ctr"/>
-          <a:lstStyle/>
-          <a:p>
-            <a:pPr/>
-            <a:r>
-              <a:rPr sz="2100" b="1">
-                <a:solidFill>
-                  <a:srgbClr val="1C2340"/>
-                </a:solidFill>
-                <a:latin typeface="DM Sans"/>
-                <a:ea typeface="DM Sans"/>
-              </a:rPr>
-              <a:t>Can I have </a:t>
-            </a:r>
-            <a:pPr/>
-            <a:r>
-              <a:rPr sz="2100" b="1">
-                <a:solidFill>
-                  <a:srgbClr val="1C2340"/>
-                </a:solidFill>
-                <a:latin typeface="Noto Sans JP"/>
-                <a:ea typeface="Noto Sans JP"/>
-              </a:rPr>
-              <a:t>〜</a:t>
-            </a:r>
-            <a:pPr/>
-            <a:r>
-              <a:rPr sz="2100" b="1">
-                <a:solidFill>
-                  <a:srgbClr val="1C2340"/>
-                </a:solidFill>
-                <a:latin typeface="DM Sans"/>
-                <a:ea typeface="DM Sans"/>
-              </a:rPr>
-              <a:t>?</a:t>
-            </a:r>
-            <a:pPr/>
-            <a:r>
-              <a:rPr sz="2100" b="1">
-                <a:solidFill>
-                  <a:srgbClr val="1C2340"/>
-                </a:solidFill>
-                <a:latin typeface="Noto Sans JP"/>
-                <a:ea typeface="Noto Sans JP"/>
-              </a:rPr>
-              <a:t> の形で</a:t>
-            </a:r>
-          </a:p>
-        </p:txBody>
-      </p:sp>
     </p:spTree>
   </p:cSld>
   <p:clrMapOvr>
@@ -6726,7 +6601,7 @@
         </p:nvSpPr>
         <p:spPr>
           <a:xfrm>
-            <a:off x="3162300" y="2676525"/>
+            <a:off x="3162300" y="2066925"/>
             <a:ext cx="6181725" cy="495300"/>
           </a:xfrm>
           <a:prstGeom prst="rect">
@@ -6783,7 +6658,110 @@
         </p:nvSpPr>
         <p:spPr>
           <a:xfrm>
-            <a:off x="3162300" y="3333750"/>
+            <a:off x="3162300" y="2676525"/>
+            <a:ext cx="3848100" cy="495300"/>
+          </a:xfrm>
+          <a:prstGeom prst="rect">
+            <a:avLst/>
+          </a:prstGeom>
+          <a:noFill/>
+          <a:ln/>
+        </p:spPr>
+        <p:txBody>
+          <a:bodyPr wrap="square" lIns="0" tIns="0" rIns="0" bIns="0" anchor="ctr"/>
+          <a:lstStyle/>
+          <a:p>
+            <a:pPr/>
+            <a:r>
+              <a:rPr sz="3000" b="1">
+                <a:solidFill>
+                  <a:srgbClr val="E8461E"/>
+                </a:solidFill>
+                <a:latin typeface="DM Sans"/>
+                <a:ea typeface="DM Sans"/>
+              </a:rPr>
+              <a:t>A</a:t>
+            </a:r>
+            <a:pPr/>
+            <a:r>
+              <a:rPr sz="3000" b="1">
+                <a:solidFill>
+                  <a:srgbClr val="1C2340"/>
+                </a:solidFill>
+                <a:latin typeface="DM Sans"/>
+                <a:ea typeface="DM Sans"/>
+              </a:rPr>
+              <a:t> coffee, please.</a:t>
+            </a:r>
+          </a:p>
+        </p:txBody>
+      </p:sp>
+      <p:sp>
+        <p:nvSpPr>
+          <p:cNvPr id="11" name=""/>
+          <p:cNvSpPr txBox="1"/>
+          <p:nvPr/>
+        </p:nvSpPr>
+        <p:spPr>
+          <a:xfrm>
+            <a:off x="3162300" y="3286125"/>
+            <a:ext cx="5191125" cy="495300"/>
+          </a:xfrm>
+          <a:prstGeom prst="rect">
+            <a:avLst/>
+          </a:prstGeom>
+          <a:noFill/>
+          <a:ln/>
+        </p:spPr>
+        <p:txBody>
+          <a:bodyPr wrap="square" lIns="0" tIns="0" rIns="0" bIns="0" anchor="ctr"/>
+          <a:lstStyle/>
+          <a:p>
+            <a:pPr/>
+            <a:r>
+              <a:rPr sz="3000" b="1">
+                <a:solidFill>
+                  <a:srgbClr val="1C2340"/>
+                </a:solidFill>
+                <a:latin typeface="DM Sans"/>
+                <a:ea typeface="DM Sans"/>
+              </a:rPr>
+              <a:t>I'd like </a:t>
+            </a:r>
+            <a:pPr/>
+            <a:r>
+              <a:rPr sz="3000" b="1">
+                <a:solidFill>
+                  <a:srgbClr val="E8461E"/>
+                </a:solidFill>
+                <a:latin typeface="DM Sans"/>
+                <a:ea typeface="DM Sans"/>
+              </a:rPr>
+              <a:t>a</a:t>
+            </a:r>
+            <a:pPr/>
+            <a:r>
+              <a:rPr sz="3000" b="1">
+                <a:solidFill>
+                  <a:srgbClr val="1C2340"/>
+                </a:solidFill>
+                <a:latin typeface="DM Sans"/>
+                <a:ea typeface="DM Sans"/>
+              </a:rPr>
+              <a:t> coffee, please.</a:t>
+            </a:r>
+          </a:p>
+        </p:txBody>
+      </p:sp>
+      <p:sp>
+        <p:nvSpPr>
+          <p:cNvPr id="12" name=""/>
+          <p:cNvSpPr txBox="1"/>
+          <p:nvPr/>
+        </p:nvSpPr>
+        <p:spPr>
+          <a:xfrm>
+            <a:off x="3162300" y="3943350"/>
             <a:ext cx="3133725" cy="304800"/>
           </a:xfrm>
           <a:prstGeom prst="rect">
@@ -6812,7 +6790,7 @@
       </p:sp>
       <p:sp>
         <p:nvSpPr>
-          <p:cNvPr id="11" name=""/>
+          <p:cNvPr id="13" name=""/>
           <p:cNvSpPr/>
           <p:nvPr/>
         </p:nvSpPr>
@@ -6834,7 +6812,7 @@
       </p:sp>
       <p:sp>
         <p:nvSpPr>
-          <p:cNvPr id="12" name=""/>
+          <p:cNvPr id="14" name=""/>
           <p:cNvSpPr/>
           <p:nvPr/>
         </p:nvSpPr>
@@ -6856,7 +6834,7 @@
       </p:sp>
       <p:sp>
         <p:nvSpPr>
-          <p:cNvPr id="13" name=""/>
+          <p:cNvPr id="15" name=""/>
           <p:cNvSpPr txBox="1"/>
           <p:nvPr/>
         </p:nvSpPr>
@@ -6891,14 +6869,14 @@
       </p:sp>
       <p:sp>
         <p:nvSpPr>
-          <p:cNvPr id="14" name=""/>
+          <p:cNvPr id="16" name=""/>
           <p:cNvSpPr txBox="1"/>
           <p:nvPr/>
         </p:nvSpPr>
         <p:spPr>
           <a:xfrm>
             <a:off x="2152650" y="5343525"/>
-            <a:ext cx="4629150" cy="333375"/>
+            <a:ext cx="7115175" cy="333375"/>
           </a:xfrm>
           <a:prstGeom prst="rect">
             <a:avLst/>
@@ -6919,7 +6897,7 @@
                 <a:latin typeface="Noto Sans JP"/>
                 <a:ea typeface="Noto Sans JP"/>
               </a:rPr>
-              <a:t>「コーヒー1杯」として数えるので </a:t>
+              <a:t>言い方はどれでも○。「コーヒー1杯」として数えるので </a:t>
             </a:r>
             <a:pPr/>
             <a:r>

--- a/matome/articles-4/articles-4-slides.pptx
+++ b/matome/articles-4/articles-4-slides.pptx
@@ -499,7 +499,7 @@
         <p:spPr>
           <a:xfrm>
             <a:off x="419100" y="419100"/>
-            <a:ext cx="11353800" cy="6019800"/>
+            <a:ext cx="7705725" cy="6019800"/>
           </a:xfrm>
           <a:prstGeom prst="roundRect">
             <a:avLst>
@@ -520,7 +520,7 @@
         </p:nvSpPr>
         <p:spPr>
           <a:xfrm>
-            <a:off x="1181100" y="2047875"/>
+            <a:off x="990600" y="2190750"/>
             <a:ext cx="2076450" cy="304800"/>
           </a:xfrm>
           <a:prstGeom prst="rect">
@@ -555,22 +555,22 @@
         </p:nvSpPr>
         <p:spPr>
           <a:xfrm>
-            <a:off x="1181100" y="2162175"/>
-            <a:ext cx="8248650" cy="2314575"/>
-          </a:xfrm>
-          <a:prstGeom prst="rect">
-            <a:avLst/>
-          </a:prstGeom>
-          <a:noFill/>
-          <a:ln/>
-        </p:spPr>
-        <p:txBody>
-          <a:bodyPr wrap="square" lIns="0" tIns="0" rIns="0" bIns="0" anchor="ctr"/>
-          <a:lstStyle/>
-          <a:p>
-            <a:pPr/>
-            <a:r>
-              <a:rPr sz="12600" b="1">
+            <a:off x="990600" y="2362200"/>
+            <a:ext cx="7267575" cy="1924050"/>
+          </a:xfrm>
+          <a:prstGeom prst="rect">
+            <a:avLst/>
+          </a:prstGeom>
+          <a:noFill/>
+          <a:ln/>
+        </p:spPr>
+        <p:txBody>
+          <a:bodyPr wrap="square" lIns="0" tIns="0" rIns="0" bIns="0" anchor="ctr"/>
+          <a:lstStyle/>
+          <a:p>
+            <a:pPr/>
+            <a:r>
+              <a:rPr sz="10500" b="1">
                 <a:solidFill>
                   <a:srgbClr val="1C2340"/>
                 </a:solidFill>
@@ -581,7 +581,7 @@
             </a:r>
             <a:pPr/>
             <a:r>
-              <a:rPr sz="6900" b="1">
+              <a:rPr sz="6300" b="1">
                 <a:solidFill>
                   <a:srgbClr val="E8461E"/>
                 </a:solidFill>
@@ -601,7 +601,7 @@
         </p:nvSpPr>
         <p:spPr>
           <a:xfrm>
-            <a:off x="1181100" y="4371975"/>
+            <a:off x="990600" y="4229100"/>
             <a:ext cx="6705600" cy="438150"/>
           </a:xfrm>
           <a:prstGeom prst="rect">
@@ -628,30 +628,6 @@
           </a:p>
         </p:txBody>
       </p:sp>
-      <p:pic>
-        <p:nvPicPr>
-          <p:cNvPr id="6" name="Image 0" descr="/home/user/hina-english/matome/img/tile.png">    </p:cNvPr>
-          <p:cNvPicPr>
-            <a:picLocks noChangeAspect="1"/>
-          </p:cNvPicPr>
-          <p:nvPr/>
-        </p:nvPicPr>
-        <p:blipFill>
-          <a:blip r:embed="rId1"/>
-          <a:stretch>
-            <a:fillRect/>
-          </a:stretch>
-        </p:blipFill>
-        <p:spPr>
-          <a:xfrm>
-            <a:off x="7924800" y="1809750"/>
-            <a:ext cx="3238500" cy="3238500"/>
-          </a:xfrm>
-          <a:prstGeom prst="rect">
-            <a:avLst/>
-          </a:prstGeom>
-        </p:spPr>
-      </p:pic>
     </p:spTree>
   </p:cSld>
   <p:clrMapOvr>
